--- a/presentations/03_دوره_نیمه‌پیشرفته_گلف.pptx
+++ b/presentations/03_دوره_نیمه‌پیشرفته_گلف.pptx
@@ -1,6 +1,6 @@
 
 <file path=ppt/presentation.xml><?xml version="1.0" encoding="utf-8"?>
-<p:presentation xmlns:a="http://schemas.openxmlformats.org/drawingml/2006/main" xmlns:r="http://schemas.openxmlformats.org/officeDocument/2006/relationships" xmlns:p="http://schemas.openxmlformats.org/presentationml/2006/main" saveSubsetFonts="1" autoCompressPictures="0">
+<p:presentation xmlns:a="http://schemas.openxmlformats.org/drawingml/2006/main" xmlns:r="http://schemas.openxmlformats.org/officeDocument/2006/relationships" xmlns:p="http://schemas.openxmlformats.org/presentationml/2006/main" saveSubsetFonts="1" autoCompressPictures="0" embedTrueTypeFonts="1">
   <p:sldMasterIdLst>
     <p:sldMasterId id="2147483648" r:id="rId1"/>
   </p:sldMasterIdLst>
@@ -45,6 +45,13 @@
   </p:sldIdLst>
   <p:sldSz cx="12191695" cy="6858000" type="screen4x3"/>
   <p:notesSz cx="6858000" cy="9144000"/>
+  <p:embeddedFontLst>
+    <p:embeddedFont>
+      <p:font typeface="Vazirmatn" charset="178" pitchFamily="34"/>
+      <p:regular r:id="rId44"/>
+      <p:bold r:id="rId45"/>
+    </p:embeddedFont>
+  </p:embeddedFontLst>
   <p:defaultTextStyle>
     <a:defPPr>
       <a:defRPr lang="en-US"/>
@@ -3336,8 +3343,125 @@
         </p:nvSpPr>
         <p:spPr>
           <a:xfrm>
-            <a:off x="914400" y="4069080"/>
-            <a:ext cx="10362895" cy="2377440"/>
+            <a:off x="640080" y="457200"/>
+            <a:ext cx="4572000" cy="868680"/>
+          </a:xfrm>
+          <a:prstGeom prst="rect">
+            <a:avLst/>
+          </a:prstGeom>
+          <a:noFill/>
+        </p:spPr>
+        <p:txBody>
+          <a:bodyPr wrap="square" anchor="t" lIns="0" rIns="0" tIns="0" bIns="0">
+            <a:spAutoFit/>
+          </a:bodyPr>
+          <a:lstStyle/>
+          <a:p>
+            <a:pPr algn="l" rtl="1">
+              <a:lnSpc>
+                <a:spcPct val="108000"/>
+              </a:lnSpc>
+              <a:spcBef>
+                <a:spcPts val="0"/>
+              </a:spcBef>
+              <a:spcAft>
+                <a:spcPts val="0"/>
+              </a:spcAft>
+            </a:pPr>
+            <a:r>
+              <a:rPr sz="3000" b="1" i="0">
+                <a:solidFill>
+                  <a:srgbClr val="FFFFFF"/>
+                </a:solidFill>
+                <a:latin typeface="Vazirmatn"/>
+                <a:cs typeface="Vazirmatn"/>
+              </a:rPr>
+              <a:t>Puttclub</a:t>
+            </a:r>
+          </a:p>
+          <a:p>
+            <a:pPr algn="l" rtl="1">
+              <a:lnSpc>
+                <a:spcPct val="108000"/>
+              </a:lnSpc>
+              <a:spcBef>
+                <a:spcPts val="0"/>
+              </a:spcBef>
+              <a:spcAft>
+                <a:spcPts val="0"/>
+              </a:spcAft>
+            </a:pPr>
+            <a:r>
+              <a:rPr sz="1250" b="0" i="0">
+                <a:solidFill>
+                  <a:srgbClr val="D7E2D6"/>
+                </a:solidFill>
+                <a:latin typeface="Vazirmatn"/>
+                <a:cs typeface="Vazirmatn"/>
+              </a:rPr>
+              <a:t>آکادمی گلف پات‌کلاب  ·  الهام طالبی</a:t>
+            </a:r>
+          </a:p>
+        </p:txBody>
+      </p:sp>
+      <p:sp>
+        <p:nvSpPr>
+          <p:cNvPr id="8" name="Rounded Rectangle 7"/>
+          <p:cNvSpPr/>
+          <p:nvPr/>
+        </p:nvSpPr>
+        <p:spPr>
+          <a:xfrm>
+            <a:off x="8031175" y="502920"/>
+            <a:ext cx="3520440" cy="841248"/>
+          </a:xfrm>
+          <a:prstGeom prst="roundRect">
+            <a:avLst>
+              <a:gd name="adj" fmla="val 6000"/>
+            </a:avLst>
+          </a:prstGeom>
+          <a:solidFill>
+            <a:srgbClr val="FFFFFF">
+              <a:alpha val="120"/>
+            </a:srgbClr>
+          </a:solidFill>
+          <a:ln>
+            <a:noFill/>
+          </a:ln>
+          <a:effectLst/>
+        </p:spPr>
+        <p:style>
+          <a:lnRef idx="1">
+            <a:schemeClr val="accent1"/>
+          </a:lnRef>
+          <a:fillRef idx="3">
+            <a:schemeClr val="accent1"/>
+          </a:fillRef>
+          <a:effectRef idx="2">
+            <a:schemeClr val="accent1"/>
+          </a:effectRef>
+          <a:fontRef idx="minor">
+            <a:schemeClr val="lt1"/>
+          </a:fontRef>
+        </p:style>
+        <p:txBody>
+          <a:bodyPr rtlCol="0" anchor="ctr"/>
+          <a:lstStyle/>
+          <a:p>
+            <a:pPr algn="ctr"/>
+          </a:p>
+        </p:txBody>
+      </p:sp>
+      <p:sp>
+        <p:nvSpPr>
+          <p:cNvPr id="9" name="TextBox 8"/>
+          <p:cNvSpPr txBox="1"/>
+          <p:nvPr/>
+        </p:nvSpPr>
+        <p:spPr>
+          <a:xfrm>
+            <a:off x="8031175" y="548640"/>
+            <a:ext cx="3520440" cy="749808"/>
           </a:xfrm>
           <a:prstGeom prst="rect">
             <a:avLst/>
@@ -3350,7 +3474,7 @@
           </a:bodyPr>
           <a:lstStyle/>
           <a:p>
-            <a:pPr algn="r" rtl="1">
+            <a:pPr algn="ctr" rtl="1">
               <a:lnSpc>
                 <a:spcPct val="108000"/>
               </a:lnSpc>
@@ -3358,177 +3482,55 @@
                 <a:spcPts val="0"/>
               </a:spcBef>
               <a:spcAft>
-                <a:spcPts val="600"/>
-              </a:spcAft>
-            </a:pPr>
-            <a:r>
-              <a:rPr sz="1700" b="1" i="0">
+                <a:spcPts val="100"/>
+              </a:spcAft>
+            </a:pPr>
+            <a:r>
+              <a:rPr sz="1450" b="1" i="0">
+                <a:solidFill>
+                  <a:srgbClr val="FFFFFF"/>
+                </a:solidFill>
+                <a:latin typeface="Vazirmatn"/>
+                <a:cs typeface="Vazirmatn"/>
+              </a:rPr>
+              <a:t>مدرس: الهام طالبی</a:t>
+            </a:r>
+          </a:p>
+          <a:p>
+            <a:pPr algn="ctr" rtl="1">
+              <a:lnSpc>
+                <a:spcPct val="108000"/>
+              </a:lnSpc>
+              <a:spcBef>
+                <a:spcPts val="0"/>
+              </a:spcBef>
+              <a:spcAft>
+                <a:spcPts val="0"/>
+              </a:spcAft>
+            </a:pPr>
+            <a:r>
+              <a:rPr sz="1100" b="0" i="0">
                 <a:solidFill>
                   <a:srgbClr val="FFB74D"/>
                 </a:solidFill>
-                <a:latin typeface="Tahoma"/>
-                <a:cs typeface="Tahoma"/>
-              </a:rPr>
-              <a:t>آکادمی حرفه‌ای گلف  |  سطح ۳</a:t>
-            </a:r>
-          </a:p>
-          <a:p>
-            <a:pPr algn="r" rtl="1">
-              <a:lnSpc>
-                <a:spcPct val="108000"/>
-              </a:lnSpc>
-              <a:spcBef>
-                <a:spcPts val="0"/>
-              </a:spcBef>
-              <a:spcAft>
-                <a:spcPts val="600"/>
-              </a:spcAft>
-            </a:pPr>
-            <a:r>
-              <a:rPr sz="4600" b="1" i="0">
-                <a:solidFill>
-                  <a:srgbClr val="FFFFFF"/>
-                </a:solidFill>
-                <a:latin typeface="Tahoma"/>
-                <a:cs typeface="Tahoma"/>
-              </a:rPr>
-              <a:t>دوره سوم آموزش گلف — نیمه‌پیشرفته</a:t>
-            </a:r>
-          </a:p>
-          <a:p>
-            <a:pPr algn="r" rtl="1">
-              <a:lnSpc>
-                <a:spcPct val="108000"/>
-              </a:lnSpc>
-              <a:spcBef>
-                <a:spcPts val="0"/>
-              </a:spcBef>
-              <a:spcAft>
-                <a:spcPts val="1400"/>
-              </a:spcAft>
-            </a:pPr>
-            <a:r>
-              <a:rPr sz="2000" b="0" i="0">
-                <a:solidFill>
-                  <a:srgbClr val="D7E2D6"/>
-                </a:solidFill>
-                <a:latin typeface="Tahoma"/>
-                <a:cs typeface="Tahoma"/>
-              </a:rPr>
-              <a:t>کنترل بازی، استراتژی و مدیریت زمین</a:t>
-            </a:r>
-          </a:p>
-          <a:p>
-            <a:pPr algn="r" rtl="1">
-              <a:lnSpc>
-                <a:spcPct val="108000"/>
-              </a:lnSpc>
-              <a:spcBef>
-                <a:spcPts val="0"/>
-              </a:spcBef>
-              <a:spcAft>
-                <a:spcPts val="300"/>
-              </a:spcAft>
-            </a:pPr>
-            <a:r>
-              <a:rPr sz="1100" b="1" i="0">
-                <a:solidFill>
-                  <a:srgbClr val="FFB74D"/>
-                </a:solidFill>
-                <a:latin typeface="Tahoma"/>
-                <a:cs typeface="Tahoma"/>
-              </a:rPr>
-              <a:t>●  </a:t>
-            </a:r>
-            <a:r>
-              <a:rPr sz="1450" b="0" i="0">
-                <a:solidFill>
-                  <a:srgbClr val="C9D6C8"/>
-                </a:solidFill>
-                <a:latin typeface="Tahoma"/>
-                <a:cs typeface="Tahoma"/>
-              </a:rPr>
-              <a:t>پیش‌نیاز: تسلط نسبی بر دوره مقدماتی و تکمیلی</a:t>
-            </a:r>
-          </a:p>
-          <a:p>
-            <a:pPr algn="r" rtl="1">
-              <a:lnSpc>
-                <a:spcPct val="108000"/>
-              </a:lnSpc>
-              <a:spcBef>
-                <a:spcPts val="0"/>
-              </a:spcBef>
-              <a:spcAft>
-                <a:spcPts val="300"/>
-              </a:spcAft>
-            </a:pPr>
-            <a:r>
-              <a:rPr sz="1100" b="1" i="0">
-                <a:solidFill>
-                  <a:srgbClr val="FFB74D"/>
-                </a:solidFill>
-                <a:latin typeface="Tahoma"/>
-                <a:cs typeface="Tahoma"/>
-              </a:rPr>
-              <a:t>●  </a:t>
-            </a:r>
-            <a:r>
-              <a:rPr sz="1450" b="0" i="0">
-                <a:solidFill>
-                  <a:srgbClr val="C9D6C8"/>
-                </a:solidFill>
-                <a:latin typeface="Tahoma"/>
-                <a:cs typeface="Tahoma"/>
-              </a:rPr>
-              <a:t>هدف: تحلیل شرایط زمین و انتخاب ضربه مناسب</a:t>
-            </a:r>
-          </a:p>
-          <a:p>
-            <a:pPr algn="r" rtl="1">
-              <a:lnSpc>
-                <a:spcPct val="108000"/>
-              </a:lnSpc>
-              <a:spcBef>
-                <a:spcPts val="0"/>
-              </a:spcBef>
-              <a:spcAft>
-                <a:spcPts val="300"/>
-              </a:spcAft>
-            </a:pPr>
-            <a:r>
-              <a:rPr sz="1100" b="1" i="0">
-                <a:solidFill>
-                  <a:srgbClr val="FFB74D"/>
-                </a:solidFill>
-                <a:latin typeface="Tahoma"/>
-                <a:cs typeface="Tahoma"/>
-              </a:rPr>
-              <a:t>●  </a:t>
-            </a:r>
-            <a:r>
-              <a:rPr sz="1450" b="0" i="0">
-                <a:solidFill>
-                  <a:srgbClr val="C9D6C8"/>
-                </a:solidFill>
-                <a:latin typeface="Tahoma"/>
-                <a:cs typeface="Tahoma"/>
-              </a:rPr>
-              <a:t>۳۳ فصل آموزشی  ·  ۱۲ جلسه عملی  ·  مدیریت ریسک</a:t>
-            </a:r>
-          </a:p>
-        </p:txBody>
-      </p:sp>
-      <p:sp>
-        <p:nvSpPr>
-          <p:cNvPr id="8" name="TextBox 7"/>
+                <a:latin typeface="Vazirmatn"/>
+                <a:cs typeface="Vazirmatn"/>
+              </a:rPr>
+              <a:t>مدرس درجه یک گلف ایران</a:t>
+            </a:r>
+          </a:p>
+        </p:txBody>
+      </p:sp>
+      <p:sp>
+        <p:nvSpPr>
+          <p:cNvPr id="10" name="TextBox 9"/>
           <p:cNvSpPr txBox="1"/>
           <p:nvPr/>
         </p:nvSpPr>
         <p:spPr>
           <a:xfrm>
-            <a:off x="502920" y="6400800"/>
-            <a:ext cx="5486400" cy="320040"/>
+            <a:off x="914400" y="4069080"/>
+            <a:ext cx="10362895" cy="2377440"/>
           </a:xfrm>
           <a:prstGeom prst="rect">
             <a:avLst/>
@@ -3541,7 +3543,7 @@
           </a:bodyPr>
           <a:lstStyle/>
           <a:p>
-            <a:pPr algn="l" rtl="1">
+            <a:pPr algn="r" rtl="1">
               <a:lnSpc>
                 <a:spcPct val="108000"/>
               </a:lnSpc>
@@ -3549,32 +3551,177 @@
                 <a:spcPts val="0"/>
               </a:spcBef>
               <a:spcAft>
-                <a:spcPts val="0"/>
-              </a:spcAft>
-            </a:pPr>
-            <a:r>
-              <a:rPr sz="1000" b="0" i="0">
+                <a:spcPts val="600"/>
+              </a:spcAft>
+            </a:pPr>
+            <a:r>
+              <a:rPr sz="1700" b="1" i="0">
+                <a:solidFill>
+                  <a:srgbClr val="FFB74D"/>
+                </a:solidFill>
+                <a:latin typeface="Vazirmatn"/>
+                <a:cs typeface="Vazirmatn"/>
+              </a:rPr>
+              <a:t>Puttclub  |  آکادمی گلف پات‌کلاب  |  سطح ۳</a:t>
+            </a:r>
+          </a:p>
+          <a:p>
+            <a:pPr algn="r" rtl="1">
+              <a:lnSpc>
+                <a:spcPct val="108000"/>
+              </a:lnSpc>
+              <a:spcBef>
+                <a:spcPts val="0"/>
+              </a:spcBef>
+              <a:spcAft>
+                <a:spcPts val="600"/>
+              </a:spcAft>
+            </a:pPr>
+            <a:r>
+              <a:rPr sz="4600" b="1" i="0">
                 <a:solidFill>
                   <a:srgbClr val="FFFFFF"/>
                 </a:solidFill>
-                <a:latin typeface="Tahoma"/>
-                <a:cs typeface="Tahoma"/>
-              </a:rPr>
-              <a:t>Golf Academy  ·  Semi-Advanced · Level 3</a:t>
-            </a:r>
-          </a:p>
-        </p:txBody>
-      </p:sp>
-      <p:sp>
-        <p:nvSpPr>
-          <p:cNvPr id="9" name="TextBox 8"/>
+                <a:latin typeface="Vazirmatn"/>
+                <a:cs typeface="Vazirmatn"/>
+              </a:rPr>
+              <a:t>دوره سوم آموزش گلف — نیمه‌پیشرفته</a:t>
+            </a:r>
+          </a:p>
+          <a:p>
+            <a:pPr algn="r" rtl="1">
+              <a:lnSpc>
+                <a:spcPct val="108000"/>
+              </a:lnSpc>
+              <a:spcBef>
+                <a:spcPts val="0"/>
+              </a:spcBef>
+              <a:spcAft>
+                <a:spcPts val="1400"/>
+              </a:spcAft>
+            </a:pPr>
+            <a:r>
+              <a:rPr sz="2000" b="0" i="0">
+                <a:solidFill>
+                  <a:srgbClr val="D7E2D6"/>
+                </a:solidFill>
+                <a:latin typeface="Vazirmatn"/>
+                <a:cs typeface="Vazirmatn"/>
+              </a:rPr>
+              <a:t>کنترل بازی، استراتژی و مدیریت زمین</a:t>
+            </a:r>
+          </a:p>
+          <a:p>
+            <a:pPr algn="r" rtl="1">
+              <a:lnSpc>
+                <a:spcPct val="108000"/>
+              </a:lnSpc>
+              <a:spcBef>
+                <a:spcPts val="0"/>
+              </a:spcBef>
+              <a:spcAft>
+                <a:spcPts val="300"/>
+              </a:spcAft>
+            </a:pPr>
+            <a:r>
+              <a:rPr sz="1100" b="1" i="0">
+                <a:solidFill>
+                  <a:srgbClr val="FFB74D"/>
+                </a:solidFill>
+                <a:latin typeface="Vazirmatn"/>
+                <a:cs typeface="Vazirmatn"/>
+              </a:rPr>
+              <a:t>●  </a:t>
+            </a:r>
+            <a:r>
+              <a:rPr sz="1450" b="0" i="0">
+                <a:solidFill>
+                  <a:srgbClr val="C9D6C8"/>
+                </a:solidFill>
+                <a:latin typeface="Vazirmatn"/>
+                <a:cs typeface="Vazirmatn"/>
+              </a:rPr>
+              <a:t>پیش‌نیاز: تسلط نسبی بر دوره مقدماتی و تکمیلی</a:t>
+            </a:r>
+          </a:p>
+          <a:p>
+            <a:pPr algn="r" rtl="1">
+              <a:lnSpc>
+                <a:spcPct val="108000"/>
+              </a:lnSpc>
+              <a:spcBef>
+                <a:spcPts val="0"/>
+              </a:spcBef>
+              <a:spcAft>
+                <a:spcPts val="300"/>
+              </a:spcAft>
+            </a:pPr>
+            <a:r>
+              <a:rPr sz="1100" b="1" i="0">
+                <a:solidFill>
+                  <a:srgbClr val="FFB74D"/>
+                </a:solidFill>
+                <a:latin typeface="Vazirmatn"/>
+                <a:cs typeface="Vazirmatn"/>
+              </a:rPr>
+              <a:t>●  </a:t>
+            </a:r>
+            <a:r>
+              <a:rPr sz="1450" b="0" i="0">
+                <a:solidFill>
+                  <a:srgbClr val="C9D6C8"/>
+                </a:solidFill>
+                <a:latin typeface="Vazirmatn"/>
+                <a:cs typeface="Vazirmatn"/>
+              </a:rPr>
+              <a:t>هدف: تحلیل شرایط زمین و انتخاب ضربه مناسب</a:t>
+            </a:r>
+          </a:p>
+          <a:p>
+            <a:pPr algn="r" rtl="1">
+              <a:lnSpc>
+                <a:spcPct val="108000"/>
+              </a:lnSpc>
+              <a:spcBef>
+                <a:spcPts val="0"/>
+              </a:spcBef>
+              <a:spcAft>
+                <a:spcPts val="300"/>
+              </a:spcAft>
+            </a:pPr>
+            <a:r>
+              <a:rPr sz="1100" b="1" i="0">
+                <a:solidFill>
+                  <a:srgbClr val="FFB74D"/>
+                </a:solidFill>
+                <a:latin typeface="Vazirmatn"/>
+                <a:cs typeface="Vazirmatn"/>
+              </a:rPr>
+              <a:t>●  </a:t>
+            </a:r>
+            <a:r>
+              <a:rPr sz="1450" b="0" i="0">
+                <a:solidFill>
+                  <a:srgbClr val="C9D6C8"/>
+                </a:solidFill>
+                <a:latin typeface="Vazirmatn"/>
+                <a:cs typeface="Vazirmatn"/>
+              </a:rPr>
+              <a:t>۳۳ فصل آموزشی  ·  ۱۲ جلسه عملی  ·  مدیریت ریسک</a:t>
+            </a:r>
+          </a:p>
+        </p:txBody>
+      </p:sp>
+      <p:sp>
+        <p:nvSpPr>
+          <p:cNvPr id="11" name="TextBox 10"/>
           <p:cNvSpPr txBox="1"/>
           <p:nvPr/>
         </p:nvSpPr>
         <p:spPr>
           <a:xfrm>
-            <a:off x="10180015" y="6400800"/>
-            <a:ext cx="1463040" cy="320040"/>
+            <a:off x="502920" y="6400800"/>
+            <a:ext cx="6858000" cy="320040"/>
           </a:xfrm>
           <a:prstGeom prst="rect">
             <a:avLst/>
@@ -3603,8 +3750,64 @@
                 <a:solidFill>
                   <a:srgbClr val="FFB74D"/>
                 </a:solidFill>
-                <a:latin typeface="Tahoma"/>
-                <a:cs typeface="Tahoma"/>
+                <a:latin typeface="Vazirmatn"/>
+                <a:cs typeface="Vazirmatn"/>
+              </a:rPr>
+              <a:t>⛳ Puttclub</a:t>
+            </a:r>
+            <a:r>
+              <a:rPr sz="1000" b="0" i="0">
+                <a:solidFill>
+                  <a:srgbClr val="FFFFFF"/>
+                </a:solidFill>
+                <a:latin typeface="Vazirmatn"/>
+                <a:cs typeface="Vazirmatn"/>
+              </a:rPr>
+              <a:t>   ·   Semi-Advanced · Level 3</a:t>
+            </a:r>
+          </a:p>
+        </p:txBody>
+      </p:sp>
+      <p:sp>
+        <p:nvSpPr>
+          <p:cNvPr id="12" name="TextBox 11"/>
+          <p:cNvSpPr txBox="1"/>
+          <p:nvPr/>
+        </p:nvSpPr>
+        <p:spPr>
+          <a:xfrm>
+            <a:off x="10180015" y="6400800"/>
+            <a:ext cx="1463040" cy="320040"/>
+          </a:xfrm>
+          <a:prstGeom prst="rect">
+            <a:avLst/>
+          </a:prstGeom>
+          <a:noFill/>
+        </p:spPr>
+        <p:txBody>
+          <a:bodyPr wrap="square" anchor="ctr" lIns="0" rIns="0" tIns="0" bIns="0">
+            <a:spAutoFit/>
+          </a:bodyPr>
+          <a:lstStyle/>
+          <a:p>
+            <a:pPr algn="l" rtl="1">
+              <a:lnSpc>
+                <a:spcPct val="108000"/>
+              </a:lnSpc>
+              <a:spcBef>
+                <a:spcPts val="0"/>
+              </a:spcBef>
+              <a:spcAft>
+                <a:spcPts val="0"/>
+              </a:spcAft>
+            </a:pPr>
+            <a:r>
+              <a:rPr sz="1100" b="1" i="0">
+                <a:solidFill>
+                  <a:srgbClr val="FFB74D"/>
+                </a:solidFill>
+                <a:latin typeface="Vazirmatn"/>
+                <a:cs typeface="Vazirmatn"/>
               </a:rPr>
               <a:t>1</a:t>
             </a:r>
@@ -3755,8 +3958,8 @@
                 <a:solidFill>
                   <a:srgbClr val="EF6C00"/>
                 </a:solidFill>
-                <a:latin typeface="Tahoma"/>
-                <a:cs typeface="Tahoma"/>
+                <a:latin typeface="Vazirmatn"/>
+                <a:cs typeface="Vazirmatn"/>
               </a:rPr>
               <a:t>فصل ۹</a:t>
             </a:r>
@@ -3778,8 +3981,8 @@
                 <a:solidFill>
                   <a:srgbClr val="1F2A24"/>
                 </a:solidFill>
-                <a:latin typeface="Tahoma"/>
-                <a:cs typeface="Tahoma"/>
+                <a:latin typeface="Vazirmatn"/>
+                <a:cs typeface="Vazirmatn"/>
               </a:rPr>
               <a:t>شکل دادن به ضربه (Shot Shaping)</a:t>
             </a:r>
@@ -3868,8 +4071,8 @@
                 <a:solidFill>
                   <a:srgbClr val="EF6C00"/>
                 </a:solidFill>
-                <a:latin typeface="Tahoma"/>
-                <a:cs typeface="Tahoma"/>
+                <a:latin typeface="Vazirmatn"/>
+                <a:cs typeface="Vazirmatn"/>
               </a:rPr>
               <a:t>●  </a:t>
             </a:r>
@@ -3878,8 +4081,8 @@
                 <a:solidFill>
                   <a:srgbClr val="1F2A24"/>
                 </a:solidFill>
-                <a:latin typeface="Tahoma"/>
-                <a:cs typeface="Tahoma"/>
+                <a:latin typeface="Vazirmatn"/>
+                <a:cs typeface="Vazirmatn"/>
               </a:rPr>
               <a:t>در این دوره با Draw و Fade به‌صورت عملی آشنا می‌شوید</a:t>
             </a:r>
@@ -3901,8 +4104,8 @@
                 <a:solidFill>
                   <a:srgbClr val="EF6C00"/>
                 </a:solidFill>
-                <a:latin typeface="Tahoma"/>
-                <a:cs typeface="Tahoma"/>
+                <a:latin typeface="Vazirmatn"/>
+                <a:cs typeface="Vazirmatn"/>
               </a:rPr>
               <a:t>●  </a:t>
             </a:r>
@@ -3911,8 +4114,8 @@
                 <a:solidFill>
                   <a:srgbClr val="EF6C00"/>
                 </a:solidFill>
-                <a:latin typeface="Tahoma"/>
-                <a:cs typeface="Tahoma"/>
+                <a:latin typeface="Vazirmatn"/>
+                <a:cs typeface="Vazirmatn"/>
               </a:rPr>
               <a:t>Draw</a:t>
             </a:r>
@@ -3921,8 +4124,8 @@
                 <a:solidFill>
                   <a:srgbClr val="1F2A24"/>
                 </a:solidFill>
-                <a:latin typeface="Tahoma"/>
-                <a:cs typeface="Tahoma"/>
+                <a:latin typeface="Vazirmatn"/>
+                <a:cs typeface="Vazirmatn"/>
               </a:rPr>
               <a:t>  —  برای راست‌دست، انحنای کنترل‌شده به چپ</a:t>
             </a:r>
@@ -3944,8 +4147,8 @@
                 <a:solidFill>
                   <a:srgbClr val="EF6C00"/>
                 </a:solidFill>
-                <a:latin typeface="Tahoma"/>
-                <a:cs typeface="Tahoma"/>
+                <a:latin typeface="Vazirmatn"/>
+                <a:cs typeface="Vazirmatn"/>
               </a:rPr>
               <a:t>●  </a:t>
             </a:r>
@@ -3954,8 +4157,8 @@
                 <a:solidFill>
                   <a:srgbClr val="EF6C00"/>
                 </a:solidFill>
-                <a:latin typeface="Tahoma"/>
-                <a:cs typeface="Tahoma"/>
+                <a:latin typeface="Vazirmatn"/>
+                <a:cs typeface="Vazirmatn"/>
               </a:rPr>
               <a:t>Fade</a:t>
             </a:r>
@@ -3964,8 +4167,8 @@
                 <a:solidFill>
                   <a:srgbClr val="1F2A24"/>
                 </a:solidFill>
-                <a:latin typeface="Tahoma"/>
-                <a:cs typeface="Tahoma"/>
+                <a:latin typeface="Vazirmatn"/>
+                <a:cs typeface="Vazirmatn"/>
               </a:rPr>
               <a:t>  —  برای راست‌دست، انحنای کنترل‌شده به راست</a:t>
             </a:r>
@@ -3987,8 +4190,8 @@
                 <a:solidFill>
                   <a:srgbClr val="EF6C00"/>
                 </a:solidFill>
-                <a:latin typeface="Tahoma"/>
-                <a:cs typeface="Tahoma"/>
+                <a:latin typeface="Vazirmatn"/>
+                <a:cs typeface="Vazirmatn"/>
               </a:rPr>
               <a:t>●  </a:t>
             </a:r>
@@ -3997,8 +4200,8 @@
                 <a:solidFill>
                   <a:srgbClr val="EF6C00"/>
                 </a:solidFill>
-                <a:latin typeface="Tahoma"/>
-                <a:cs typeface="Tahoma"/>
+                <a:latin typeface="Vazirmatn"/>
+                <a:cs typeface="Vazirmatn"/>
               </a:rPr>
               <a:t>هدف اول</a:t>
             </a:r>
@@ -4007,8 +4210,8 @@
                 <a:solidFill>
                   <a:srgbClr val="1F2A24"/>
                 </a:solidFill>
-                <a:latin typeface="Tahoma"/>
-                <a:cs typeface="Tahoma"/>
+                <a:latin typeface="Vazirmatn"/>
+                <a:cs typeface="Vazirmatn"/>
               </a:rPr>
               <a:t>  —  شناخت شکل طبیعی توپ خودتان</a:t>
             </a:r>
@@ -4030,8 +4233,8 @@
                 <a:solidFill>
                   <a:srgbClr val="EF6C00"/>
                 </a:solidFill>
-                <a:latin typeface="Tahoma"/>
-                <a:cs typeface="Tahoma"/>
+                <a:latin typeface="Vazirmatn"/>
+                <a:cs typeface="Vazirmatn"/>
               </a:rPr>
               <a:t>●  </a:t>
             </a:r>
@@ -4040,8 +4243,8 @@
                 <a:solidFill>
                   <a:srgbClr val="EF6C00"/>
                 </a:solidFill>
-                <a:latin typeface="Tahoma"/>
-                <a:cs typeface="Tahoma"/>
+                <a:latin typeface="Vazirmatn"/>
+                <a:cs typeface="Vazirmatn"/>
               </a:rPr>
               <a:t>سپس</a:t>
             </a:r>
@@ -4050,8 +4253,8 @@
                 <a:solidFill>
                   <a:srgbClr val="1F2A24"/>
                 </a:solidFill>
-                <a:latin typeface="Tahoma"/>
-                <a:cs typeface="Tahoma"/>
+                <a:latin typeface="Vazirmatn"/>
+                <a:cs typeface="Vazirmatn"/>
               </a:rPr>
               <a:t>  —  استفاده از آن به‌عنوان ابزار در شرایط مناسب</a:t>
             </a:r>
@@ -4073,8 +4276,8 @@
                 <a:solidFill>
                   <a:srgbClr val="EF6C00"/>
                 </a:solidFill>
-                <a:latin typeface="Tahoma"/>
-                <a:cs typeface="Tahoma"/>
+                <a:latin typeface="Vazirmatn"/>
+                <a:cs typeface="Vazirmatn"/>
               </a:rPr>
               <a:t>●  </a:t>
             </a:r>
@@ -4083,8 +4286,8 @@
                 <a:solidFill>
                   <a:srgbClr val="EF6C00"/>
                 </a:solidFill>
-                <a:latin typeface="Tahoma"/>
-                <a:cs typeface="Tahoma"/>
+                <a:latin typeface="Vazirmatn"/>
+                <a:cs typeface="Vazirmatn"/>
               </a:rPr>
               <a:t>تمرین</a:t>
             </a:r>
@@ -4093,8 +4296,8 @@
                 <a:solidFill>
                   <a:srgbClr val="1F2A24"/>
                 </a:solidFill>
-                <a:latin typeface="Tahoma"/>
-                <a:cs typeface="Tahoma"/>
+                <a:latin typeface="Vazirmatn"/>
+                <a:cs typeface="Vazirmatn"/>
               </a:rPr>
               <a:t>  —  دو Target (چپ و راست) تعیین کنید و توپ را به هرکدام نزدیک کنید</a:t>
             </a:r>
@@ -4229,8 +4432,8 @@
                 <a:solidFill>
                   <a:srgbClr val="EF6C00"/>
                 </a:solidFill>
-                <a:latin typeface="Tahoma"/>
-                <a:cs typeface="Tahoma"/>
+                <a:latin typeface="Vazirmatn"/>
+                <a:cs typeface="Vazirmatn"/>
               </a:rPr>
               <a:t>💡 </a:t>
             </a:r>
@@ -4239,8 +4442,8 @@
                 <a:solidFill>
                   <a:srgbClr val="1F2A24"/>
                 </a:solidFill>
-                <a:latin typeface="Tahoma"/>
-                <a:cs typeface="Tahoma"/>
+                <a:latin typeface="Vazirmatn"/>
+                <a:cs typeface="Vazirmatn"/>
               </a:rPr>
               <a:t>ابتدا الگوی طبیعی خود را بشناسید؛ بعد آن را در خدمت استراتژی قرار دهید.</a:t>
             </a:r>
@@ -4256,7 +4459,7 @@
         <p:spPr>
           <a:xfrm>
             <a:off x="502920" y="6400800"/>
-            <a:ext cx="5486400" cy="320040"/>
+            <a:ext cx="6858000" cy="320040"/>
           </a:xfrm>
           <a:prstGeom prst="rect">
             <a:avLst/>
@@ -4281,14 +4484,24 @@
               </a:spcAft>
             </a:pPr>
             <a:r>
+              <a:rPr sz="1100" b="1" i="0">
+                <a:solidFill>
+                  <a:srgbClr val="EF6C00"/>
+                </a:solidFill>
+                <a:latin typeface="Vazirmatn"/>
+                <a:cs typeface="Vazirmatn"/>
+              </a:rPr>
+              <a:t>⛳ Puttclub</a:t>
+            </a:r>
+            <a:r>
               <a:rPr sz="1000" b="0" i="0">
                 <a:solidFill>
                   <a:srgbClr val="5C6B62"/>
                 </a:solidFill>
-                <a:latin typeface="Tahoma"/>
-                <a:cs typeface="Tahoma"/>
-              </a:rPr>
-              <a:t>Golf Academy  ·  Semi-Advanced · Level 3</a:t>
+                <a:latin typeface="Vazirmatn"/>
+                <a:cs typeface="Vazirmatn"/>
+              </a:rPr>
+              <a:t>   ·   Semi-Advanced · Level 3</a:t>
             </a:r>
           </a:p>
         </p:txBody>
@@ -4331,8 +4544,8 @@
                 <a:solidFill>
                   <a:srgbClr val="EF6C00"/>
                 </a:solidFill>
-                <a:latin typeface="Tahoma"/>
-                <a:cs typeface="Tahoma"/>
+                <a:latin typeface="Vazirmatn"/>
+                <a:cs typeface="Vazirmatn"/>
               </a:rPr>
               <a:t>10</a:t>
             </a:r>
@@ -4509,8 +4722,8 @@
                 <a:solidFill>
                   <a:srgbClr val="FFFFFF"/>
                 </a:solidFill>
-                <a:latin typeface="Tahoma"/>
-                <a:cs typeface="Tahoma"/>
+                <a:latin typeface="Vazirmatn"/>
+                <a:cs typeface="Vazirmatn"/>
               </a:rPr>
               <a:t>Fairway Hit گاهی ارزشمندتر از چند متر فاصله است</a:t>
             </a:r>
@@ -4599,8 +4812,8 @@
                 <a:solidFill>
                   <a:srgbClr val="EF6C00"/>
                 </a:solidFill>
-                <a:latin typeface="Tahoma"/>
-                <a:cs typeface="Tahoma"/>
+                <a:latin typeface="Vazirmatn"/>
+                <a:cs typeface="Vazirmatn"/>
               </a:rPr>
               <a:t>فصل ۱۰</a:t>
             </a:r>
@@ -4622,8 +4835,8 @@
                 <a:solidFill>
                   <a:srgbClr val="1F2A24"/>
                 </a:solidFill>
-                <a:latin typeface="Tahoma"/>
-                <a:cs typeface="Tahoma"/>
+                <a:latin typeface="Vazirmatn"/>
+                <a:cs typeface="Vazirmatn"/>
               </a:rPr>
               <a:t>Wood و Driver</a:t>
             </a:r>
@@ -4712,8 +4925,8 @@
                 <a:solidFill>
                   <a:srgbClr val="EF6C00"/>
                 </a:solidFill>
-                <a:latin typeface="Tahoma"/>
-                <a:cs typeface="Tahoma"/>
+                <a:latin typeface="Vazirmatn"/>
+                <a:cs typeface="Vazirmatn"/>
               </a:rPr>
               <a:t>●  </a:t>
             </a:r>
@@ -4722,8 +4935,8 @@
                 <a:solidFill>
                   <a:srgbClr val="1F2A24"/>
                 </a:solidFill>
-                <a:latin typeface="Tahoma"/>
-                <a:cs typeface="Tahoma"/>
+                <a:latin typeface="Vazirmatn"/>
+                <a:cs typeface="Vazirmatn"/>
               </a:rPr>
               <a:t>در این سطح هدف Driver فقط فاصله نیست</a:t>
             </a:r>
@@ -4745,8 +4958,8 @@
                 <a:solidFill>
                   <a:srgbClr val="EF6C00"/>
                 </a:solidFill>
-                <a:latin typeface="Tahoma"/>
-                <a:cs typeface="Tahoma"/>
+                <a:latin typeface="Vazirmatn"/>
+                <a:cs typeface="Vazirmatn"/>
               </a:rPr>
               <a:t>●  </a:t>
             </a:r>
@@ -4755,8 +4968,8 @@
                 <a:solidFill>
                   <a:srgbClr val="EF6C00"/>
                 </a:solidFill>
-                <a:latin typeface="Tahoma"/>
-                <a:cs typeface="Tahoma"/>
+                <a:latin typeface="Vazirmatn"/>
+                <a:cs typeface="Vazirmatn"/>
               </a:rPr>
               <a:t>سه معیار مهم</a:t>
             </a:r>
@@ -4778,8 +4991,8 @@
                 <a:solidFill>
                   <a:srgbClr val="EF6C00"/>
                 </a:solidFill>
-                <a:latin typeface="Tahoma"/>
-                <a:cs typeface="Tahoma"/>
+                <a:latin typeface="Vazirmatn"/>
+                <a:cs typeface="Vazirmatn"/>
               </a:rPr>
               <a:t>–  </a:t>
             </a:r>
@@ -4788,8 +5001,8 @@
                 <a:solidFill>
                   <a:srgbClr val="1F2A24"/>
                 </a:solidFill>
-                <a:latin typeface="Tahoma"/>
-                <a:cs typeface="Tahoma"/>
+                <a:latin typeface="Vazirmatn"/>
+                <a:cs typeface="Vazirmatn"/>
               </a:rPr>
               <a:t>Distance:: چقدر دور؟</a:t>
             </a:r>
@@ -4811,8 +5024,8 @@
                 <a:solidFill>
                   <a:srgbClr val="EF6C00"/>
                 </a:solidFill>
-                <a:latin typeface="Tahoma"/>
-                <a:cs typeface="Tahoma"/>
+                <a:latin typeface="Vazirmatn"/>
+                <a:cs typeface="Vazirmatn"/>
               </a:rPr>
               <a:t>–  </a:t>
             </a:r>
@@ -4821,8 +5034,8 @@
                 <a:solidFill>
                   <a:srgbClr val="1F2A24"/>
                 </a:solidFill>
-                <a:latin typeface="Tahoma"/>
-                <a:cs typeface="Tahoma"/>
+                <a:latin typeface="Vazirmatn"/>
+                <a:cs typeface="Vazirmatn"/>
               </a:rPr>
               <a:t>Dispersion:: چقدر پراکنده؟</a:t>
             </a:r>
@@ -4844,8 +5057,8 @@
                 <a:solidFill>
                   <a:srgbClr val="EF6C00"/>
                 </a:solidFill>
-                <a:latin typeface="Tahoma"/>
-                <a:cs typeface="Tahoma"/>
+                <a:latin typeface="Vazirmatn"/>
+                <a:cs typeface="Vazirmatn"/>
               </a:rPr>
               <a:t>–  </a:t>
             </a:r>
@@ -4854,8 +5067,8 @@
                 <a:solidFill>
                   <a:srgbClr val="1F2A24"/>
                 </a:solidFill>
-                <a:latin typeface="Tahoma"/>
-                <a:cs typeface="Tahoma"/>
+                <a:latin typeface="Vazirmatn"/>
+                <a:cs typeface="Vazirmatn"/>
               </a:rPr>
               <a:t>Direction:: به کجا؟</a:t>
             </a:r>
@@ -4877,8 +5090,8 @@
                 <a:solidFill>
                   <a:srgbClr val="EF6C00"/>
                 </a:solidFill>
-                <a:latin typeface="Tahoma"/>
-                <a:cs typeface="Tahoma"/>
+                <a:latin typeface="Vazirmatn"/>
+                <a:cs typeface="Vazirmatn"/>
               </a:rPr>
               <a:t>●  </a:t>
             </a:r>
@@ -4887,8 +5100,8 @@
                 <a:solidFill>
                   <a:srgbClr val="EF6C00"/>
                 </a:solidFill>
-                <a:latin typeface="Tahoma"/>
-                <a:cs typeface="Tahoma"/>
+                <a:latin typeface="Vazirmatn"/>
+                <a:cs typeface="Vazirmatn"/>
               </a:rPr>
               <a:t>تمرین Fairway Finder</a:t>
             </a:r>
@@ -4897,8 +5110,8 @@
                 <a:solidFill>
                   <a:srgbClr val="1F2A24"/>
                 </a:solidFill>
-                <a:latin typeface="Tahoma"/>
-                <a:cs typeface="Tahoma"/>
+                <a:latin typeface="Vazirmatn"/>
+                <a:cs typeface="Vazirmatn"/>
               </a:rPr>
               <a:t>  —  یک محدوده امن در Fairway مشخص کنید</a:t>
             </a:r>
@@ -4920,8 +5133,8 @@
                 <a:solidFill>
                   <a:srgbClr val="EF6C00"/>
                 </a:solidFill>
-                <a:latin typeface="Tahoma"/>
-                <a:cs typeface="Tahoma"/>
+                <a:latin typeface="Vazirmatn"/>
+                <a:cs typeface="Vazirmatn"/>
               </a:rPr>
               <a:t>●  </a:t>
             </a:r>
@@ -4930,8 +5143,8 @@
                 <a:solidFill>
                   <a:srgbClr val="1F2A24"/>
                 </a:solidFill>
-                <a:latin typeface="Tahoma"/>
-                <a:cs typeface="Tahoma"/>
+                <a:latin typeface="Vazirmatn"/>
+                <a:cs typeface="Vazirmatn"/>
               </a:rPr>
               <a:t>هدف قرار گرفتن توپ داخل محدوده امن است، نه حداکثر فاصله</a:t>
             </a:r>
@@ -5066,8 +5279,8 @@
                 <a:solidFill>
                   <a:srgbClr val="EF6C00"/>
                 </a:solidFill>
-                <a:latin typeface="Tahoma"/>
-                <a:cs typeface="Tahoma"/>
+                <a:latin typeface="Vazirmatn"/>
+                <a:cs typeface="Vazirmatn"/>
               </a:rPr>
               <a:t>نکته مربی:  </a:t>
             </a:r>
@@ -5076,8 +5289,8 @@
                 <a:solidFill>
                   <a:srgbClr val="1F2A24"/>
                 </a:solidFill>
-                <a:latin typeface="Tahoma"/>
-                <a:cs typeface="Tahoma"/>
+                <a:latin typeface="Vazirmatn"/>
+                <a:cs typeface="Vazirmatn"/>
               </a:rPr>
               <a:t>یک Driver دقیق و در Fairway، فشار کل ضربه بعدی را به‌شدت کاهش می‌دهد.</a:t>
             </a:r>
@@ -5093,7 +5306,7 @@
         <p:spPr>
           <a:xfrm>
             <a:off x="502920" y="6400800"/>
-            <a:ext cx="5486400" cy="320040"/>
+            <a:ext cx="6858000" cy="320040"/>
           </a:xfrm>
           <a:prstGeom prst="rect">
             <a:avLst/>
@@ -5118,14 +5331,24 @@
               </a:spcAft>
             </a:pPr>
             <a:r>
+              <a:rPr sz="1100" b="1" i="0">
+                <a:solidFill>
+                  <a:srgbClr val="EF6C00"/>
+                </a:solidFill>
+                <a:latin typeface="Vazirmatn"/>
+                <a:cs typeface="Vazirmatn"/>
+              </a:rPr>
+              <a:t>⛳ Puttclub</a:t>
+            </a:r>
+            <a:r>
               <a:rPr sz="1000" b="0" i="0">
                 <a:solidFill>
                   <a:srgbClr val="5C6B62"/>
                 </a:solidFill>
-                <a:latin typeface="Tahoma"/>
-                <a:cs typeface="Tahoma"/>
-              </a:rPr>
-              <a:t>Golf Academy  ·  Semi-Advanced · Level 3</a:t>
+                <a:latin typeface="Vazirmatn"/>
+                <a:cs typeface="Vazirmatn"/>
+              </a:rPr>
+              <a:t>   ·   Semi-Advanced · Level 3</a:t>
             </a:r>
           </a:p>
         </p:txBody>
@@ -5168,8 +5391,8 @@
                 <a:solidFill>
                   <a:srgbClr val="EF6C00"/>
                 </a:solidFill>
-                <a:latin typeface="Tahoma"/>
-                <a:cs typeface="Tahoma"/>
+                <a:latin typeface="Vazirmatn"/>
+                <a:cs typeface="Vazirmatn"/>
               </a:rPr>
               <a:t>11</a:t>
             </a:r>
@@ -5320,8 +5543,8 @@
                 <a:solidFill>
                   <a:srgbClr val="EF6C00"/>
                 </a:solidFill>
-                <a:latin typeface="Tahoma"/>
-                <a:cs typeface="Tahoma"/>
+                <a:latin typeface="Vazirmatn"/>
+                <a:cs typeface="Vazirmatn"/>
               </a:rPr>
               <a:t>فصل ۱۱</a:t>
             </a:r>
@@ -5343,8 +5566,8 @@
                 <a:solidFill>
                   <a:srgbClr val="1F2A24"/>
                 </a:solidFill>
-                <a:latin typeface="Tahoma"/>
-                <a:cs typeface="Tahoma"/>
+                <a:latin typeface="Vazirmatn"/>
+                <a:cs typeface="Vazirmatn"/>
               </a:rPr>
               <a:t>مدیریت Tee Shot</a:t>
             </a:r>
@@ -5433,8 +5656,8 @@
                 <a:solidFill>
                   <a:srgbClr val="EF6C00"/>
                 </a:solidFill>
-                <a:latin typeface="Tahoma"/>
-                <a:cs typeface="Tahoma"/>
+                <a:latin typeface="Vazirmatn"/>
+                <a:cs typeface="Vazirmatn"/>
               </a:rPr>
               <a:t>●  </a:t>
             </a:r>
@@ -5443,8 +5666,8 @@
                 <a:solidFill>
                   <a:srgbClr val="EF6C00"/>
                 </a:solidFill>
-                <a:latin typeface="Tahoma"/>
-                <a:cs typeface="Tahoma"/>
+                <a:latin typeface="Vazirmatn"/>
+                <a:cs typeface="Vazirmatn"/>
               </a:rPr>
               <a:t>قبل از Tee Shot این موارد را بررسی کنید</a:t>
             </a:r>
@@ -5466,8 +5689,8 @@
                 <a:solidFill>
                   <a:srgbClr val="EF6C00"/>
                 </a:solidFill>
-                <a:latin typeface="Tahoma"/>
-                <a:cs typeface="Tahoma"/>
+                <a:latin typeface="Vazirmatn"/>
+                <a:cs typeface="Vazirmatn"/>
               </a:rPr>
               <a:t>–  </a:t>
             </a:r>
@@ -5476,8 +5699,8 @@
                 <a:solidFill>
                   <a:srgbClr val="1F2A24"/>
                 </a:solidFill>
-                <a:latin typeface="Tahoma"/>
-                <a:cs typeface="Tahoma"/>
+                <a:latin typeface="Vazirmatn"/>
+                <a:cs typeface="Vazirmatn"/>
               </a:rPr>
               <a:t>Fairway، Bunker و OB کجاست؟</a:t>
             </a:r>
@@ -5499,8 +5722,8 @@
                 <a:solidFill>
                   <a:srgbClr val="EF6C00"/>
                 </a:solidFill>
-                <a:latin typeface="Tahoma"/>
-                <a:cs typeface="Tahoma"/>
+                <a:latin typeface="Vazirmatn"/>
+                <a:cs typeface="Vazirmatn"/>
               </a:rPr>
               <a:t>–  </a:t>
             </a:r>
@@ -5509,8 +5732,8 @@
                 <a:solidFill>
                   <a:srgbClr val="1F2A24"/>
                 </a:solidFill>
-                <a:latin typeface="Tahoma"/>
-                <a:cs typeface="Tahoma"/>
+                <a:latin typeface="Vazirmatn"/>
+                <a:cs typeface="Vazirmatn"/>
               </a:rPr>
               <a:t>خطر آب کجاست و بهترین سمت Fairway کدام است؟</a:t>
             </a:r>
@@ -5532,8 +5755,8 @@
                 <a:solidFill>
                   <a:srgbClr val="EF6C00"/>
                 </a:solidFill>
-                <a:latin typeface="Tahoma"/>
-                <a:cs typeface="Tahoma"/>
+                <a:latin typeface="Vazirmatn"/>
+                <a:cs typeface="Vazirmatn"/>
               </a:rPr>
               <a:t>–  </a:t>
             </a:r>
@@ -5542,8 +5765,8 @@
                 <a:solidFill>
                   <a:srgbClr val="1F2A24"/>
                 </a:solidFill>
-                <a:latin typeface="Tahoma"/>
-                <a:cs typeface="Tahoma"/>
+                <a:latin typeface="Vazirmatn"/>
+                <a:cs typeface="Vazirmatn"/>
               </a:rPr>
               <a:t>Hole بعدی از کدام سمت بهتر قابل بازی است؟</a:t>
             </a:r>
@@ -5565,8 +5788,8 @@
                 <a:solidFill>
                   <a:srgbClr val="EF6C00"/>
                 </a:solidFill>
-                <a:latin typeface="Tahoma"/>
-                <a:cs typeface="Tahoma"/>
+                <a:latin typeface="Vazirmatn"/>
+                <a:cs typeface="Vazirmatn"/>
               </a:rPr>
               <a:t>●  </a:t>
             </a:r>
@@ -5575,8 +5798,8 @@
                 <a:solidFill>
                   <a:srgbClr val="1F2A24"/>
                 </a:solidFill>
-                <a:latin typeface="Tahoma"/>
-                <a:cs typeface="Tahoma"/>
+                <a:latin typeface="Vazirmatn"/>
+                <a:cs typeface="Vazirmatn"/>
               </a:rPr>
               <a:t>سپس کلاب را انتخاب کنید</a:t>
             </a:r>
@@ -5598,8 +5821,8 @@
                 <a:solidFill>
                   <a:srgbClr val="EF6C00"/>
                 </a:solidFill>
-                <a:latin typeface="Tahoma"/>
-                <a:cs typeface="Tahoma"/>
+                <a:latin typeface="Vazirmatn"/>
+                <a:cs typeface="Vazirmatn"/>
               </a:rPr>
               <a:t>●  </a:t>
             </a:r>
@@ -5608,8 +5831,8 @@
                 <a:solidFill>
                   <a:srgbClr val="1F2A24"/>
                 </a:solidFill>
-                <a:latin typeface="Tahoma"/>
-                <a:cs typeface="Tahoma"/>
+                <a:latin typeface="Vazirmatn"/>
+                <a:cs typeface="Vazirmatn"/>
               </a:rPr>
               <a:t>گاهی Driver بهترین انتخاب نیست؛ Wood یا Hybrid نتیجه بهتری می‌دهد</a:t>
             </a:r>
@@ -5744,8 +5967,8 @@
                 <a:solidFill>
                   <a:srgbClr val="EF6C00"/>
                 </a:solidFill>
-                <a:latin typeface="Tahoma"/>
-                <a:cs typeface="Tahoma"/>
+                <a:latin typeface="Vazirmatn"/>
+                <a:cs typeface="Vazirmatn"/>
               </a:rPr>
               <a:t>💡 </a:t>
             </a:r>
@@ -5754,8 +5977,8 @@
                 <a:solidFill>
                   <a:srgbClr val="1F2A24"/>
                 </a:solidFill>
-                <a:latin typeface="Tahoma"/>
-                <a:cs typeface="Tahoma"/>
+                <a:latin typeface="Vazirmatn"/>
+                <a:cs typeface="Vazirmatn"/>
               </a:rPr>
               <a:t>Tee Shot خوب یعنی قرار دادن توپ در بهترین موقعیت برای ضربه بعدی، نه لزوماً دورترین ضربه.</a:t>
             </a:r>
@@ -5771,7 +5994,7 @@
         <p:spPr>
           <a:xfrm>
             <a:off x="502920" y="6400800"/>
-            <a:ext cx="5486400" cy="320040"/>
+            <a:ext cx="6858000" cy="320040"/>
           </a:xfrm>
           <a:prstGeom prst="rect">
             <a:avLst/>
@@ -5796,14 +6019,24 @@
               </a:spcAft>
             </a:pPr>
             <a:r>
+              <a:rPr sz="1100" b="1" i="0">
+                <a:solidFill>
+                  <a:srgbClr val="EF6C00"/>
+                </a:solidFill>
+                <a:latin typeface="Vazirmatn"/>
+                <a:cs typeface="Vazirmatn"/>
+              </a:rPr>
+              <a:t>⛳ Puttclub</a:t>
+            </a:r>
+            <a:r>
               <a:rPr sz="1000" b="0" i="0">
                 <a:solidFill>
                   <a:srgbClr val="5C6B62"/>
                 </a:solidFill>
-                <a:latin typeface="Tahoma"/>
-                <a:cs typeface="Tahoma"/>
-              </a:rPr>
-              <a:t>Golf Academy  ·  Semi-Advanced · Level 3</a:t>
+                <a:latin typeface="Vazirmatn"/>
+                <a:cs typeface="Vazirmatn"/>
+              </a:rPr>
+              <a:t>   ·   Semi-Advanced · Level 3</a:t>
             </a:r>
           </a:p>
         </p:txBody>
@@ -5846,8 +6079,8 @@
                 <a:solidFill>
                   <a:srgbClr val="EF6C00"/>
                 </a:solidFill>
-                <a:latin typeface="Tahoma"/>
-                <a:cs typeface="Tahoma"/>
+                <a:latin typeface="Vazirmatn"/>
+                <a:cs typeface="Vazirmatn"/>
               </a:rPr>
               <a:t>12</a:t>
             </a:r>
@@ -5998,8 +6231,8 @@
                 <a:solidFill>
                   <a:srgbClr val="EF6C00"/>
                 </a:solidFill>
-                <a:latin typeface="Tahoma"/>
-                <a:cs typeface="Tahoma"/>
+                <a:latin typeface="Vazirmatn"/>
+                <a:cs typeface="Vazirmatn"/>
               </a:rPr>
               <a:t>فصل ۱۲</a:t>
             </a:r>
@@ -6021,8 +6254,8 @@
                 <a:solidFill>
                   <a:srgbClr val="1F2A24"/>
                 </a:solidFill>
-                <a:latin typeface="Tahoma"/>
-                <a:cs typeface="Tahoma"/>
+                <a:latin typeface="Vazirmatn"/>
+                <a:cs typeface="Vazirmatn"/>
               </a:rPr>
               <a:t>Approach Shot</a:t>
             </a:r>
@@ -6111,8 +6344,8 @@
                 <a:solidFill>
                   <a:srgbClr val="EF6C00"/>
                 </a:solidFill>
-                <a:latin typeface="Tahoma"/>
-                <a:cs typeface="Tahoma"/>
+                <a:latin typeface="Vazirmatn"/>
+                <a:cs typeface="Vazirmatn"/>
               </a:rPr>
               <a:t>●  </a:t>
             </a:r>
@@ -6121,8 +6354,8 @@
                 <a:solidFill>
                   <a:srgbClr val="1F2A24"/>
                 </a:solidFill>
-                <a:latin typeface="Tahoma"/>
-                <a:cs typeface="Tahoma"/>
+                <a:latin typeface="Vazirmatn"/>
+                <a:cs typeface="Vazirmatn"/>
               </a:rPr>
               <a:t>Approach یعنی ضربه‌ای برای نزدیک کردن توپ به Green</a:t>
             </a:r>
@@ -6144,8 +6377,8 @@
                 <a:solidFill>
                   <a:srgbClr val="EF6C00"/>
                 </a:solidFill>
-                <a:latin typeface="Tahoma"/>
-                <a:cs typeface="Tahoma"/>
+                <a:latin typeface="Vazirmatn"/>
+                <a:cs typeface="Vazirmatn"/>
               </a:rPr>
               <a:t>●  </a:t>
             </a:r>
@@ -6154,8 +6387,8 @@
                 <a:solidFill>
                   <a:srgbClr val="EF6C00"/>
                 </a:solidFill>
-                <a:latin typeface="Tahoma"/>
-                <a:cs typeface="Tahoma"/>
+                <a:latin typeface="Vazirmatn"/>
+                <a:cs typeface="Vazirmatn"/>
               </a:rPr>
               <a:t>قبل از ضربه به ترتیب</a:t>
             </a:r>
@@ -6177,8 +6410,8 @@
                 <a:solidFill>
                   <a:srgbClr val="EF6C00"/>
                 </a:solidFill>
-                <a:latin typeface="Tahoma"/>
-                <a:cs typeface="Tahoma"/>
+                <a:latin typeface="Vazirmatn"/>
+                <a:cs typeface="Vazirmatn"/>
               </a:rPr>
               <a:t>–  </a:t>
             </a:r>
@@ -6187,8 +6420,8 @@
                 <a:solidFill>
                   <a:srgbClr val="1F2A24"/>
                 </a:solidFill>
-                <a:latin typeface="Tahoma"/>
-                <a:cs typeface="Tahoma"/>
+                <a:latin typeface="Vazirmatn"/>
+                <a:cs typeface="Vazirmatn"/>
               </a:rPr>
               <a:t>فاصله را اندازه بگیرید</a:t>
             </a:r>
@@ -6210,8 +6443,8 @@
                 <a:solidFill>
                   <a:srgbClr val="EF6C00"/>
                 </a:solidFill>
-                <a:latin typeface="Tahoma"/>
-                <a:cs typeface="Tahoma"/>
+                <a:latin typeface="Vazirmatn"/>
+                <a:cs typeface="Vazirmatn"/>
               </a:rPr>
               <a:t>–  </a:t>
             </a:r>
@@ -6220,8 +6453,8 @@
                 <a:solidFill>
                   <a:srgbClr val="1F2A24"/>
                 </a:solidFill>
-                <a:latin typeface="Tahoma"/>
-                <a:cs typeface="Tahoma"/>
+                <a:latin typeface="Vazirmatn"/>
+                <a:cs typeface="Vazirmatn"/>
               </a:rPr>
               <a:t>Pin Location و خطرات اطراف Green را ببینید</a:t>
             </a:r>
@@ -6243,8 +6476,8 @@
                 <a:solidFill>
                   <a:srgbClr val="EF6C00"/>
                 </a:solidFill>
-                <a:latin typeface="Tahoma"/>
-                <a:cs typeface="Tahoma"/>
+                <a:latin typeface="Vazirmatn"/>
+                <a:cs typeface="Vazirmatn"/>
               </a:rPr>
               <a:t>–  </a:t>
             </a:r>
@@ -6253,8 +6486,8 @@
                 <a:solidFill>
                   <a:srgbClr val="1F2A24"/>
                 </a:solidFill>
-                <a:latin typeface="Tahoma"/>
-                <a:cs typeface="Tahoma"/>
+                <a:latin typeface="Vazirmatn"/>
+                <a:cs typeface="Vazirmatn"/>
               </a:rPr>
               <a:t>شرایط Lie و باد را بررسی کنید</a:t>
             </a:r>
@@ -6276,8 +6509,8 @@
                 <a:solidFill>
                   <a:srgbClr val="EF6C00"/>
                 </a:solidFill>
-                <a:latin typeface="Tahoma"/>
-                <a:cs typeface="Tahoma"/>
+                <a:latin typeface="Vazirmatn"/>
+                <a:cs typeface="Vazirmatn"/>
               </a:rPr>
               <a:t>–  </a:t>
             </a:r>
@@ -6286,8 +6519,8 @@
                 <a:solidFill>
                   <a:srgbClr val="1F2A24"/>
                 </a:solidFill>
-                <a:latin typeface="Tahoma"/>
-                <a:cs typeface="Tahoma"/>
+                <a:latin typeface="Vazirmatn"/>
+                <a:cs typeface="Vazirmatn"/>
               </a:rPr>
               <a:t>Target و سپس کلاب مناسب را انتخاب کنید</a:t>
             </a:r>
@@ -6422,8 +6655,8 @@
                 <a:solidFill>
                   <a:srgbClr val="EF6C00"/>
                 </a:solidFill>
-                <a:latin typeface="Tahoma"/>
-                <a:cs typeface="Tahoma"/>
+                <a:latin typeface="Vazirmatn"/>
+                <a:cs typeface="Vazirmatn"/>
               </a:rPr>
               <a:t>💡 </a:t>
             </a:r>
@@ -6432,8 +6665,8 @@
                 <a:solidFill>
                   <a:srgbClr val="1F2A24"/>
                 </a:solidFill>
-                <a:latin typeface="Tahoma"/>
-                <a:cs typeface="Tahoma"/>
+                <a:latin typeface="Vazirmatn"/>
+                <a:cs typeface="Vazirmatn"/>
               </a:rPr>
               <a:t>Approch خوب با تصمیم درست شروع می‌شود، نه با تکنیک بهتر.</a:t>
             </a:r>
@@ -6449,7 +6682,7 @@
         <p:spPr>
           <a:xfrm>
             <a:off x="502920" y="6400800"/>
-            <a:ext cx="5486400" cy="320040"/>
+            <a:ext cx="6858000" cy="320040"/>
           </a:xfrm>
           <a:prstGeom prst="rect">
             <a:avLst/>
@@ -6474,14 +6707,24 @@
               </a:spcAft>
             </a:pPr>
             <a:r>
+              <a:rPr sz="1100" b="1" i="0">
+                <a:solidFill>
+                  <a:srgbClr val="EF6C00"/>
+                </a:solidFill>
+                <a:latin typeface="Vazirmatn"/>
+                <a:cs typeface="Vazirmatn"/>
+              </a:rPr>
+              <a:t>⛳ Puttclub</a:t>
+            </a:r>
+            <a:r>
               <a:rPr sz="1000" b="0" i="0">
                 <a:solidFill>
                   <a:srgbClr val="5C6B62"/>
                 </a:solidFill>
-                <a:latin typeface="Tahoma"/>
-                <a:cs typeface="Tahoma"/>
-              </a:rPr>
-              <a:t>Golf Academy  ·  Semi-Advanced · Level 3</a:t>
+                <a:latin typeface="Vazirmatn"/>
+                <a:cs typeface="Vazirmatn"/>
+              </a:rPr>
+              <a:t>   ·   Semi-Advanced · Level 3</a:t>
             </a:r>
           </a:p>
         </p:txBody>
@@ -6524,8 +6767,8 @@
                 <a:solidFill>
                   <a:srgbClr val="EF6C00"/>
                 </a:solidFill>
-                <a:latin typeface="Tahoma"/>
-                <a:cs typeface="Tahoma"/>
+                <a:latin typeface="Vazirmatn"/>
+                <a:cs typeface="Vazirmatn"/>
               </a:rPr>
               <a:t>13</a:t>
             </a:r>
@@ -6720,8 +6963,8 @@
                 <a:solidFill>
                   <a:srgbClr val="FFB74D"/>
                 </a:solidFill>
-                <a:latin typeface="Tahoma"/>
-                <a:cs typeface="Tahoma"/>
+                <a:latin typeface="Vazirmatn"/>
+                <a:cs typeface="Vazirmatn"/>
               </a:rPr>
               <a:t>فصل ۱۳  |  هدف‌گیری Green</a:t>
             </a:r>
@@ -6766,8 +7009,8 @@
                 <a:solidFill>
                   <a:srgbClr val="FFFFFF"/>
                 </a:solidFill>
-                <a:latin typeface="Tahoma"/>
-                <a:cs typeface="Tahoma"/>
+                <a:latin typeface="Vazirmatn"/>
+                <a:cs typeface="Vazirmatn"/>
               </a:rPr>
               <a:t>« هدف همیشه پرچم نیست؛ هدف، امن‌ترین نقطه مناسب است. »</a:t>
             </a:r>
@@ -6789,8 +7032,8 @@
                 <a:solidFill>
                   <a:srgbClr val="C9D6C8"/>
                 </a:solidFill>
-                <a:latin typeface="Tahoma"/>
-                <a:cs typeface="Tahoma"/>
+                <a:latin typeface="Vazirmatn"/>
+                <a:cs typeface="Vazirmatn"/>
               </a:rPr>
               <a:t>اگر پرچم نزدیک Bunker باشد، ممکن است هدف ما قسمت دیگری از Green باشد — کاهش احتمال خطای بزرگ.</a:t>
             </a:r>
@@ -6806,7 +7049,7 @@
         <p:spPr>
           <a:xfrm>
             <a:off x="502920" y="6400800"/>
-            <a:ext cx="5486400" cy="320040"/>
+            <a:ext cx="6858000" cy="320040"/>
           </a:xfrm>
           <a:prstGeom prst="rect">
             <a:avLst/>
@@ -6831,14 +7074,24 @@
               </a:spcAft>
             </a:pPr>
             <a:r>
+              <a:rPr sz="1100" b="1" i="0">
+                <a:solidFill>
+                  <a:srgbClr val="FFB74D"/>
+                </a:solidFill>
+                <a:latin typeface="Vazirmatn"/>
+                <a:cs typeface="Vazirmatn"/>
+              </a:rPr>
+              <a:t>⛳ Puttclub</a:t>
+            </a:r>
+            <a:r>
               <a:rPr sz="1000" b="0" i="0">
                 <a:solidFill>
                   <a:srgbClr val="FFFFFF"/>
                 </a:solidFill>
-                <a:latin typeface="Tahoma"/>
-                <a:cs typeface="Tahoma"/>
-              </a:rPr>
-              <a:t>Golf Academy  ·  Semi-Advanced · Level 3</a:t>
+                <a:latin typeface="Vazirmatn"/>
+                <a:cs typeface="Vazirmatn"/>
+              </a:rPr>
+              <a:t>   ·   Semi-Advanced · Level 3</a:t>
             </a:r>
           </a:p>
         </p:txBody>
@@ -6881,8 +7134,8 @@
                 <a:solidFill>
                   <a:srgbClr val="FFB74D"/>
                 </a:solidFill>
-                <a:latin typeface="Tahoma"/>
-                <a:cs typeface="Tahoma"/>
+                <a:latin typeface="Vazirmatn"/>
+                <a:cs typeface="Vazirmatn"/>
               </a:rPr>
               <a:t>14</a:t>
             </a:r>
@@ -7033,8 +7286,8 @@
                 <a:solidFill>
                   <a:srgbClr val="EF6C00"/>
                 </a:solidFill>
-                <a:latin typeface="Tahoma"/>
-                <a:cs typeface="Tahoma"/>
+                <a:latin typeface="Vazirmatn"/>
+                <a:cs typeface="Vazirmatn"/>
               </a:rPr>
               <a:t>فصل ۱۴</a:t>
             </a:r>
@@ -7056,8 +7309,8 @@
                 <a:solidFill>
                   <a:srgbClr val="1F2A24"/>
                 </a:solidFill>
-                <a:latin typeface="Tahoma"/>
-                <a:cs typeface="Tahoma"/>
+                <a:latin typeface="Vazirmatn"/>
+                <a:cs typeface="Vazirmatn"/>
               </a:rPr>
               <a:t>Pitch Distance Chart شخصی</a:t>
             </a:r>
@@ -7144,8 +7397,8 @@
                           <a:solidFill>
                             <a:srgbClr val="FFFFFF"/>
                           </a:solidFill>
-                          <a:latin typeface="Tahoma"/>
-                          <a:cs typeface="Tahoma"/>
+                          <a:latin typeface="Vazirmatn"/>
+                          <a:cs typeface="Vazirmatn"/>
                         </a:rPr>
                         <a:t>فاصله</a:t>
                       </a:r>
@@ -7168,8 +7421,8 @@
                           <a:solidFill>
                             <a:srgbClr val="FFFFFF"/>
                           </a:solidFill>
-                          <a:latin typeface="Tahoma"/>
-                          <a:cs typeface="Tahoma"/>
+                          <a:latin typeface="Vazirmatn"/>
+                          <a:cs typeface="Vazirmatn"/>
                         </a:rPr>
                         <a:t>کلاب</a:t>
                       </a:r>
@@ -7192,8 +7445,8 @@
                           <a:solidFill>
                             <a:srgbClr val="FFFFFF"/>
                           </a:solidFill>
-                          <a:latin typeface="Tahoma"/>
-                          <a:cs typeface="Tahoma"/>
+                          <a:latin typeface="Vazirmatn"/>
+                          <a:cs typeface="Vazirmatn"/>
                         </a:rPr>
                         <a:t>طول Swing</a:t>
                       </a:r>
@@ -7216,8 +7469,8 @@
                           <a:solidFill>
                             <a:srgbClr val="FFFFFF"/>
                           </a:solidFill>
-                          <a:latin typeface="Tahoma"/>
-                          <a:cs typeface="Tahoma"/>
+                          <a:latin typeface="Vazirmatn"/>
+                          <a:cs typeface="Vazirmatn"/>
                         </a:rPr>
                         <a:t>Carry / Roll</a:t>
                       </a:r>
@@ -7242,8 +7495,8 @@
                           <a:solidFill>
                             <a:srgbClr val="EF6C00"/>
                           </a:solidFill>
-                          <a:latin typeface="Tahoma"/>
-                          <a:cs typeface="Tahoma"/>
+                          <a:latin typeface="Vazirmatn"/>
+                          <a:cs typeface="Vazirmatn"/>
                         </a:rPr>
                         <a:t>۲۰ متر</a:t>
                       </a:r>
@@ -7266,8 +7519,8 @@
                           <a:solidFill>
                             <a:srgbClr val="1F2A24"/>
                           </a:solidFill>
-                          <a:latin typeface="Tahoma"/>
-                          <a:cs typeface="Tahoma"/>
+                          <a:latin typeface="Vazirmatn"/>
+                          <a:cs typeface="Vazirmatn"/>
                         </a:rPr>
                         <a:t>ثبت بازیکن</a:t>
                       </a:r>
@@ -7290,8 +7543,8 @@
                           <a:solidFill>
                             <a:srgbClr val="1F2A24"/>
                           </a:solidFill>
-                          <a:latin typeface="Tahoma"/>
-                          <a:cs typeface="Tahoma"/>
+                          <a:latin typeface="Vazirmatn"/>
+                          <a:cs typeface="Vazirmatn"/>
                         </a:rPr>
                         <a:t>ثبت بازیکن</a:t>
                       </a:r>
@@ -7314,8 +7567,8 @@
                           <a:solidFill>
                             <a:srgbClr val="1F2A24"/>
                           </a:solidFill>
-                          <a:latin typeface="Tahoma"/>
-                          <a:cs typeface="Tahoma"/>
+                          <a:latin typeface="Vazirmatn"/>
+                          <a:cs typeface="Vazirmatn"/>
                         </a:rPr>
                         <a:t>ثبت بازیکن</a:t>
                       </a:r>
@@ -7340,8 +7593,8 @@
                           <a:solidFill>
                             <a:srgbClr val="EF6C00"/>
                           </a:solidFill>
-                          <a:latin typeface="Tahoma"/>
-                          <a:cs typeface="Tahoma"/>
+                          <a:latin typeface="Vazirmatn"/>
+                          <a:cs typeface="Vazirmatn"/>
                         </a:rPr>
                         <a:t>۳۰ متر</a:t>
                       </a:r>
@@ -7364,8 +7617,8 @@
                           <a:solidFill>
                             <a:srgbClr val="1F2A24"/>
                           </a:solidFill>
-                          <a:latin typeface="Tahoma"/>
-                          <a:cs typeface="Tahoma"/>
+                          <a:latin typeface="Vazirmatn"/>
+                          <a:cs typeface="Vazirmatn"/>
                         </a:rPr>
                         <a:t>ثبت بازیکن</a:t>
                       </a:r>
@@ -7388,8 +7641,8 @@
                           <a:solidFill>
                             <a:srgbClr val="1F2A24"/>
                           </a:solidFill>
-                          <a:latin typeface="Tahoma"/>
-                          <a:cs typeface="Tahoma"/>
+                          <a:latin typeface="Vazirmatn"/>
+                          <a:cs typeface="Vazirmatn"/>
                         </a:rPr>
                         <a:t>ثبت بازیکن</a:t>
                       </a:r>
@@ -7412,8 +7665,8 @@
                           <a:solidFill>
                             <a:srgbClr val="1F2A24"/>
                           </a:solidFill>
-                          <a:latin typeface="Tahoma"/>
-                          <a:cs typeface="Tahoma"/>
+                          <a:latin typeface="Vazirmatn"/>
+                          <a:cs typeface="Vazirmatn"/>
                         </a:rPr>
                         <a:t>ثبت بازیکن</a:t>
                       </a:r>
@@ -7438,8 +7691,8 @@
                           <a:solidFill>
                             <a:srgbClr val="EF6C00"/>
                           </a:solidFill>
-                          <a:latin typeface="Tahoma"/>
-                          <a:cs typeface="Tahoma"/>
+                          <a:latin typeface="Vazirmatn"/>
+                          <a:cs typeface="Vazirmatn"/>
                         </a:rPr>
                         <a:t>۴۰ متر</a:t>
                       </a:r>
@@ -7462,8 +7715,8 @@
                           <a:solidFill>
                             <a:srgbClr val="1F2A24"/>
                           </a:solidFill>
-                          <a:latin typeface="Tahoma"/>
-                          <a:cs typeface="Tahoma"/>
+                          <a:latin typeface="Vazirmatn"/>
+                          <a:cs typeface="Vazirmatn"/>
                         </a:rPr>
                         <a:t>ثبت بازیکن</a:t>
                       </a:r>
@@ -7486,8 +7739,8 @@
                           <a:solidFill>
                             <a:srgbClr val="1F2A24"/>
                           </a:solidFill>
-                          <a:latin typeface="Tahoma"/>
-                          <a:cs typeface="Tahoma"/>
+                          <a:latin typeface="Vazirmatn"/>
+                          <a:cs typeface="Vazirmatn"/>
                         </a:rPr>
                         <a:t>ثبت بازیکن</a:t>
                       </a:r>
@@ -7510,8 +7763,8 @@
                           <a:solidFill>
                             <a:srgbClr val="1F2A24"/>
                           </a:solidFill>
-                          <a:latin typeface="Tahoma"/>
-                          <a:cs typeface="Tahoma"/>
+                          <a:latin typeface="Vazirmatn"/>
+                          <a:cs typeface="Vazirmatn"/>
                         </a:rPr>
                         <a:t>ثبت بازیکن</a:t>
                       </a:r>
@@ -7536,8 +7789,8 @@
                           <a:solidFill>
                             <a:srgbClr val="EF6C00"/>
                           </a:solidFill>
-                          <a:latin typeface="Tahoma"/>
-                          <a:cs typeface="Tahoma"/>
+                          <a:latin typeface="Vazirmatn"/>
+                          <a:cs typeface="Vazirmatn"/>
                         </a:rPr>
                         <a:t>۵۰ متر</a:t>
                       </a:r>
@@ -7560,8 +7813,8 @@
                           <a:solidFill>
                             <a:srgbClr val="1F2A24"/>
                           </a:solidFill>
-                          <a:latin typeface="Tahoma"/>
-                          <a:cs typeface="Tahoma"/>
+                          <a:latin typeface="Vazirmatn"/>
+                          <a:cs typeface="Vazirmatn"/>
                         </a:rPr>
                         <a:t>ثبت بازیکن</a:t>
                       </a:r>
@@ -7584,8 +7837,8 @@
                           <a:solidFill>
                             <a:srgbClr val="1F2A24"/>
                           </a:solidFill>
-                          <a:latin typeface="Tahoma"/>
-                          <a:cs typeface="Tahoma"/>
+                          <a:latin typeface="Vazirmatn"/>
+                          <a:cs typeface="Vazirmatn"/>
                         </a:rPr>
                         <a:t>ثبت بازیکن</a:t>
                       </a:r>
@@ -7608,8 +7861,8 @@
                           <a:solidFill>
                             <a:srgbClr val="1F2A24"/>
                           </a:solidFill>
-                          <a:latin typeface="Tahoma"/>
-                          <a:cs typeface="Tahoma"/>
+                          <a:latin typeface="Vazirmatn"/>
+                          <a:cs typeface="Vazirmatn"/>
                         </a:rPr>
                         <a:t>ثبت بازیکن</a:t>
                       </a:r>
@@ -7634,8 +7887,8 @@
                           <a:solidFill>
                             <a:srgbClr val="EF6C00"/>
                           </a:solidFill>
-                          <a:latin typeface="Tahoma"/>
-                          <a:cs typeface="Tahoma"/>
+                          <a:latin typeface="Vazirmatn"/>
+                          <a:cs typeface="Vazirmatn"/>
                         </a:rPr>
                         <a:t>۶۰ متر</a:t>
                       </a:r>
@@ -7658,8 +7911,8 @@
                           <a:solidFill>
                             <a:srgbClr val="1F2A24"/>
                           </a:solidFill>
-                          <a:latin typeface="Tahoma"/>
-                          <a:cs typeface="Tahoma"/>
+                          <a:latin typeface="Vazirmatn"/>
+                          <a:cs typeface="Vazirmatn"/>
                         </a:rPr>
                         <a:t>ثبت بازیکن</a:t>
                       </a:r>
@@ -7682,8 +7935,8 @@
                           <a:solidFill>
                             <a:srgbClr val="1F2A24"/>
                           </a:solidFill>
-                          <a:latin typeface="Tahoma"/>
-                          <a:cs typeface="Tahoma"/>
+                          <a:latin typeface="Vazirmatn"/>
+                          <a:cs typeface="Vazirmatn"/>
                         </a:rPr>
                         <a:t>ثبت بازیکن</a:t>
                       </a:r>
@@ -7706,8 +7959,8 @@
                           <a:solidFill>
                             <a:srgbClr val="1F2A24"/>
                           </a:solidFill>
-                          <a:latin typeface="Tahoma"/>
-                          <a:cs typeface="Tahoma"/>
+                          <a:latin typeface="Vazirmatn"/>
+                          <a:cs typeface="Vazirmatn"/>
                         </a:rPr>
                         <a:t>ثبت بازیکن</a:t>
                       </a:r>
@@ -7762,8 +8015,8 @@
                 <a:solidFill>
                   <a:srgbClr val="EF6C00"/>
                 </a:solidFill>
-                <a:latin typeface="Tahoma"/>
-                <a:cs typeface="Tahoma"/>
+                <a:latin typeface="Vazirmatn"/>
+                <a:cs typeface="Vazirmatn"/>
               </a:rPr>
               <a:t>●  </a:t>
             </a:r>
@@ -7772,8 +8025,8 @@
                 <a:solidFill>
                   <a:srgbClr val="5C6B62"/>
                 </a:solidFill>
-                <a:latin typeface="Tahoma"/>
-                <a:cs typeface="Tahoma"/>
+                <a:latin typeface="Vazirmatn"/>
+                <a:cs typeface="Vazirmatn"/>
               </a:rPr>
               <a:t>Pitch را از ۲۰ تا ۶۰ متر تمرین کنید و کم‌کم یک Pitch Distance Chart شخصی بسازید.</a:t>
             </a:r>
@@ -7789,7 +8042,7 @@
         <p:spPr>
           <a:xfrm>
             <a:off x="502920" y="6400800"/>
-            <a:ext cx="5486400" cy="320040"/>
+            <a:ext cx="6858000" cy="320040"/>
           </a:xfrm>
           <a:prstGeom prst="rect">
             <a:avLst/>
@@ -7814,14 +8067,24 @@
               </a:spcAft>
             </a:pPr>
             <a:r>
+              <a:rPr sz="1100" b="1" i="0">
+                <a:solidFill>
+                  <a:srgbClr val="EF6C00"/>
+                </a:solidFill>
+                <a:latin typeface="Vazirmatn"/>
+                <a:cs typeface="Vazirmatn"/>
+              </a:rPr>
+              <a:t>⛳ Puttclub</a:t>
+            </a:r>
+            <a:r>
               <a:rPr sz="1000" b="0" i="0">
                 <a:solidFill>
                   <a:srgbClr val="5C6B62"/>
                 </a:solidFill>
-                <a:latin typeface="Tahoma"/>
-                <a:cs typeface="Tahoma"/>
-              </a:rPr>
-              <a:t>Golf Academy  ·  Semi-Advanced · Level 3</a:t>
+                <a:latin typeface="Vazirmatn"/>
+                <a:cs typeface="Vazirmatn"/>
+              </a:rPr>
+              <a:t>   ·   Semi-Advanced · Level 3</a:t>
             </a:r>
           </a:p>
         </p:txBody>
@@ -7864,8 +8127,8 @@
                 <a:solidFill>
                   <a:srgbClr val="EF6C00"/>
                 </a:solidFill>
-                <a:latin typeface="Tahoma"/>
-                <a:cs typeface="Tahoma"/>
+                <a:latin typeface="Vazirmatn"/>
+                <a:cs typeface="Vazirmatn"/>
               </a:rPr>
               <a:t>15</a:t>
             </a:r>
@@ -8016,8 +8279,8 @@
                 <a:solidFill>
                   <a:srgbClr val="EF6C00"/>
                 </a:solidFill>
-                <a:latin typeface="Tahoma"/>
-                <a:cs typeface="Tahoma"/>
+                <a:latin typeface="Vazirmatn"/>
+                <a:cs typeface="Vazirmatn"/>
               </a:rPr>
               <a:t>فصل ۱۵</a:t>
             </a:r>
@@ -8039,8 +8302,8 @@
                 <a:solidFill>
                   <a:srgbClr val="1F2A24"/>
                 </a:solidFill>
-                <a:latin typeface="Tahoma"/>
-                <a:cs typeface="Tahoma"/>
+                <a:latin typeface="Vazirmatn"/>
+                <a:cs typeface="Vazirmatn"/>
               </a:rPr>
               <a:t>تفاوت Carry، Roll و Total</a:t>
             </a:r>
@@ -8219,8 +8482,8 @@
                 <a:solidFill>
                   <a:srgbClr val="EF6C00"/>
                 </a:solidFill>
-                <a:latin typeface="Tahoma"/>
-                <a:cs typeface="Tahoma"/>
+                <a:latin typeface="Vazirmatn"/>
+                <a:cs typeface="Vazirmatn"/>
               </a:rPr>
               <a:t>Carry</a:t>
             </a:r>
@@ -8242,8 +8505,8 @@
                 <a:solidFill>
                   <a:srgbClr val="5C6B62"/>
                 </a:solidFill>
-                <a:latin typeface="Tahoma"/>
-                <a:cs typeface="Tahoma"/>
+                <a:latin typeface="Vazirmatn"/>
+                <a:cs typeface="Vazirmatn"/>
               </a:rPr>
               <a:t>فاصله پرواز توپ تا اولین برخورد با زمین</a:t>
             </a:r>
@@ -8378,8 +8641,8 @@
                 <a:solidFill>
                   <a:srgbClr val="EF6C00"/>
                 </a:solidFill>
-                <a:latin typeface="Tahoma"/>
-                <a:cs typeface="Tahoma"/>
+                <a:latin typeface="Vazirmatn"/>
+                <a:cs typeface="Vazirmatn"/>
               </a:rPr>
               <a:t>Roll</a:t>
             </a:r>
@@ -8401,8 +8664,8 @@
                 <a:solidFill>
                   <a:srgbClr val="5C6B62"/>
                 </a:solidFill>
-                <a:latin typeface="Tahoma"/>
-                <a:cs typeface="Tahoma"/>
+                <a:latin typeface="Vazirmatn"/>
+                <a:cs typeface="Vazirmatn"/>
               </a:rPr>
               <a:t>مسافتی که توپ بعد از برخورد روی زمین طی می‌کند</a:t>
             </a:r>
@@ -8537,8 +8800,8 @@
                 <a:solidFill>
                   <a:srgbClr val="EF6C00"/>
                 </a:solidFill>
-                <a:latin typeface="Tahoma"/>
-                <a:cs typeface="Tahoma"/>
+                <a:latin typeface="Vazirmatn"/>
+                <a:cs typeface="Vazirmatn"/>
               </a:rPr>
               <a:t>Total</a:t>
             </a:r>
@@ -8560,8 +8823,8 @@
                 <a:solidFill>
                   <a:srgbClr val="5C6B62"/>
                 </a:solidFill>
-                <a:latin typeface="Tahoma"/>
-                <a:cs typeface="Tahoma"/>
+                <a:latin typeface="Vazirmatn"/>
+                <a:cs typeface="Vazirmatn"/>
               </a:rPr>
               <a:t>Carry + Roll = فاصله نهایی</a:t>
             </a:r>
@@ -8652,8 +8915,8 @@
                 <a:solidFill>
                   <a:srgbClr val="FFFFFF"/>
                 </a:solidFill>
-                <a:latin typeface="Tahoma"/>
-                <a:cs typeface="Tahoma"/>
+                <a:latin typeface="Vazirmatn"/>
+                <a:cs typeface="Vazirmatn"/>
               </a:rPr>
               <a:t>در Short Game دانستن این تفاوت برای انتخاب Landing Point بسیار حیاتی است.</a:t>
             </a:r>
@@ -8669,7 +8932,7 @@
         <p:spPr>
           <a:xfrm>
             <a:off x="502920" y="6400800"/>
-            <a:ext cx="5486400" cy="320040"/>
+            <a:ext cx="6858000" cy="320040"/>
           </a:xfrm>
           <a:prstGeom prst="rect">
             <a:avLst/>
@@ -8694,14 +8957,24 @@
               </a:spcAft>
             </a:pPr>
             <a:r>
+              <a:rPr sz="1100" b="1" i="0">
+                <a:solidFill>
+                  <a:srgbClr val="EF6C00"/>
+                </a:solidFill>
+                <a:latin typeface="Vazirmatn"/>
+                <a:cs typeface="Vazirmatn"/>
+              </a:rPr>
+              <a:t>⛳ Puttclub</a:t>
+            </a:r>
+            <a:r>
               <a:rPr sz="1000" b="0" i="0">
                 <a:solidFill>
                   <a:srgbClr val="5C6B62"/>
                 </a:solidFill>
-                <a:latin typeface="Tahoma"/>
-                <a:cs typeface="Tahoma"/>
-              </a:rPr>
-              <a:t>Golf Academy  ·  Semi-Advanced · Level 3</a:t>
+                <a:latin typeface="Vazirmatn"/>
+                <a:cs typeface="Vazirmatn"/>
+              </a:rPr>
+              <a:t>   ·   Semi-Advanced · Level 3</a:t>
             </a:r>
           </a:p>
         </p:txBody>
@@ -8744,8 +9017,8 @@
                 <a:solidFill>
                   <a:srgbClr val="EF6C00"/>
                 </a:solidFill>
-                <a:latin typeface="Tahoma"/>
-                <a:cs typeface="Tahoma"/>
+                <a:latin typeface="Vazirmatn"/>
+                <a:cs typeface="Vazirmatn"/>
               </a:rPr>
               <a:t>16</a:t>
             </a:r>
@@ -8896,8 +9169,8 @@
                 <a:solidFill>
                   <a:srgbClr val="EF6C00"/>
                 </a:solidFill>
-                <a:latin typeface="Tahoma"/>
-                <a:cs typeface="Tahoma"/>
+                <a:latin typeface="Vazirmatn"/>
+                <a:cs typeface="Vazirmatn"/>
               </a:rPr>
               <a:t>فصل ۱۶</a:t>
             </a:r>
@@ -8919,8 +9192,8 @@
                 <a:solidFill>
                   <a:srgbClr val="1F2A24"/>
                 </a:solidFill>
-                <a:latin typeface="Tahoma"/>
-                <a:cs typeface="Tahoma"/>
+                <a:latin typeface="Vazirmatn"/>
+                <a:cs typeface="Vazirmatn"/>
               </a:rPr>
               <a:t>Chip از Lieهای مختلف</a:t>
             </a:r>
@@ -9009,8 +9282,8 @@
                 <a:solidFill>
                   <a:srgbClr val="EF6C00"/>
                 </a:solidFill>
-                <a:latin typeface="Tahoma"/>
-                <a:cs typeface="Tahoma"/>
+                <a:latin typeface="Vazirmatn"/>
+                <a:cs typeface="Vazirmatn"/>
               </a:rPr>
               <a:t>●  </a:t>
             </a:r>
@@ -9019,8 +9292,8 @@
                 <a:solidFill>
                   <a:srgbClr val="EF6C00"/>
                 </a:solidFill>
-                <a:latin typeface="Tahoma"/>
-                <a:cs typeface="Tahoma"/>
+                <a:latin typeface="Vazirmatn"/>
+                <a:cs typeface="Vazirmatn"/>
               </a:rPr>
               <a:t>Chip را از شرایط مختلف تمرین کنید</a:t>
             </a:r>
@@ -9042,8 +9315,8 @@
                 <a:solidFill>
                   <a:srgbClr val="EF6C00"/>
                 </a:solidFill>
-                <a:latin typeface="Tahoma"/>
-                <a:cs typeface="Tahoma"/>
+                <a:latin typeface="Vazirmatn"/>
+                <a:cs typeface="Vazirmatn"/>
               </a:rPr>
               <a:t>–  </a:t>
             </a:r>
@@ -9052,8 +9325,8 @@
                 <a:solidFill>
                   <a:srgbClr val="1F2A24"/>
                 </a:solidFill>
-                <a:latin typeface="Tahoma"/>
-                <a:cs typeface="Tahoma"/>
+                <a:latin typeface="Vazirmatn"/>
+                <a:cs typeface="Vazirmatn"/>
               </a:rPr>
               <a:t>Fairway و Rough کوتاه</a:t>
             </a:r>
@@ -9075,8 +9348,8 @@
                 <a:solidFill>
                   <a:srgbClr val="EF6C00"/>
                 </a:solidFill>
-                <a:latin typeface="Tahoma"/>
-                <a:cs typeface="Tahoma"/>
+                <a:latin typeface="Vazirmatn"/>
+                <a:cs typeface="Vazirmatn"/>
               </a:rPr>
               <a:t>–  </a:t>
             </a:r>
@@ -9085,8 +9358,8 @@
                 <a:solidFill>
                   <a:srgbClr val="1F2A24"/>
                 </a:solidFill>
-                <a:latin typeface="Tahoma"/>
-                <a:cs typeface="Tahoma"/>
+                <a:latin typeface="Vazirmatn"/>
+                <a:cs typeface="Vazirmatn"/>
               </a:rPr>
               <a:t>Rough بلند و نزدیک لبه Green</a:t>
             </a:r>
@@ -9108,8 +9381,8 @@
                 <a:solidFill>
                   <a:srgbClr val="EF6C00"/>
                 </a:solidFill>
-                <a:latin typeface="Tahoma"/>
-                <a:cs typeface="Tahoma"/>
+                <a:latin typeface="Vazirmatn"/>
+                <a:cs typeface="Vazirmatn"/>
               </a:rPr>
               <a:t>–  </a:t>
             </a:r>
@@ -9118,8 +9391,8 @@
                 <a:solidFill>
                   <a:srgbClr val="1F2A24"/>
                 </a:solidFill>
-                <a:latin typeface="Tahoma"/>
-                <a:cs typeface="Tahoma"/>
+                <a:latin typeface="Vazirmatn"/>
+                <a:cs typeface="Vazirmatn"/>
               </a:rPr>
               <a:t>شیب بالا (Uphill) و شیب پایین (Downhill)</a:t>
             </a:r>
@@ -9141,8 +9414,8 @@
                 <a:solidFill>
                   <a:srgbClr val="EF6C00"/>
                 </a:solidFill>
-                <a:latin typeface="Tahoma"/>
-                <a:cs typeface="Tahoma"/>
+                <a:latin typeface="Vazirmatn"/>
+                <a:cs typeface="Vazirmatn"/>
               </a:rPr>
               <a:t>●  </a:t>
             </a:r>
@@ -9151,8 +9424,8 @@
                 <a:solidFill>
                   <a:srgbClr val="EF6C00"/>
                 </a:solidFill>
-                <a:latin typeface="Tahoma"/>
-                <a:cs typeface="Tahoma"/>
+                <a:latin typeface="Vazirmatn"/>
+                <a:cs typeface="Vazirmatn"/>
               </a:rPr>
               <a:t>قبل از هر ضربه از خود بپرسید</a:t>
             </a:r>
@@ -9174,8 +9447,8 @@
                 <a:solidFill>
                   <a:srgbClr val="EF6C00"/>
                 </a:solidFill>
-                <a:latin typeface="Tahoma"/>
-                <a:cs typeface="Tahoma"/>
+                <a:latin typeface="Vazirmatn"/>
+                <a:cs typeface="Vazirmatn"/>
               </a:rPr>
               <a:t>–  </a:t>
             </a:r>
@@ -9184,8 +9457,8 @@
                 <a:solidFill>
                   <a:srgbClr val="1F2A24"/>
                 </a:solidFill>
-                <a:latin typeface="Tahoma"/>
-                <a:cs typeface="Tahoma"/>
+                <a:latin typeface="Vazirmatn"/>
+                <a:cs typeface="Vazirmatn"/>
               </a:rPr>
               <a:t>«Lie من چه نوع ضربه‌ای را اجازه می‌دهد؟»</a:t>
             </a:r>
@@ -9320,8 +9593,8 @@
                 <a:solidFill>
                   <a:srgbClr val="EF6C00"/>
                 </a:solidFill>
-                <a:latin typeface="Tahoma"/>
-                <a:cs typeface="Tahoma"/>
+                <a:latin typeface="Vazirmatn"/>
+                <a:cs typeface="Vazirmatn"/>
               </a:rPr>
               <a:t>💡 </a:t>
             </a:r>
@@ -9330,8 +9603,8 @@
                 <a:solidFill>
                   <a:srgbClr val="1F2A24"/>
                 </a:solidFill>
-                <a:latin typeface="Tahoma"/>
-                <a:cs typeface="Tahoma"/>
+                <a:latin typeface="Vazirmatn"/>
+                <a:cs typeface="Vazirmatn"/>
               </a:rPr>
               <a:t>وضعیت Lie تعیین می‌کند چه ضربه‌ای ممکن و منطقی است؛ اول Lie را بخوانید.</a:t>
             </a:r>
@@ -9347,7 +9620,7 @@
         <p:spPr>
           <a:xfrm>
             <a:off x="502920" y="6400800"/>
-            <a:ext cx="5486400" cy="320040"/>
+            <a:ext cx="6858000" cy="320040"/>
           </a:xfrm>
           <a:prstGeom prst="rect">
             <a:avLst/>
@@ -9372,14 +9645,24 @@
               </a:spcAft>
             </a:pPr>
             <a:r>
+              <a:rPr sz="1100" b="1" i="0">
+                <a:solidFill>
+                  <a:srgbClr val="EF6C00"/>
+                </a:solidFill>
+                <a:latin typeface="Vazirmatn"/>
+                <a:cs typeface="Vazirmatn"/>
+              </a:rPr>
+              <a:t>⛳ Puttclub</a:t>
+            </a:r>
+            <a:r>
               <a:rPr sz="1000" b="0" i="0">
                 <a:solidFill>
                   <a:srgbClr val="5C6B62"/>
                 </a:solidFill>
-                <a:latin typeface="Tahoma"/>
-                <a:cs typeface="Tahoma"/>
-              </a:rPr>
-              <a:t>Golf Academy  ·  Semi-Advanced · Level 3</a:t>
+                <a:latin typeface="Vazirmatn"/>
+                <a:cs typeface="Vazirmatn"/>
+              </a:rPr>
+              <a:t>   ·   Semi-Advanced · Level 3</a:t>
             </a:r>
           </a:p>
         </p:txBody>
@@ -9422,8 +9705,8 @@
                 <a:solidFill>
                   <a:srgbClr val="EF6C00"/>
                 </a:solidFill>
-                <a:latin typeface="Tahoma"/>
-                <a:cs typeface="Tahoma"/>
+                <a:latin typeface="Vazirmatn"/>
+                <a:cs typeface="Vazirmatn"/>
               </a:rPr>
               <a:t>17</a:t>
             </a:r>
@@ -9574,8 +9857,8 @@
                 <a:solidFill>
                   <a:srgbClr val="EF6C00"/>
                 </a:solidFill>
-                <a:latin typeface="Tahoma"/>
-                <a:cs typeface="Tahoma"/>
+                <a:latin typeface="Vazirmatn"/>
+                <a:cs typeface="Vazirmatn"/>
               </a:rPr>
               <a:t>فصل ۱۷</a:t>
             </a:r>
@@ -9597,8 +9880,8 @@
                 <a:solidFill>
                   <a:srgbClr val="1F2A24"/>
                 </a:solidFill>
-                <a:latin typeface="Tahoma"/>
-                <a:cs typeface="Tahoma"/>
+                <a:latin typeface="Vazirmatn"/>
+                <a:cs typeface="Vazirmatn"/>
               </a:rPr>
               <a:t>انتخاب کلاب در Chip</a:t>
             </a:r>
@@ -9687,8 +9970,8 @@
                 <a:solidFill>
                   <a:srgbClr val="EF6C00"/>
                 </a:solidFill>
-                <a:latin typeface="Tahoma"/>
-                <a:cs typeface="Tahoma"/>
+                <a:latin typeface="Vazirmatn"/>
+                <a:cs typeface="Vazirmatn"/>
               </a:rPr>
               <a:t>●  </a:t>
             </a:r>
@@ -9697,8 +9980,8 @@
                 <a:solidFill>
                   <a:srgbClr val="EF6C00"/>
                 </a:solidFill>
-                <a:latin typeface="Tahoma"/>
-                <a:cs typeface="Tahoma"/>
+                <a:latin typeface="Vazirmatn"/>
+                <a:cs typeface="Vazirmatn"/>
               </a:rPr>
               <a:t>یک موقعیت را با چند کلاب بازی کنید</a:t>
             </a:r>
@@ -9707,8 +9990,8 @@
                 <a:solidFill>
                   <a:srgbClr val="1F2A24"/>
                 </a:solidFill>
-                <a:latin typeface="Tahoma"/>
-                <a:cs typeface="Tahoma"/>
+                <a:latin typeface="Vazirmatn"/>
+                <a:cs typeface="Vazirmatn"/>
               </a:rPr>
               <a:t>  —  7 Iron ← 9 ← PW ← Wedge</a:t>
             </a:r>
@@ -9730,8 +10013,8 @@
                 <a:solidFill>
                   <a:srgbClr val="EF6C00"/>
                 </a:solidFill>
-                <a:latin typeface="Tahoma"/>
-                <a:cs typeface="Tahoma"/>
+                <a:latin typeface="Vazirmatn"/>
+                <a:cs typeface="Vazirmatn"/>
               </a:rPr>
               <a:t>●  </a:t>
             </a:r>
@@ -9740,8 +10023,8 @@
                 <a:solidFill>
                   <a:srgbClr val="EF6C00"/>
                 </a:solidFill>
-                <a:latin typeface="Tahoma"/>
-                <a:cs typeface="Tahoma"/>
+                <a:latin typeface="Vazirmatn"/>
+                <a:cs typeface="Vazirmatn"/>
               </a:rPr>
               <a:t>هدف</a:t>
             </a:r>
@@ -9750,8 +10033,8 @@
                 <a:solidFill>
                   <a:srgbClr val="1F2A24"/>
                 </a:solidFill>
-                <a:latin typeface="Tahoma"/>
-                <a:cs typeface="Tahoma"/>
+                <a:latin typeface="Vazirmatn"/>
+                <a:cs typeface="Vazirmatn"/>
               </a:rPr>
               <a:t>  —  رسیدن توپ به یک Target مشخص</a:t>
             </a:r>
@@ -9773,8 +10056,8 @@
                 <a:solidFill>
                   <a:srgbClr val="EF6C00"/>
                 </a:solidFill>
-                <a:latin typeface="Tahoma"/>
-                <a:cs typeface="Tahoma"/>
+                <a:latin typeface="Vazirmatn"/>
+                <a:cs typeface="Vazirmatn"/>
               </a:rPr>
               <a:t>●  </a:t>
             </a:r>
@@ -9783,8 +10066,8 @@
                 <a:solidFill>
                   <a:srgbClr val="EF6C00"/>
                 </a:solidFill>
-                <a:latin typeface="Tahoma"/>
-                <a:cs typeface="Tahoma"/>
+                <a:latin typeface="Vazirmatn"/>
+                <a:cs typeface="Vazirmatn"/>
               </a:rPr>
               <a:t>مشاهده خواهید کرد</a:t>
             </a:r>
@@ -9806,8 +10089,8 @@
                 <a:solidFill>
                   <a:srgbClr val="EF6C00"/>
                 </a:solidFill>
-                <a:latin typeface="Tahoma"/>
-                <a:cs typeface="Tahoma"/>
+                <a:latin typeface="Vazirmatn"/>
+                <a:cs typeface="Vazirmatn"/>
               </a:rPr>
               <a:t>–  </a:t>
             </a:r>
@@ -9816,8 +10099,8 @@
                 <a:solidFill>
                   <a:srgbClr val="1F2A24"/>
                 </a:solidFill>
-                <a:latin typeface="Tahoma"/>
-                <a:cs typeface="Tahoma"/>
+                <a:latin typeface="Vazirmatn"/>
+                <a:cs typeface="Vazirmatn"/>
               </a:rPr>
               <a:t>Loft بیشتر ← پرواز بیشتر و Roll کمتر</a:t>
             </a:r>
@@ -9839,8 +10122,8 @@
                 <a:solidFill>
                   <a:srgbClr val="EF6C00"/>
                 </a:solidFill>
-                <a:latin typeface="Tahoma"/>
-                <a:cs typeface="Tahoma"/>
+                <a:latin typeface="Vazirmatn"/>
+                <a:cs typeface="Vazirmatn"/>
               </a:rPr>
               <a:t>–  </a:t>
             </a:r>
@@ -9849,8 +10132,8 @@
                 <a:solidFill>
                   <a:srgbClr val="1F2A24"/>
                 </a:solidFill>
-                <a:latin typeface="Tahoma"/>
-                <a:cs typeface="Tahoma"/>
+                <a:latin typeface="Vazirmatn"/>
+                <a:cs typeface="Vazirmatn"/>
               </a:rPr>
               <a:t>Loft کمتر ← پرواز کمتر و Roll بیشتر</a:t>
             </a:r>
@@ -9872,8 +10155,8 @@
                 <a:solidFill>
                   <a:srgbClr val="EF6C00"/>
                 </a:solidFill>
-                <a:latin typeface="Tahoma"/>
-                <a:cs typeface="Tahoma"/>
+                <a:latin typeface="Vazirmatn"/>
+                <a:cs typeface="Vazirmatn"/>
               </a:rPr>
               <a:t>●  </a:t>
             </a:r>
@@ -9882,8 +10165,8 @@
                 <a:solidFill>
                   <a:srgbClr val="1F2A24"/>
                 </a:solidFill>
-                <a:latin typeface="Tahoma"/>
-                <a:cs typeface="Tahoma"/>
+                <a:latin typeface="Vazirmatn"/>
+                <a:cs typeface="Vazirmatn"/>
               </a:rPr>
               <a:t>نتیجه واقعی به تکنیک، Lie، Green و شرایط ضربه وابسته است</a:t>
             </a:r>
@@ -10018,8 +10301,8 @@
                 <a:solidFill>
                   <a:srgbClr val="EF6C00"/>
                 </a:solidFill>
-                <a:latin typeface="Tahoma"/>
-                <a:cs typeface="Tahoma"/>
+                <a:latin typeface="Vazirmatn"/>
+                <a:cs typeface="Vazirmatn"/>
               </a:rPr>
               <a:t>💡 </a:t>
             </a:r>
@@ -10028,8 +10311,8 @@
                 <a:solidFill>
                   <a:srgbClr val="1F2A24"/>
                 </a:solidFill>
-                <a:latin typeface="Tahoma"/>
-                <a:cs typeface="Tahoma"/>
+                <a:latin typeface="Vazirmatn"/>
+                <a:cs typeface="Vazirmatn"/>
               </a:rPr>
               <a:t>با تغییر کلاب، مسیر پرواز و Roll تغییر می‌کند؛ این یعنی کلاب ابزار کنترل Trajectory است.</a:t>
             </a:r>
@@ -10045,7 +10328,7 @@
         <p:spPr>
           <a:xfrm>
             <a:off x="502920" y="6400800"/>
-            <a:ext cx="5486400" cy="320040"/>
+            <a:ext cx="6858000" cy="320040"/>
           </a:xfrm>
           <a:prstGeom prst="rect">
             <a:avLst/>
@@ -10070,14 +10353,24 @@
               </a:spcAft>
             </a:pPr>
             <a:r>
+              <a:rPr sz="1100" b="1" i="0">
+                <a:solidFill>
+                  <a:srgbClr val="EF6C00"/>
+                </a:solidFill>
+                <a:latin typeface="Vazirmatn"/>
+                <a:cs typeface="Vazirmatn"/>
+              </a:rPr>
+              <a:t>⛳ Puttclub</a:t>
+            </a:r>
+            <a:r>
               <a:rPr sz="1000" b="0" i="0">
                 <a:solidFill>
                   <a:srgbClr val="5C6B62"/>
                 </a:solidFill>
-                <a:latin typeface="Tahoma"/>
-                <a:cs typeface="Tahoma"/>
-              </a:rPr>
-              <a:t>Golf Academy  ·  Semi-Advanced · Level 3</a:t>
+                <a:latin typeface="Vazirmatn"/>
+                <a:cs typeface="Vazirmatn"/>
+              </a:rPr>
+              <a:t>   ·   Semi-Advanced · Level 3</a:t>
             </a:r>
           </a:p>
         </p:txBody>
@@ -10120,8 +10413,8 @@
                 <a:solidFill>
                   <a:srgbClr val="EF6C00"/>
                 </a:solidFill>
-                <a:latin typeface="Tahoma"/>
-                <a:cs typeface="Tahoma"/>
+                <a:latin typeface="Vazirmatn"/>
+                <a:cs typeface="Vazirmatn"/>
               </a:rPr>
               <a:t>18</a:t>
             </a:r>
@@ -10298,8 +10591,8 @@
                 <a:solidFill>
                   <a:srgbClr val="FFFFFF"/>
                 </a:solidFill>
-                <a:latin typeface="Tahoma"/>
-                <a:cs typeface="Tahoma"/>
+                <a:latin typeface="Vazirmatn"/>
+                <a:cs typeface="Vazirmatn"/>
               </a:rPr>
               <a:t>توپ در شن — تکنیک Sand Shot</a:t>
             </a:r>
@@ -10388,8 +10681,8 @@
                 <a:solidFill>
                   <a:srgbClr val="EF6C00"/>
                 </a:solidFill>
-                <a:latin typeface="Tahoma"/>
-                <a:cs typeface="Tahoma"/>
+                <a:latin typeface="Vazirmatn"/>
+                <a:cs typeface="Vazirmatn"/>
               </a:rPr>
               <a:t>فصل ۱۸</a:t>
             </a:r>
@@ -10411,8 +10704,8 @@
                 <a:solidFill>
                   <a:srgbClr val="1F2A24"/>
                 </a:solidFill>
-                <a:latin typeface="Tahoma"/>
-                <a:cs typeface="Tahoma"/>
+                <a:latin typeface="Vazirmatn"/>
+                <a:cs typeface="Vazirmatn"/>
               </a:rPr>
               <a:t>Bunker — تکنیک پایه Sand Shot</a:t>
             </a:r>
@@ -10501,8 +10794,8 @@
                 <a:solidFill>
                   <a:srgbClr val="EF6C00"/>
                 </a:solidFill>
-                <a:latin typeface="Tahoma"/>
-                <a:cs typeface="Tahoma"/>
+                <a:latin typeface="Vazirmatn"/>
+                <a:cs typeface="Vazirmatn"/>
               </a:rPr>
               <a:t>●  </a:t>
             </a:r>
@@ -10511,8 +10804,8 @@
                 <a:solidFill>
                   <a:srgbClr val="EF6C00"/>
                 </a:solidFill>
-                <a:latin typeface="Tahoma"/>
-                <a:cs typeface="Tahoma"/>
+                <a:latin typeface="Vazirmatn"/>
+                <a:cs typeface="Vazirmatn"/>
               </a:rPr>
               <a:t>Setup</a:t>
             </a:r>
@@ -10521,8 +10814,8 @@
                 <a:solidFill>
                   <a:srgbClr val="1F2A24"/>
                 </a:solidFill>
-                <a:latin typeface="Tahoma"/>
-                <a:cs typeface="Tahoma"/>
+                <a:latin typeface="Vazirmatn"/>
+                <a:cs typeface="Vazirmatn"/>
               </a:rPr>
               <a:t>  —  Stance پایدار و وزن کمی بیشتر روی پای جلو</a:t>
             </a:r>
@@ -10544,8 +10837,8 @@
                 <a:solidFill>
                   <a:srgbClr val="EF6C00"/>
                 </a:solidFill>
-                <a:latin typeface="Tahoma"/>
-                <a:cs typeface="Tahoma"/>
+                <a:latin typeface="Vazirmatn"/>
+                <a:cs typeface="Vazirmatn"/>
               </a:rPr>
               <a:t>●  </a:t>
             </a:r>
@@ -10554,8 +10847,8 @@
                 <a:solidFill>
                   <a:srgbClr val="1F2A24"/>
                 </a:solidFill>
-                <a:latin typeface="Tahoma"/>
-                <a:cs typeface="Tahoma"/>
+                <a:latin typeface="Vazirmatn"/>
+                <a:cs typeface="Vazirmatn"/>
               </a:rPr>
               <a:t>Club Face متناسب با ضربه و توپ در موقعیت مناسب</a:t>
             </a:r>
@@ -10577,8 +10870,8 @@
                 <a:solidFill>
                   <a:srgbClr val="EF6C00"/>
                 </a:solidFill>
-                <a:latin typeface="Tahoma"/>
-                <a:cs typeface="Tahoma"/>
+                <a:latin typeface="Vazirmatn"/>
+                <a:cs typeface="Vazirmatn"/>
               </a:rPr>
               <a:t>●  </a:t>
             </a:r>
@@ -10587,8 +10880,8 @@
                 <a:solidFill>
                   <a:srgbClr val="EF6C00"/>
                 </a:solidFill>
-                <a:latin typeface="Tahoma"/>
-                <a:cs typeface="Tahoma"/>
+                <a:latin typeface="Vazirmatn"/>
+                <a:cs typeface="Vazirmatn"/>
               </a:rPr>
               <a:t>در بسیاری از Bunker Shotهای معمول</a:t>
             </a:r>
@@ -10610,8 +10903,8 @@
                 <a:solidFill>
                   <a:srgbClr val="EF6C00"/>
                 </a:solidFill>
-                <a:latin typeface="Tahoma"/>
-                <a:cs typeface="Tahoma"/>
+                <a:latin typeface="Vazirmatn"/>
+                <a:cs typeface="Vazirmatn"/>
               </a:rPr>
               <a:t>–  </a:t>
             </a:r>
@@ -10620,8 +10913,8 @@
                 <a:solidFill>
                   <a:srgbClr val="1F2A24"/>
                 </a:solidFill>
-                <a:latin typeface="Tahoma"/>
-                <a:cs typeface="Tahoma"/>
+                <a:latin typeface="Vazirmatn"/>
+                <a:cs typeface="Vazirmatn"/>
               </a:rPr>
               <a:t>کلاب مستقیماً مثل آهن توپ را نمی‌زند</a:t>
             </a:r>
@@ -10643,8 +10936,8 @@
                 <a:solidFill>
                   <a:srgbClr val="EF6C00"/>
                 </a:solidFill>
-                <a:latin typeface="Tahoma"/>
-                <a:cs typeface="Tahoma"/>
+                <a:latin typeface="Vazirmatn"/>
+                <a:cs typeface="Vazirmatn"/>
               </a:rPr>
               <a:t>–  </a:t>
             </a:r>
@@ -10653,8 +10946,8 @@
                 <a:solidFill>
                   <a:srgbClr val="1F2A24"/>
                 </a:solidFill>
-                <a:latin typeface="Tahoma"/>
-                <a:cs typeface="Tahoma"/>
+                <a:latin typeface="Vazirmatn"/>
+                <a:cs typeface="Vazirmatn"/>
               </a:rPr>
               <a:t>بلکه با ورود به شن، توپ را روی موج شن خارج می‌کند</a:t>
             </a:r>
@@ -10676,8 +10969,8 @@
                 <a:solidFill>
                   <a:srgbClr val="EF6C00"/>
                 </a:solidFill>
-                <a:latin typeface="Tahoma"/>
-                <a:cs typeface="Tahoma"/>
+                <a:latin typeface="Vazirmatn"/>
+                <a:cs typeface="Vazirmatn"/>
               </a:rPr>
               <a:t>●  </a:t>
             </a:r>
@@ -10686,8 +10979,8 @@
                 <a:solidFill>
                   <a:srgbClr val="1F2A24"/>
                 </a:solidFill>
-                <a:latin typeface="Tahoma"/>
-                <a:cs typeface="Tahoma"/>
+                <a:latin typeface="Vazirmatn"/>
+                <a:cs typeface="Vazirmatn"/>
               </a:rPr>
               <a:t>تمرین ابتدا با Swingهای کوچک و کنترل‌شده انجام شود</a:t>
             </a:r>
@@ -10822,8 +11115,8 @@
                 <a:solidFill>
                   <a:srgbClr val="EF6C00"/>
                 </a:solidFill>
-                <a:latin typeface="Tahoma"/>
-                <a:cs typeface="Tahoma"/>
+                <a:latin typeface="Vazirmatn"/>
+                <a:cs typeface="Vazirmatn"/>
               </a:rPr>
               <a:t>نکته مربی:  </a:t>
             </a:r>
@@ -10832,8 +11125,8 @@
                 <a:solidFill>
                   <a:srgbClr val="1F2A24"/>
                 </a:solidFill>
-                <a:latin typeface="Tahoma"/>
-                <a:cs typeface="Tahoma"/>
+                <a:latin typeface="Vazirmatn"/>
+                <a:cs typeface="Vazirmatn"/>
               </a:rPr>
               <a:t>در Bunker هدف ورود کنترل‌شده به شن پشت توپ است، نه ضربه مستقیم به توپ.</a:t>
             </a:r>
@@ -10849,7 +11142,7 @@
         <p:spPr>
           <a:xfrm>
             <a:off x="502920" y="6400800"/>
-            <a:ext cx="5486400" cy="320040"/>
+            <a:ext cx="6858000" cy="320040"/>
           </a:xfrm>
           <a:prstGeom prst="rect">
             <a:avLst/>
@@ -10874,14 +11167,24 @@
               </a:spcAft>
             </a:pPr>
             <a:r>
+              <a:rPr sz="1100" b="1" i="0">
+                <a:solidFill>
+                  <a:srgbClr val="EF6C00"/>
+                </a:solidFill>
+                <a:latin typeface="Vazirmatn"/>
+                <a:cs typeface="Vazirmatn"/>
+              </a:rPr>
+              <a:t>⛳ Puttclub</a:t>
+            </a:r>
+            <a:r>
               <a:rPr sz="1000" b="0" i="0">
                 <a:solidFill>
                   <a:srgbClr val="5C6B62"/>
                 </a:solidFill>
-                <a:latin typeface="Tahoma"/>
-                <a:cs typeface="Tahoma"/>
-              </a:rPr>
-              <a:t>Golf Academy  ·  Semi-Advanced · Level 3</a:t>
+                <a:latin typeface="Vazirmatn"/>
+                <a:cs typeface="Vazirmatn"/>
+              </a:rPr>
+              <a:t>   ·   Semi-Advanced · Level 3</a:t>
             </a:r>
           </a:p>
         </p:txBody>
@@ -10924,8 +11227,8 @@
                 <a:solidFill>
                   <a:srgbClr val="EF6C00"/>
                 </a:solidFill>
-                <a:latin typeface="Tahoma"/>
-                <a:cs typeface="Tahoma"/>
+                <a:latin typeface="Vazirmatn"/>
+                <a:cs typeface="Vazirmatn"/>
               </a:rPr>
               <a:t>19</a:t>
             </a:r>
@@ -11073,8 +11376,8 @@
             </a:pPr>
             <a:r>
               <a:rPr sz="15000" b="1" i="0">
-                <a:latin typeface="Tahoma"/>
-                <a:cs typeface="Tahoma"/>
+                <a:latin typeface="Vazirmatn"/>
+                <a:cs typeface="Vazirmatn"/>
                 <a:solidFill>
                   <a:srgbClr val="FFFFFF">
                     <a:alpha val="22000"/>
@@ -11124,8 +11427,8 @@
                 <a:solidFill>
                   <a:srgbClr val="FFFFFF"/>
                 </a:solidFill>
-                <a:latin typeface="Tahoma"/>
-                <a:cs typeface="Tahoma"/>
+                <a:latin typeface="Vazirmatn"/>
+                <a:cs typeface="Vazirmatn"/>
               </a:rPr>
               <a:t>هدف دوره نیمه‌پیشرفته</a:t>
             </a:r>
@@ -11147,8 +11450,8 @@
                 <a:solidFill>
                   <a:srgbClr val="EAF3E8"/>
                 </a:solidFill>
-                <a:latin typeface="Tahoma"/>
-                <a:cs typeface="Tahoma"/>
+                <a:latin typeface="Vazirmatn"/>
+                <a:cs typeface="Vazirmatn"/>
               </a:rPr>
               <a:t>از بازیکن تکنیکی به بازیکن تصمیم‌گیرنده</a:t>
             </a:r>
@@ -11193,8 +11496,8 @@
                 <a:solidFill>
                   <a:srgbClr val="FFB74D"/>
                 </a:solidFill>
-                <a:latin typeface="Tahoma"/>
-                <a:cs typeface="Tahoma"/>
+                <a:latin typeface="Vazirmatn"/>
+                <a:cs typeface="Vazirmatn"/>
               </a:rPr>
               <a:t>●  </a:t>
             </a:r>
@@ -11203,8 +11506,8 @@
                 <a:solidFill>
                   <a:srgbClr val="FFFFFF"/>
                 </a:solidFill>
-                <a:latin typeface="Tahoma"/>
-                <a:cs typeface="Tahoma"/>
+                <a:latin typeface="Vazirmatn"/>
+                <a:cs typeface="Vazirmatn"/>
               </a:rPr>
               <a:t>دیگر فقط «چگونه ضربه بزنم» کافی نیست</a:t>
             </a:r>
@@ -11226,8 +11529,8 @@
                 <a:solidFill>
                   <a:srgbClr val="FFB74D"/>
                 </a:solidFill>
-                <a:latin typeface="Tahoma"/>
-                <a:cs typeface="Tahoma"/>
+                <a:latin typeface="Vazirmatn"/>
+                <a:cs typeface="Vazirmatn"/>
               </a:rPr>
               <a:t>●  </a:t>
             </a:r>
@@ -11236,8 +11539,8 @@
                 <a:solidFill>
                   <a:srgbClr val="FFFFFF"/>
                 </a:solidFill>
-                <a:latin typeface="Tahoma"/>
-                <a:cs typeface="Tahoma"/>
+                <a:latin typeface="Vazirmatn"/>
+                <a:cs typeface="Vazirmatn"/>
               </a:rPr>
               <a:t>چه ضربه‌ای، با کدام کلاب، به کدام نقطه و با چه هدفی؟</a:t>
             </a:r>
@@ -11259,8 +11562,8 @@
                 <a:solidFill>
                   <a:srgbClr val="FFB74D"/>
                 </a:solidFill>
-                <a:latin typeface="Tahoma"/>
-                <a:cs typeface="Tahoma"/>
+                <a:latin typeface="Vazirmatn"/>
+                <a:cs typeface="Vazirmatn"/>
               </a:rPr>
               <a:t>●  </a:t>
             </a:r>
@@ -11269,8 +11572,8 @@
                 <a:solidFill>
                   <a:srgbClr val="FFFFFF"/>
                 </a:solidFill>
-                <a:latin typeface="Tahoma"/>
-                <a:cs typeface="Tahoma"/>
+                <a:latin typeface="Vazirmatn"/>
+                <a:cs typeface="Vazirmatn"/>
               </a:rPr>
               <a:t>تکنیک</a:t>
             </a:r>
@@ -11279,8 +11582,8 @@
                 <a:solidFill>
                   <a:srgbClr val="FFFFFF"/>
                 </a:solidFill>
-                <a:latin typeface="Tahoma"/>
-                <a:cs typeface="Tahoma"/>
+                <a:latin typeface="Vazirmatn"/>
+                <a:cs typeface="Vazirmatn"/>
               </a:rPr>
               <a:t>  —  کنترل بهتر ضربه</a:t>
             </a:r>
@@ -11302,8 +11605,8 @@
                 <a:solidFill>
                   <a:srgbClr val="FFB74D"/>
                 </a:solidFill>
-                <a:latin typeface="Tahoma"/>
-                <a:cs typeface="Tahoma"/>
+                <a:latin typeface="Vazirmatn"/>
+                <a:cs typeface="Vazirmatn"/>
               </a:rPr>
               <a:t>●  </a:t>
             </a:r>
@@ -11312,8 +11615,8 @@
                 <a:solidFill>
                   <a:srgbClr val="FFFFFF"/>
                 </a:solidFill>
-                <a:latin typeface="Tahoma"/>
-                <a:cs typeface="Tahoma"/>
+                <a:latin typeface="Vazirmatn"/>
+                <a:cs typeface="Vazirmatn"/>
               </a:rPr>
               <a:t>استراتژی</a:t>
             </a:r>
@@ -11322,8 +11625,8 @@
                 <a:solidFill>
                   <a:srgbClr val="FFFFFF"/>
                 </a:solidFill>
-                <a:latin typeface="Tahoma"/>
-                <a:cs typeface="Tahoma"/>
+                <a:latin typeface="Vazirmatn"/>
+                <a:cs typeface="Vazirmatn"/>
               </a:rPr>
               <a:t>  —  انتخاب بهترین مسیر</a:t>
             </a:r>
@@ -11345,8 +11648,8 @@
                 <a:solidFill>
                   <a:srgbClr val="FFB74D"/>
                 </a:solidFill>
-                <a:latin typeface="Tahoma"/>
-                <a:cs typeface="Tahoma"/>
+                <a:latin typeface="Vazirmatn"/>
+                <a:cs typeface="Vazirmatn"/>
               </a:rPr>
               <a:t>●  </a:t>
             </a:r>
@@ -11355,8 +11658,8 @@
                 <a:solidFill>
                   <a:srgbClr val="FFFFFF"/>
                 </a:solidFill>
-                <a:latin typeface="Tahoma"/>
-                <a:cs typeface="Tahoma"/>
+                <a:latin typeface="Vazirmatn"/>
+                <a:cs typeface="Vazirmatn"/>
               </a:rPr>
               <a:t>تصمیم‌گیری</a:t>
             </a:r>
@@ -11365,8 +11668,8 @@
                 <a:solidFill>
                   <a:srgbClr val="FFFFFF"/>
                 </a:solidFill>
-                <a:latin typeface="Tahoma"/>
-                <a:cs typeface="Tahoma"/>
+                <a:latin typeface="Vazirmatn"/>
+                <a:cs typeface="Vazirmatn"/>
               </a:rPr>
               <a:t>  —  انتخاب ضربه مناسب</a:t>
             </a:r>
@@ -11388,8 +11691,8 @@
                 <a:solidFill>
                   <a:srgbClr val="FFB74D"/>
                 </a:solidFill>
-                <a:latin typeface="Tahoma"/>
-                <a:cs typeface="Tahoma"/>
+                <a:latin typeface="Vazirmatn"/>
+                <a:cs typeface="Vazirmatn"/>
               </a:rPr>
               <a:t>●  </a:t>
             </a:r>
@@ -11398,8 +11701,8 @@
                 <a:solidFill>
                   <a:srgbClr val="FFFFFF"/>
                 </a:solidFill>
-                <a:latin typeface="Tahoma"/>
-                <a:cs typeface="Tahoma"/>
+                <a:latin typeface="Vazirmatn"/>
+                <a:cs typeface="Vazirmatn"/>
               </a:rPr>
               <a:t>آنالیز</a:t>
             </a:r>
@@ -11408,8 +11711,8 @@
                 <a:solidFill>
                   <a:srgbClr val="FFFFFF"/>
                 </a:solidFill>
-                <a:latin typeface="Tahoma"/>
-                <a:cs typeface="Tahoma"/>
+                <a:latin typeface="Vazirmatn"/>
+                <a:cs typeface="Vazirmatn"/>
               </a:rPr>
               <a:t>  —  بررسی عملکرد و اصلاح اشتباهات</a:t>
             </a:r>
@@ -11425,7 +11728,7 @@
         <p:spPr>
           <a:xfrm>
             <a:off x="502920" y="6400800"/>
-            <a:ext cx="5486400" cy="320040"/>
+            <a:ext cx="6858000" cy="320040"/>
           </a:xfrm>
           <a:prstGeom prst="rect">
             <a:avLst/>
@@ -11450,14 +11753,24 @@
               </a:spcAft>
             </a:pPr>
             <a:r>
+              <a:rPr sz="1100" b="1" i="0">
+                <a:solidFill>
+                  <a:srgbClr val="FFB74D"/>
+                </a:solidFill>
+                <a:latin typeface="Vazirmatn"/>
+                <a:cs typeface="Vazirmatn"/>
+              </a:rPr>
+              <a:t>⛳ Puttclub</a:t>
+            </a:r>
+            <a:r>
               <a:rPr sz="1000" b="0" i="0">
                 <a:solidFill>
                   <a:srgbClr val="FFFFFF"/>
                 </a:solidFill>
-                <a:latin typeface="Tahoma"/>
-                <a:cs typeface="Tahoma"/>
-              </a:rPr>
-              <a:t>Golf Academy  ·  Semi-Advanced · Level 3</a:t>
+                <a:latin typeface="Vazirmatn"/>
+                <a:cs typeface="Vazirmatn"/>
+              </a:rPr>
+              <a:t>   ·   Semi-Advanced · Level 3</a:t>
             </a:r>
           </a:p>
         </p:txBody>
@@ -11500,8 +11813,8 @@
                 <a:solidFill>
                   <a:srgbClr val="FFB74D"/>
                 </a:solidFill>
-                <a:latin typeface="Tahoma"/>
-                <a:cs typeface="Tahoma"/>
+                <a:latin typeface="Vazirmatn"/>
+                <a:cs typeface="Vazirmatn"/>
               </a:rPr>
               <a:t>2</a:t>
             </a:r>
@@ -11652,8 +11965,8 @@
                 <a:solidFill>
                   <a:srgbClr val="EF6C00"/>
                 </a:solidFill>
-                <a:latin typeface="Tahoma"/>
-                <a:cs typeface="Tahoma"/>
+                <a:latin typeface="Vazirmatn"/>
+                <a:cs typeface="Vazirmatn"/>
               </a:rPr>
               <a:t>فصل ۱۹</a:t>
             </a:r>
@@ -11675,8 +11988,8 @@
                 <a:solidFill>
                   <a:srgbClr val="1F2A24"/>
                 </a:solidFill>
-                <a:latin typeface="Tahoma"/>
-                <a:cs typeface="Tahoma"/>
+                <a:latin typeface="Vazirmatn"/>
+                <a:cs typeface="Vazirmatn"/>
               </a:rPr>
               <a:t>سه مهارت Putting نیمه‌پیشرفته</a:t>
             </a:r>
@@ -11855,8 +12168,8 @@
                 <a:solidFill>
                   <a:srgbClr val="EF6C00"/>
                 </a:solidFill>
-                <a:latin typeface="Tahoma"/>
-                <a:cs typeface="Tahoma"/>
+                <a:latin typeface="Vazirmatn"/>
+                <a:cs typeface="Vazirmatn"/>
               </a:rPr>
               <a:t>Green Reading</a:t>
             </a:r>
@@ -11878,8 +12191,8 @@
                 <a:solidFill>
                   <a:srgbClr val="5C6B62"/>
                 </a:solidFill>
-                <a:latin typeface="Tahoma"/>
-                <a:cs typeface="Tahoma"/>
+                <a:latin typeface="Vazirmatn"/>
+                <a:cs typeface="Vazirmatn"/>
               </a:rPr>
               <a:t>خواندن شیب Green</a:t>
             </a:r>
@@ -12014,8 +12327,8 @@
                 <a:solidFill>
                   <a:srgbClr val="EF6C00"/>
                 </a:solidFill>
-                <a:latin typeface="Tahoma"/>
-                <a:cs typeface="Tahoma"/>
+                <a:latin typeface="Vazirmatn"/>
+                <a:cs typeface="Vazirmatn"/>
               </a:rPr>
               <a:t>Start Line</a:t>
             </a:r>
@@ -12037,8 +12350,8 @@
                 <a:solidFill>
                   <a:srgbClr val="5C6B62"/>
                 </a:solidFill>
-                <a:latin typeface="Tahoma"/>
-                <a:cs typeface="Tahoma"/>
+                <a:latin typeface="Vazirmatn"/>
+                <a:cs typeface="Vazirmatn"/>
               </a:rPr>
               <a:t>جهت شروع توپ</a:t>
             </a:r>
@@ -12173,8 +12486,8 @@
                 <a:solidFill>
                   <a:srgbClr val="EF6C00"/>
                 </a:solidFill>
-                <a:latin typeface="Tahoma"/>
-                <a:cs typeface="Tahoma"/>
+                <a:latin typeface="Vazirmatn"/>
+                <a:cs typeface="Vazirmatn"/>
               </a:rPr>
               <a:t>Speed Control</a:t>
             </a:r>
@@ -12196,8 +12509,8 @@
                 <a:solidFill>
                   <a:srgbClr val="5C6B62"/>
                 </a:solidFill>
-                <a:latin typeface="Tahoma"/>
-                <a:cs typeface="Tahoma"/>
+                <a:latin typeface="Vazirmatn"/>
+                <a:cs typeface="Vazirmatn"/>
               </a:rPr>
               <a:t>کنترل سرعت</a:t>
             </a:r>
@@ -12288,8 +12601,8 @@
                 <a:solidFill>
                   <a:srgbClr val="FFFFFF"/>
                 </a:solidFill>
-                <a:latin typeface="Tahoma"/>
-                <a:cs typeface="Tahoma"/>
+                <a:latin typeface="Vazirmatn"/>
+                <a:cs typeface="Vazirmatn"/>
               </a:rPr>
               <a:t>حتی اگر خط درست باشد، سرعت اشتباه می‌تواند Putt را کاملاً خراب کند.</a:t>
             </a:r>
@@ -12305,7 +12618,7 @@
         <p:spPr>
           <a:xfrm>
             <a:off x="502920" y="6400800"/>
-            <a:ext cx="5486400" cy="320040"/>
+            <a:ext cx="6858000" cy="320040"/>
           </a:xfrm>
           <a:prstGeom prst="rect">
             <a:avLst/>
@@ -12330,14 +12643,24 @@
               </a:spcAft>
             </a:pPr>
             <a:r>
+              <a:rPr sz="1100" b="1" i="0">
+                <a:solidFill>
+                  <a:srgbClr val="EF6C00"/>
+                </a:solidFill>
+                <a:latin typeface="Vazirmatn"/>
+                <a:cs typeface="Vazirmatn"/>
+              </a:rPr>
+              <a:t>⛳ Puttclub</a:t>
+            </a:r>
+            <a:r>
               <a:rPr sz="1000" b="0" i="0">
                 <a:solidFill>
                   <a:srgbClr val="5C6B62"/>
                 </a:solidFill>
-                <a:latin typeface="Tahoma"/>
-                <a:cs typeface="Tahoma"/>
-              </a:rPr>
-              <a:t>Golf Academy  ·  Semi-Advanced · Level 3</a:t>
+                <a:latin typeface="Vazirmatn"/>
+                <a:cs typeface="Vazirmatn"/>
+              </a:rPr>
+              <a:t>   ·   Semi-Advanced · Level 3</a:t>
             </a:r>
           </a:p>
         </p:txBody>
@@ -12380,8 +12703,8 @@
                 <a:solidFill>
                   <a:srgbClr val="EF6C00"/>
                 </a:solidFill>
-                <a:latin typeface="Tahoma"/>
-                <a:cs typeface="Tahoma"/>
+                <a:latin typeface="Vazirmatn"/>
+                <a:cs typeface="Vazirmatn"/>
               </a:rPr>
               <a:t>20</a:t>
             </a:r>
@@ -12558,8 +12881,8 @@
                 <a:solidFill>
                   <a:srgbClr val="FFFFFF"/>
                 </a:solidFill>
-                <a:latin typeface="Tahoma"/>
-                <a:cs typeface="Tahoma"/>
+                <a:latin typeface="Vazirmatn"/>
+                <a:cs typeface="Vazirmatn"/>
               </a:rPr>
               <a:t>Lag Putting برای فاصله‌های بلند</a:t>
             </a:r>
@@ -12648,8 +12971,8 @@
                 <a:solidFill>
                   <a:srgbClr val="EF6C00"/>
                 </a:solidFill>
-                <a:latin typeface="Tahoma"/>
-                <a:cs typeface="Tahoma"/>
+                <a:latin typeface="Vazirmatn"/>
+                <a:cs typeface="Vazirmatn"/>
               </a:rPr>
               <a:t>فصل ۲۰</a:t>
             </a:r>
@@ -12671,8 +12994,8 @@
                 <a:solidFill>
                   <a:srgbClr val="1F2A24"/>
                 </a:solidFill>
-                <a:latin typeface="Tahoma"/>
-                <a:cs typeface="Tahoma"/>
+                <a:latin typeface="Vazirmatn"/>
+                <a:cs typeface="Vazirmatn"/>
               </a:rPr>
               <a:t>تمرین Lag Putting</a:t>
             </a:r>
@@ -12761,8 +13084,8 @@
                 <a:solidFill>
                   <a:srgbClr val="EF6C00"/>
                 </a:solidFill>
-                <a:latin typeface="Tahoma"/>
-                <a:cs typeface="Tahoma"/>
+                <a:latin typeface="Vazirmatn"/>
+                <a:cs typeface="Vazirmatn"/>
               </a:rPr>
               <a:t>●  </a:t>
             </a:r>
@@ -12771,8 +13094,8 @@
                 <a:solidFill>
                   <a:srgbClr val="1F2A24"/>
                 </a:solidFill>
-                <a:latin typeface="Tahoma"/>
-                <a:cs typeface="Tahoma"/>
+                <a:latin typeface="Vazirmatn"/>
+                <a:cs typeface="Vazirmatn"/>
               </a:rPr>
               <a:t>از فاصله‌های ۱۰، ۱۵ و ۲۰ متر تمرین کنید</a:t>
             </a:r>
@@ -12794,8 +13117,8 @@
                 <a:solidFill>
                   <a:srgbClr val="EF6C00"/>
                 </a:solidFill>
-                <a:latin typeface="Tahoma"/>
-                <a:cs typeface="Tahoma"/>
+                <a:latin typeface="Vazirmatn"/>
+                <a:cs typeface="Vazirmatn"/>
               </a:rPr>
               <a:t>●  </a:t>
             </a:r>
@@ -12804,8 +13127,8 @@
                 <a:solidFill>
                   <a:srgbClr val="1F2A24"/>
                 </a:solidFill>
-                <a:latin typeface="Tahoma"/>
-                <a:cs typeface="Tahoma"/>
+                <a:latin typeface="Vazirmatn"/>
+                <a:cs typeface="Vazirmatn"/>
               </a:rPr>
               <a:t>هدف الزاماً Hole کردن توپ نیست</a:t>
             </a:r>
@@ -12827,8 +13150,8 @@
                 <a:solidFill>
                   <a:srgbClr val="EF6C00"/>
                 </a:solidFill>
-                <a:latin typeface="Tahoma"/>
-                <a:cs typeface="Tahoma"/>
+                <a:latin typeface="Vazirmatn"/>
+                <a:cs typeface="Vazirmatn"/>
               </a:rPr>
               <a:t>●  </a:t>
             </a:r>
@@ -12837,8 +13160,8 @@
                 <a:solidFill>
                   <a:srgbClr val="EF6C00"/>
                 </a:solidFill>
-                <a:latin typeface="Tahoma"/>
-                <a:cs typeface="Tahoma"/>
+                <a:latin typeface="Vazirmatn"/>
+                <a:cs typeface="Vazirmatn"/>
               </a:rPr>
               <a:t>هدف</a:t>
             </a:r>
@@ -12847,8 +13170,8 @@
                 <a:solidFill>
                   <a:srgbClr val="1F2A24"/>
                 </a:solidFill>
-                <a:latin typeface="Tahoma"/>
-                <a:cs typeface="Tahoma"/>
+                <a:latin typeface="Vazirmatn"/>
+                <a:cs typeface="Vazirmatn"/>
               </a:rPr>
               <a:t>  —  نزدیک کردن توپ به Hole</a:t>
             </a:r>
@@ -12870,8 +13193,8 @@
                 <a:solidFill>
                   <a:srgbClr val="EF6C00"/>
                 </a:solidFill>
-                <a:latin typeface="Tahoma"/>
-                <a:cs typeface="Tahoma"/>
+                <a:latin typeface="Vazirmatn"/>
+                <a:cs typeface="Vazirmatn"/>
               </a:rPr>
               <a:t>●  </a:t>
             </a:r>
@@ -12880,8 +13203,8 @@
                 <a:solidFill>
                   <a:srgbClr val="1F2A24"/>
                 </a:solidFill>
-                <a:latin typeface="Tahoma"/>
-                <a:cs typeface="Tahoma"/>
+                <a:latin typeface="Vazirmatn"/>
+                <a:cs typeface="Vazirmatn"/>
               </a:rPr>
               <a:t>یک محدوده (مثلاً دایره‌ای) اطراف Hole تعیین کنید</a:t>
             </a:r>
@@ -12903,8 +13226,8 @@
                 <a:solidFill>
                   <a:srgbClr val="EF6C00"/>
                 </a:solidFill>
-                <a:latin typeface="Tahoma"/>
-                <a:cs typeface="Tahoma"/>
+                <a:latin typeface="Vazirmatn"/>
+                <a:cs typeface="Vazirmatn"/>
               </a:rPr>
               <a:t>●  </a:t>
             </a:r>
@@ -12913,8 +13236,8 @@
                 <a:solidFill>
                   <a:srgbClr val="1F2A24"/>
                 </a:solidFill>
-                <a:latin typeface="Tahoma"/>
-                <a:cs typeface="Tahoma"/>
+                <a:latin typeface="Vazirmatn"/>
+                <a:cs typeface="Vazirmatn"/>
               </a:rPr>
               <a:t>بازیکن باید توپ را در آن محدوده نگه دارد</a:t>
             </a:r>
@@ -12936,8 +13259,8 @@
                 <a:solidFill>
                   <a:srgbClr val="EF6C00"/>
                 </a:solidFill>
-                <a:latin typeface="Tahoma"/>
-                <a:cs typeface="Tahoma"/>
+                <a:latin typeface="Vazirmatn"/>
+                <a:cs typeface="Vazirmatn"/>
               </a:rPr>
               <a:t>●  </a:t>
             </a:r>
@@ -12946,8 +13269,8 @@
                 <a:solidFill>
                   <a:srgbClr val="1F2A24"/>
                 </a:solidFill>
-                <a:latin typeface="Tahoma"/>
-                <a:cs typeface="Tahoma"/>
+                <a:latin typeface="Vazirmatn"/>
+                <a:cs typeface="Vazirmatn"/>
               </a:rPr>
               <a:t>این تمرین از 3-Putt جلوگیری می‌کند</a:t>
             </a:r>
@@ -13082,8 +13405,8 @@
                 <a:solidFill>
                   <a:srgbClr val="EF6C00"/>
                 </a:solidFill>
-                <a:latin typeface="Tahoma"/>
-                <a:cs typeface="Tahoma"/>
+                <a:latin typeface="Vazirmatn"/>
+                <a:cs typeface="Vazirmatn"/>
               </a:rPr>
               <a:t>نکته مربی:  </a:t>
             </a:r>
@@ -13092,8 +13415,8 @@
                 <a:solidFill>
                   <a:srgbClr val="1F2A24"/>
                 </a:solidFill>
-                <a:latin typeface="Tahoma"/>
-                <a:cs typeface="Tahoma"/>
+                <a:latin typeface="Vazirmatn"/>
+                <a:cs typeface="Vazirmatn"/>
               </a:rPr>
               <a:t>Lag Putt خوب یعنی توپ نزدیک Hole بمیرد تا Putt بعدی ساده و مطمئن باشد.</a:t>
             </a:r>
@@ -13109,7 +13432,7 @@
         <p:spPr>
           <a:xfrm>
             <a:off x="502920" y="6400800"/>
-            <a:ext cx="5486400" cy="320040"/>
+            <a:ext cx="6858000" cy="320040"/>
           </a:xfrm>
           <a:prstGeom prst="rect">
             <a:avLst/>
@@ -13134,14 +13457,24 @@
               </a:spcAft>
             </a:pPr>
             <a:r>
+              <a:rPr sz="1100" b="1" i="0">
+                <a:solidFill>
+                  <a:srgbClr val="EF6C00"/>
+                </a:solidFill>
+                <a:latin typeface="Vazirmatn"/>
+                <a:cs typeface="Vazirmatn"/>
+              </a:rPr>
+              <a:t>⛳ Puttclub</a:t>
+            </a:r>
+            <a:r>
               <a:rPr sz="1000" b="0" i="0">
                 <a:solidFill>
                   <a:srgbClr val="5C6B62"/>
                 </a:solidFill>
-                <a:latin typeface="Tahoma"/>
-                <a:cs typeface="Tahoma"/>
-              </a:rPr>
-              <a:t>Golf Academy  ·  Semi-Advanced · Level 3</a:t>
+                <a:latin typeface="Vazirmatn"/>
+                <a:cs typeface="Vazirmatn"/>
+              </a:rPr>
+              <a:t>   ·   Semi-Advanced · Level 3</a:t>
             </a:r>
           </a:p>
         </p:txBody>
@@ -13184,8 +13517,8 @@
                 <a:solidFill>
                   <a:srgbClr val="EF6C00"/>
                 </a:solidFill>
-                <a:latin typeface="Tahoma"/>
-                <a:cs typeface="Tahoma"/>
+                <a:latin typeface="Vazirmatn"/>
+                <a:cs typeface="Vazirmatn"/>
               </a:rPr>
               <a:t>21</a:t>
             </a:r>
@@ -13336,8 +13669,8 @@
                 <a:solidFill>
                   <a:srgbClr val="EF6C00"/>
                 </a:solidFill>
-                <a:latin typeface="Tahoma"/>
-                <a:cs typeface="Tahoma"/>
+                <a:latin typeface="Vazirmatn"/>
+                <a:cs typeface="Vazirmatn"/>
               </a:rPr>
               <a:t>فصل ۲۱</a:t>
             </a:r>
@@ -13359,8 +13692,8 @@
                 <a:solidFill>
                   <a:srgbClr val="1F2A24"/>
                 </a:solidFill>
-                <a:latin typeface="Tahoma"/>
-                <a:cs typeface="Tahoma"/>
+                <a:latin typeface="Vazirmatn"/>
+                <a:cs typeface="Vazirmatn"/>
               </a:rPr>
               <a:t>Uphill و Downhill Putting</a:t>
             </a:r>
@@ -13539,8 +13872,8 @@
                 <a:solidFill>
                   <a:srgbClr val="EF6C00"/>
                 </a:solidFill>
-                <a:latin typeface="Tahoma"/>
-                <a:cs typeface="Tahoma"/>
+                <a:latin typeface="Vazirmatn"/>
+                <a:cs typeface="Vazirmatn"/>
               </a:rPr>
               <a:t>Uphill</a:t>
             </a:r>
@@ -13562,8 +13895,8 @@
                 <a:solidFill>
                   <a:srgbClr val="5C6B62"/>
                 </a:solidFill>
-                <a:latin typeface="Tahoma"/>
-                <a:cs typeface="Tahoma"/>
+                <a:latin typeface="Vazirmatn"/>
+                <a:cs typeface="Vazirmatn"/>
               </a:rPr>
               <a:t>معمولاً نیازمند انرژی و ضربه محکم‌تر است</a:t>
             </a:r>
@@ -13698,8 +14031,8 @@
                 <a:solidFill>
                   <a:srgbClr val="EF6C00"/>
                 </a:solidFill>
-                <a:latin typeface="Tahoma"/>
-                <a:cs typeface="Tahoma"/>
+                <a:latin typeface="Vazirmatn"/>
+                <a:cs typeface="Vazirmatn"/>
               </a:rPr>
               <a:t>Downhill</a:t>
             </a:r>
@@ -13721,8 +14054,8 @@
                 <a:solidFill>
                   <a:srgbClr val="5C6B62"/>
                 </a:solidFill>
-                <a:latin typeface="Tahoma"/>
-                <a:cs typeface="Tahoma"/>
+                <a:latin typeface="Vazirmatn"/>
+                <a:cs typeface="Vazirmatn"/>
               </a:rPr>
               <a:t>معمولاً بسیار حساس به سرعت؛ ضربه نرم‌تر</a:t>
             </a:r>
@@ -13813,8 +14146,8 @@
                 <a:solidFill>
                   <a:srgbClr val="FFFFFF"/>
                 </a:solidFill>
-                <a:latin typeface="Tahoma"/>
-                <a:cs typeface="Tahoma"/>
+                <a:latin typeface="Vazirmatn"/>
+                <a:cs typeface="Vazirmatn"/>
               </a:rPr>
               <a:t>تمرین: از یک شیب ساده یک Putt رو به بالا و یک Putt رو به پایین بزنید؛ قبل از ضربه شیب + سرعت را ارزیابی کنید.</a:t>
             </a:r>
@@ -13830,7 +14163,7 @@
         <p:spPr>
           <a:xfrm>
             <a:off x="502920" y="6400800"/>
-            <a:ext cx="5486400" cy="320040"/>
+            <a:ext cx="6858000" cy="320040"/>
           </a:xfrm>
           <a:prstGeom prst="rect">
             <a:avLst/>
@@ -13855,14 +14188,24 @@
               </a:spcAft>
             </a:pPr>
             <a:r>
+              <a:rPr sz="1100" b="1" i="0">
+                <a:solidFill>
+                  <a:srgbClr val="EF6C00"/>
+                </a:solidFill>
+                <a:latin typeface="Vazirmatn"/>
+                <a:cs typeface="Vazirmatn"/>
+              </a:rPr>
+              <a:t>⛳ Puttclub</a:t>
+            </a:r>
+            <a:r>
               <a:rPr sz="1000" b="0" i="0">
                 <a:solidFill>
                   <a:srgbClr val="5C6B62"/>
                 </a:solidFill>
-                <a:latin typeface="Tahoma"/>
-                <a:cs typeface="Tahoma"/>
-              </a:rPr>
-              <a:t>Golf Academy  ·  Semi-Advanced · Level 3</a:t>
+                <a:latin typeface="Vazirmatn"/>
+                <a:cs typeface="Vazirmatn"/>
+              </a:rPr>
+              <a:t>   ·   Semi-Advanced · Level 3</a:t>
             </a:r>
           </a:p>
         </p:txBody>
@@ -13905,8 +14248,8 @@
                 <a:solidFill>
                   <a:srgbClr val="EF6C00"/>
                 </a:solidFill>
-                <a:latin typeface="Tahoma"/>
-                <a:cs typeface="Tahoma"/>
+                <a:latin typeface="Vazirmatn"/>
+                <a:cs typeface="Vazirmatn"/>
               </a:rPr>
               <a:t>22</a:t>
             </a:r>
@@ -14057,8 +14400,8 @@
                 <a:solidFill>
                   <a:srgbClr val="EF6C00"/>
                 </a:solidFill>
-                <a:latin typeface="Tahoma"/>
-                <a:cs typeface="Tahoma"/>
+                <a:latin typeface="Vazirmatn"/>
+                <a:cs typeface="Vazirmatn"/>
               </a:rPr>
               <a:t>فصل ۲۲</a:t>
             </a:r>
@@ -14080,8 +14423,8 @@
                 <a:solidFill>
                   <a:srgbClr val="1F2A24"/>
                 </a:solidFill>
-                <a:latin typeface="Tahoma"/>
-                <a:cs typeface="Tahoma"/>
+                <a:latin typeface="Vazirmatn"/>
+                <a:cs typeface="Vazirmatn"/>
               </a:rPr>
               <a:t>Course Management — قلب دوره</a:t>
             </a:r>
@@ -14268,8 +14611,8 @@
                 <a:solidFill>
                   <a:srgbClr val="FFFFFF"/>
                 </a:solidFill>
-                <a:latin typeface="Tahoma"/>
-                <a:cs typeface="Tahoma"/>
+                <a:latin typeface="Vazirmatn"/>
+                <a:cs typeface="Vazirmatn"/>
               </a:rPr>
               <a:t>1</a:t>
             </a:r>
@@ -14314,8 +14657,8 @@
                 <a:solidFill>
                   <a:srgbClr val="1F2A24"/>
                 </a:solidFill>
-                <a:latin typeface="Tahoma"/>
-                <a:cs typeface="Tahoma"/>
+                <a:latin typeface="Vazirmatn"/>
+                <a:cs typeface="Vazirmatn"/>
               </a:rPr>
               <a:t>Lie</a:t>
             </a:r>
@@ -14337,8 +14680,8 @@
                 <a:solidFill>
                   <a:srgbClr val="5C6B62"/>
                 </a:solidFill>
-                <a:latin typeface="Tahoma"/>
-                <a:cs typeface="Tahoma"/>
+                <a:latin typeface="Vazirmatn"/>
+                <a:cs typeface="Vazirmatn"/>
               </a:rPr>
               <a:t>توپ کجاست؟</a:t>
             </a:r>
@@ -14481,8 +14824,8 @@
                 <a:solidFill>
                   <a:srgbClr val="FFFFFF"/>
                 </a:solidFill>
-                <a:latin typeface="Tahoma"/>
-                <a:cs typeface="Tahoma"/>
+                <a:latin typeface="Vazirmatn"/>
+                <a:cs typeface="Vazirmatn"/>
               </a:rPr>
               <a:t>2</a:t>
             </a:r>
@@ -14527,8 +14870,8 @@
                 <a:solidFill>
                   <a:srgbClr val="1F2A24"/>
                 </a:solidFill>
-                <a:latin typeface="Tahoma"/>
-                <a:cs typeface="Tahoma"/>
+                <a:latin typeface="Vazirmatn"/>
+                <a:cs typeface="Vazirmatn"/>
               </a:rPr>
               <a:t>Distance</a:t>
             </a:r>
@@ -14550,8 +14893,8 @@
                 <a:solidFill>
                   <a:srgbClr val="5C6B62"/>
                 </a:solidFill>
-                <a:latin typeface="Tahoma"/>
-                <a:cs typeface="Tahoma"/>
+                <a:latin typeface="Vazirmatn"/>
+                <a:cs typeface="Vazirmatn"/>
               </a:rPr>
               <a:t>فاصله چقدر؟</a:t>
             </a:r>
@@ -14694,8 +15037,8 @@
                 <a:solidFill>
                   <a:srgbClr val="FFFFFF"/>
                 </a:solidFill>
-                <a:latin typeface="Tahoma"/>
-                <a:cs typeface="Tahoma"/>
+                <a:latin typeface="Vazirmatn"/>
+                <a:cs typeface="Vazirmatn"/>
               </a:rPr>
               <a:t>3</a:t>
             </a:r>
@@ -14740,8 +15083,8 @@
                 <a:solidFill>
                   <a:srgbClr val="1F2A24"/>
                 </a:solidFill>
-                <a:latin typeface="Tahoma"/>
-                <a:cs typeface="Tahoma"/>
+                <a:latin typeface="Vazirmatn"/>
+                <a:cs typeface="Vazirmatn"/>
               </a:rPr>
               <a:t>Target</a:t>
             </a:r>
@@ -14763,8 +15106,8 @@
                 <a:solidFill>
                   <a:srgbClr val="5C6B62"/>
                 </a:solidFill>
-                <a:latin typeface="Tahoma"/>
-                <a:cs typeface="Tahoma"/>
+                <a:latin typeface="Vazirmatn"/>
+                <a:cs typeface="Vazirmatn"/>
               </a:rPr>
               <a:t>هدف کجاست؟</a:t>
             </a:r>
@@ -14907,8 +15250,8 @@
                 <a:solidFill>
                   <a:srgbClr val="FFFFFF"/>
                 </a:solidFill>
-                <a:latin typeface="Tahoma"/>
-                <a:cs typeface="Tahoma"/>
+                <a:latin typeface="Vazirmatn"/>
+                <a:cs typeface="Vazirmatn"/>
               </a:rPr>
               <a:t>4</a:t>
             </a:r>
@@ -14953,8 +15296,8 @@
                 <a:solidFill>
                   <a:srgbClr val="1F2A24"/>
                 </a:solidFill>
-                <a:latin typeface="Tahoma"/>
-                <a:cs typeface="Tahoma"/>
+                <a:latin typeface="Vazirmatn"/>
+                <a:cs typeface="Vazirmatn"/>
               </a:rPr>
               <a:t>Hazard</a:t>
             </a:r>
@@ -14976,8 +15319,8 @@
                 <a:solidFill>
                   <a:srgbClr val="5C6B62"/>
                 </a:solidFill>
-                <a:latin typeface="Tahoma"/>
-                <a:cs typeface="Tahoma"/>
+                <a:latin typeface="Vazirmatn"/>
+                <a:cs typeface="Vazirmatn"/>
               </a:rPr>
               <a:t>خطر کجاست؟</a:t>
             </a:r>
@@ -15120,8 +15463,8 @@
                 <a:solidFill>
                   <a:srgbClr val="FFFFFF"/>
                 </a:solidFill>
-                <a:latin typeface="Tahoma"/>
-                <a:cs typeface="Tahoma"/>
+                <a:latin typeface="Vazirmatn"/>
+                <a:cs typeface="Vazirmatn"/>
               </a:rPr>
               <a:t>5</a:t>
             </a:r>
@@ -15166,8 +15509,8 @@
                 <a:solidFill>
                   <a:srgbClr val="1F2A24"/>
                 </a:solidFill>
-                <a:latin typeface="Tahoma"/>
-                <a:cs typeface="Tahoma"/>
+                <a:latin typeface="Vazirmatn"/>
+                <a:cs typeface="Vazirmatn"/>
               </a:rPr>
               <a:t>Wind</a:t>
             </a:r>
@@ -15189,8 +15532,8 @@
                 <a:solidFill>
                   <a:srgbClr val="5C6B62"/>
                 </a:solidFill>
-                <a:latin typeface="Tahoma"/>
-                <a:cs typeface="Tahoma"/>
+                <a:latin typeface="Vazirmatn"/>
+                <a:cs typeface="Vazirmatn"/>
               </a:rPr>
               <a:t>باد چگونه؟</a:t>
             </a:r>
@@ -15333,8 +15676,8 @@
                 <a:solidFill>
                   <a:srgbClr val="FFFFFF"/>
                 </a:solidFill>
-                <a:latin typeface="Tahoma"/>
-                <a:cs typeface="Tahoma"/>
+                <a:latin typeface="Vazirmatn"/>
+                <a:cs typeface="Vazirmatn"/>
               </a:rPr>
               <a:t>6</a:t>
             </a:r>
@@ -15379,8 +15722,8 @@
                 <a:solidFill>
                   <a:srgbClr val="1F2A24"/>
                 </a:solidFill>
-                <a:latin typeface="Tahoma"/>
-                <a:cs typeface="Tahoma"/>
+                <a:latin typeface="Vazirmatn"/>
+                <a:cs typeface="Vazirmatn"/>
               </a:rPr>
               <a:t>Club</a:t>
             </a:r>
@@ -15402,8 +15745,8 @@
                 <a:solidFill>
                   <a:srgbClr val="5C6B62"/>
                 </a:solidFill>
-                <a:latin typeface="Tahoma"/>
-                <a:cs typeface="Tahoma"/>
+                <a:latin typeface="Vazirmatn"/>
+                <a:cs typeface="Vazirmatn"/>
               </a:rPr>
               <a:t>کدام کلاب؟</a:t>
             </a:r>
@@ -15546,8 +15889,8 @@
                 <a:solidFill>
                   <a:srgbClr val="FFFFFF"/>
                 </a:solidFill>
-                <a:latin typeface="Tahoma"/>
-                <a:cs typeface="Tahoma"/>
+                <a:latin typeface="Vazirmatn"/>
+                <a:cs typeface="Vazirmatn"/>
               </a:rPr>
               <a:t>7</a:t>
             </a:r>
@@ -15592,8 +15935,8 @@
                 <a:solidFill>
                   <a:srgbClr val="1F2A24"/>
                 </a:solidFill>
-                <a:latin typeface="Tahoma"/>
-                <a:cs typeface="Tahoma"/>
+                <a:latin typeface="Vazirmatn"/>
+                <a:cs typeface="Vazirmatn"/>
               </a:rPr>
               <a:t>Miss</a:t>
             </a:r>
@@ -15615,8 +15958,8 @@
                 <a:solidFill>
                   <a:srgbClr val="5C6B62"/>
                 </a:solidFill>
-                <a:latin typeface="Tahoma"/>
-                <a:cs typeface="Tahoma"/>
+                <a:latin typeface="Vazirmatn"/>
+                <a:cs typeface="Vazirmatn"/>
               </a:rPr>
               <a:t>کجا بهتر است خطا کنم؟</a:t>
             </a:r>
@@ -15751,8 +16094,8 @@
                 <a:solidFill>
                   <a:srgbClr val="1F2A24"/>
                 </a:solidFill>
-                <a:latin typeface="Tahoma"/>
-                <a:cs typeface="Tahoma"/>
+                <a:latin typeface="Vazirmatn"/>
+                <a:cs typeface="Vazirmatn"/>
               </a:rPr>
               <a:t>سؤال آخر بسیار مهم است: اگر ضربه اشتباه شد، بهتر است توپ کجا باشد؟</a:t>
             </a:r>
@@ -15768,7 +16111,7 @@
         <p:spPr>
           <a:xfrm>
             <a:off x="502920" y="6400800"/>
-            <a:ext cx="5486400" cy="320040"/>
+            <a:ext cx="6858000" cy="320040"/>
           </a:xfrm>
           <a:prstGeom prst="rect">
             <a:avLst/>
@@ -15793,14 +16136,24 @@
               </a:spcAft>
             </a:pPr>
             <a:r>
+              <a:rPr sz="1100" b="1" i="0">
+                <a:solidFill>
+                  <a:srgbClr val="EF6C00"/>
+                </a:solidFill>
+                <a:latin typeface="Vazirmatn"/>
+                <a:cs typeface="Vazirmatn"/>
+              </a:rPr>
+              <a:t>⛳ Puttclub</a:t>
+            </a:r>
+            <a:r>
               <a:rPr sz="1000" b="0" i="0">
                 <a:solidFill>
                   <a:srgbClr val="5C6B62"/>
                 </a:solidFill>
-                <a:latin typeface="Tahoma"/>
-                <a:cs typeface="Tahoma"/>
-              </a:rPr>
-              <a:t>Golf Academy  ·  Semi-Advanced · Level 3</a:t>
+                <a:latin typeface="Vazirmatn"/>
+                <a:cs typeface="Vazirmatn"/>
+              </a:rPr>
+              <a:t>   ·   Semi-Advanced · Level 3</a:t>
             </a:r>
           </a:p>
         </p:txBody>
@@ -15843,8 +16196,8 @@
                 <a:solidFill>
                   <a:srgbClr val="EF6C00"/>
                 </a:solidFill>
-                <a:latin typeface="Tahoma"/>
-                <a:cs typeface="Tahoma"/>
+                <a:latin typeface="Vazirmatn"/>
+                <a:cs typeface="Vazirmatn"/>
               </a:rPr>
               <a:t>23</a:t>
             </a:r>
@@ -16039,8 +16392,8 @@
                 <a:solidFill>
                   <a:srgbClr val="FFB74D"/>
                 </a:solidFill>
-                <a:latin typeface="Tahoma"/>
-                <a:cs typeface="Tahoma"/>
+                <a:latin typeface="Vazirmatn"/>
+                <a:cs typeface="Vazirmatn"/>
               </a:rPr>
               <a:t>فصل ۲۳  |  مدیریت Miss</a:t>
             </a:r>
@@ -16085,8 +16438,8 @@
                 <a:solidFill>
                   <a:srgbClr val="FFFFFF"/>
                 </a:solidFill>
-                <a:latin typeface="Tahoma"/>
-                <a:cs typeface="Tahoma"/>
+                <a:latin typeface="Vazirmatn"/>
+                <a:cs typeface="Vazirmatn"/>
               </a:rPr>
               <a:t>« بازیکن حرفه‌ای نمی‌پرسد «چطور هیچ اشتباهی نکنم؟» بلکه می‌پرسد «اگر اشتباه کردم، کجا بهتر است اشتباه کنم؟» »</a:t>
             </a:r>
@@ -16108,8 +16461,8 @@
                 <a:solidFill>
                   <a:srgbClr val="C9D6C8"/>
                 </a:solidFill>
-                <a:latin typeface="Tahoma"/>
-                <a:cs typeface="Tahoma"/>
+                <a:latin typeface="Vazirmatn"/>
+                <a:cs typeface="Vazirmatn"/>
               </a:rPr>
               <a:t>مثال: اگر چپ Green بانکر و راست آن فضای امن است، هدف منطقی می‌تواند سمت راست باشد.</a:t>
             </a:r>
@@ -16125,7 +16478,7 @@
         <p:spPr>
           <a:xfrm>
             <a:off x="502920" y="6400800"/>
-            <a:ext cx="5486400" cy="320040"/>
+            <a:ext cx="6858000" cy="320040"/>
           </a:xfrm>
           <a:prstGeom prst="rect">
             <a:avLst/>
@@ -16150,14 +16503,24 @@
               </a:spcAft>
             </a:pPr>
             <a:r>
+              <a:rPr sz="1100" b="1" i="0">
+                <a:solidFill>
+                  <a:srgbClr val="FFB74D"/>
+                </a:solidFill>
+                <a:latin typeface="Vazirmatn"/>
+                <a:cs typeface="Vazirmatn"/>
+              </a:rPr>
+              <a:t>⛳ Puttclub</a:t>
+            </a:r>
+            <a:r>
               <a:rPr sz="1000" b="0" i="0">
                 <a:solidFill>
                   <a:srgbClr val="FFFFFF"/>
                 </a:solidFill>
-                <a:latin typeface="Tahoma"/>
-                <a:cs typeface="Tahoma"/>
-              </a:rPr>
-              <a:t>Golf Academy  ·  Semi-Advanced · Level 3</a:t>
+                <a:latin typeface="Vazirmatn"/>
+                <a:cs typeface="Vazirmatn"/>
+              </a:rPr>
+              <a:t>   ·   Semi-Advanced · Level 3</a:t>
             </a:r>
           </a:p>
         </p:txBody>
@@ -16200,8 +16563,8 @@
                 <a:solidFill>
                   <a:srgbClr val="FFB74D"/>
                 </a:solidFill>
-                <a:latin typeface="Tahoma"/>
-                <a:cs typeface="Tahoma"/>
+                <a:latin typeface="Vazirmatn"/>
+                <a:cs typeface="Vazirmatn"/>
               </a:rPr>
               <a:t>24</a:t>
             </a:r>
@@ -16352,8 +16715,8 @@
                 <a:solidFill>
                   <a:srgbClr val="EF6C00"/>
                 </a:solidFill>
-                <a:latin typeface="Tahoma"/>
-                <a:cs typeface="Tahoma"/>
+                <a:latin typeface="Vazirmatn"/>
+                <a:cs typeface="Vazirmatn"/>
               </a:rPr>
               <a:t>فصل ۲۴</a:t>
             </a:r>
@@ -16375,8 +16738,8 @@
                 <a:solidFill>
                   <a:srgbClr val="1F2A24"/>
                 </a:solidFill>
-                <a:latin typeface="Tahoma"/>
-                <a:cs typeface="Tahoma"/>
+                <a:latin typeface="Vazirmatn"/>
+                <a:cs typeface="Vazirmatn"/>
               </a:rPr>
               <a:t>Risk &amp; Reward</a:t>
             </a:r>
@@ -16555,8 +16918,8 @@
                 <a:solidFill>
                   <a:srgbClr val="EF6C00"/>
                 </a:solidFill>
-                <a:latin typeface="Tahoma"/>
-                <a:cs typeface="Tahoma"/>
+                <a:latin typeface="Vazirmatn"/>
+                <a:cs typeface="Vazirmatn"/>
               </a:rPr>
               <a:t>Reward</a:t>
             </a:r>
@@ -16578,8 +16941,8 @@
                 <a:solidFill>
                   <a:srgbClr val="5C6B62"/>
                 </a:solidFill>
-                <a:latin typeface="Tahoma"/>
-                <a:cs typeface="Tahoma"/>
+                <a:latin typeface="Vazirmatn"/>
+                <a:cs typeface="Vazirmatn"/>
               </a:rPr>
               <a:t>اگر موفق شوم چه چیزی به دست می‌آورم؟</a:t>
             </a:r>
@@ -16714,8 +17077,8 @@
                 <a:solidFill>
                   <a:srgbClr val="EF6C00"/>
                 </a:solidFill>
-                <a:latin typeface="Tahoma"/>
-                <a:cs typeface="Tahoma"/>
+                <a:latin typeface="Vazirmatn"/>
+                <a:cs typeface="Vazirmatn"/>
               </a:rPr>
               <a:t>Risk</a:t>
             </a:r>
@@ -16737,8 +17100,8 @@
                 <a:solidFill>
                   <a:srgbClr val="5C6B62"/>
                 </a:solidFill>
-                <a:latin typeface="Tahoma"/>
-                <a:cs typeface="Tahoma"/>
+                <a:latin typeface="Vazirmatn"/>
+                <a:cs typeface="Vazirmatn"/>
               </a:rPr>
               <a:t>اگر اشتباه کنم چه اتفاقی می‌افتد؟</a:t>
             </a:r>
@@ -16829,8 +17192,8 @@
                 <a:solidFill>
                   <a:srgbClr val="FFFFFF"/>
                 </a:solidFill>
-                <a:latin typeface="Tahoma"/>
-                <a:cs typeface="Tahoma"/>
+                <a:latin typeface="Vazirmatn"/>
+                <a:cs typeface="Vazirmatn"/>
               </a:rPr>
               <a:t>هدف مستقیم به پرچم = پاداش و ریسک بیشتر؛ هدف وسط Green = پاداش و ریسک کمتر. با توجه به شرایط مسابقه تصمیم بگیرید.</a:t>
             </a:r>
@@ -16846,7 +17209,7 @@
         <p:spPr>
           <a:xfrm>
             <a:off x="502920" y="6400800"/>
-            <a:ext cx="5486400" cy="320040"/>
+            <a:ext cx="6858000" cy="320040"/>
           </a:xfrm>
           <a:prstGeom prst="rect">
             <a:avLst/>
@@ -16871,14 +17234,24 @@
               </a:spcAft>
             </a:pPr>
             <a:r>
+              <a:rPr sz="1100" b="1" i="0">
+                <a:solidFill>
+                  <a:srgbClr val="EF6C00"/>
+                </a:solidFill>
+                <a:latin typeface="Vazirmatn"/>
+                <a:cs typeface="Vazirmatn"/>
+              </a:rPr>
+              <a:t>⛳ Puttclub</a:t>
+            </a:r>
+            <a:r>
               <a:rPr sz="1000" b="0" i="0">
                 <a:solidFill>
                   <a:srgbClr val="5C6B62"/>
                 </a:solidFill>
-                <a:latin typeface="Tahoma"/>
-                <a:cs typeface="Tahoma"/>
-              </a:rPr>
-              <a:t>Golf Academy  ·  Semi-Advanced · Level 3</a:t>
+                <a:latin typeface="Vazirmatn"/>
+                <a:cs typeface="Vazirmatn"/>
+              </a:rPr>
+              <a:t>   ·   Semi-Advanced · Level 3</a:t>
             </a:r>
           </a:p>
         </p:txBody>
@@ -16921,8 +17294,8 @@
                 <a:solidFill>
                   <a:srgbClr val="EF6C00"/>
                 </a:solidFill>
-                <a:latin typeface="Tahoma"/>
-                <a:cs typeface="Tahoma"/>
+                <a:latin typeface="Vazirmatn"/>
+                <a:cs typeface="Vazirmatn"/>
               </a:rPr>
               <a:t>25</a:t>
             </a:r>
@@ -17073,8 +17446,8 @@
                 <a:solidFill>
                   <a:srgbClr val="EF6C00"/>
                 </a:solidFill>
-                <a:latin typeface="Tahoma"/>
-                <a:cs typeface="Tahoma"/>
+                <a:latin typeface="Vazirmatn"/>
+                <a:cs typeface="Vazirmatn"/>
               </a:rPr>
               <a:t>فصل ۲۵</a:t>
             </a:r>
@@ -17096,8 +17469,8 @@
                 <a:solidFill>
                   <a:srgbClr val="1F2A24"/>
                 </a:solidFill>
-                <a:latin typeface="Tahoma"/>
-                <a:cs typeface="Tahoma"/>
+                <a:latin typeface="Vazirmatn"/>
+                <a:cs typeface="Vazirmatn"/>
               </a:rPr>
               <a:t>بازی روی باد</a:t>
             </a:r>
@@ -17186,8 +17559,8 @@
                 <a:solidFill>
                   <a:srgbClr val="EF6C00"/>
                 </a:solidFill>
-                <a:latin typeface="Tahoma"/>
-                <a:cs typeface="Tahoma"/>
+                <a:latin typeface="Vazirmatn"/>
+                <a:cs typeface="Vazirmatn"/>
               </a:rPr>
               <a:t>●  </a:t>
             </a:r>
@@ -17196,8 +17569,8 @@
                 <a:solidFill>
                   <a:srgbClr val="1F2A24"/>
                 </a:solidFill>
-                <a:latin typeface="Tahoma"/>
-                <a:cs typeface="Tahoma"/>
+                <a:latin typeface="Vazirmatn"/>
+                <a:cs typeface="Vazirmatn"/>
               </a:rPr>
               <a:t>قبل از ضربه جهت باد را مشخص کنید؛ فقط به پرچم نگاه نکنید</a:t>
             </a:r>
@@ -17219,8 +17592,8 @@
                 <a:solidFill>
                   <a:srgbClr val="EF6C00"/>
                 </a:solidFill>
-                <a:latin typeface="Tahoma"/>
-                <a:cs typeface="Tahoma"/>
+                <a:latin typeface="Vazirmatn"/>
+                <a:cs typeface="Vazirmatn"/>
               </a:rPr>
               <a:t>●  </a:t>
             </a:r>
@@ -17229,8 +17602,8 @@
                 <a:solidFill>
                   <a:srgbClr val="EF6C00"/>
                 </a:solidFill>
-                <a:latin typeface="Tahoma"/>
-                <a:cs typeface="Tahoma"/>
+                <a:latin typeface="Vazirmatn"/>
+                <a:cs typeface="Vazirmatn"/>
               </a:rPr>
               <a:t>باد می‌تواند</a:t>
             </a:r>
@@ -17252,8 +17625,8 @@
                 <a:solidFill>
                   <a:srgbClr val="EF6C00"/>
                 </a:solidFill>
-                <a:latin typeface="Tahoma"/>
-                <a:cs typeface="Tahoma"/>
+                <a:latin typeface="Vazirmatn"/>
+                <a:cs typeface="Vazirmatn"/>
               </a:rPr>
               <a:t>–  </a:t>
             </a:r>
@@ -17262,8 +17635,8 @@
                 <a:solidFill>
                   <a:srgbClr val="1F2A24"/>
                 </a:solidFill>
-                <a:latin typeface="Tahoma"/>
-                <a:cs typeface="Tahoma"/>
+                <a:latin typeface="Vazirmatn"/>
+                <a:cs typeface="Vazirmatn"/>
               </a:rPr>
               <a:t>جهت توپ را تغییر دهد</a:t>
             </a:r>
@@ -17285,8 +17658,8 @@
                 <a:solidFill>
                   <a:srgbClr val="EF6C00"/>
                 </a:solidFill>
-                <a:latin typeface="Tahoma"/>
-                <a:cs typeface="Tahoma"/>
+                <a:latin typeface="Vazirmatn"/>
+                <a:cs typeface="Vazirmatn"/>
               </a:rPr>
               <a:t>–  </a:t>
             </a:r>
@@ -17295,8 +17668,8 @@
                 <a:solidFill>
                   <a:srgbClr val="1F2A24"/>
                 </a:solidFill>
-                <a:latin typeface="Tahoma"/>
-                <a:cs typeface="Tahoma"/>
+                <a:latin typeface="Vazirmatn"/>
+                <a:cs typeface="Vazirmatn"/>
               </a:rPr>
               <a:t>Carry (فاصله هوایی) را تغییر دهد</a:t>
             </a:r>
@@ -17318,8 +17691,8 @@
                 <a:solidFill>
                   <a:srgbClr val="EF6C00"/>
                 </a:solidFill>
-                <a:latin typeface="Tahoma"/>
-                <a:cs typeface="Tahoma"/>
+                <a:latin typeface="Vazirmatn"/>
+                <a:cs typeface="Vazirmatn"/>
               </a:rPr>
               <a:t>–  </a:t>
             </a:r>
@@ -17328,8 +17701,8 @@
                 <a:solidFill>
                   <a:srgbClr val="1F2A24"/>
                 </a:solidFill>
-                <a:latin typeface="Tahoma"/>
-                <a:cs typeface="Tahoma"/>
+                <a:latin typeface="Vazirmatn"/>
+                <a:cs typeface="Vazirmatn"/>
               </a:rPr>
               <a:t>ارتفاع توپ را تحت تأثیر قرار دهد</a:t>
             </a:r>
@@ -17351,8 +17724,8 @@
                 <a:solidFill>
                   <a:srgbClr val="EF6C00"/>
                 </a:solidFill>
-                <a:latin typeface="Tahoma"/>
-                <a:cs typeface="Tahoma"/>
+                <a:latin typeface="Vazirmatn"/>
+                <a:cs typeface="Vazirmatn"/>
               </a:rPr>
               <a:t>●  </a:t>
             </a:r>
@@ -17361,8 +17734,8 @@
                 <a:solidFill>
                   <a:srgbClr val="EF6C00"/>
                 </a:solidFill>
-                <a:latin typeface="Tahoma"/>
-                <a:cs typeface="Tahoma"/>
+                <a:latin typeface="Vazirmatn"/>
+                <a:cs typeface="Vazirmatn"/>
               </a:rPr>
               <a:t>تمرین</a:t>
             </a:r>
@@ -17371,8 +17744,8 @@
                 <a:solidFill>
                   <a:srgbClr val="1F2A24"/>
                 </a:solidFill>
-                <a:latin typeface="Tahoma"/>
-                <a:cs typeface="Tahoma"/>
+                <a:latin typeface="Vazirmatn"/>
+                <a:cs typeface="Vazirmatn"/>
               </a:rPr>
               <a:t>  —  یک Target مشخص کنید و با بادهای مختلف نتیجه را مقایسه کنید</a:t>
             </a:r>
@@ -17507,8 +17880,8 @@
                 <a:solidFill>
                   <a:srgbClr val="EF6C00"/>
                 </a:solidFill>
-                <a:latin typeface="Tahoma"/>
-                <a:cs typeface="Tahoma"/>
+                <a:latin typeface="Vazirmatn"/>
+                <a:cs typeface="Vazirmatn"/>
               </a:rPr>
               <a:t>💡 </a:t>
             </a:r>
@@ -17517,8 +17890,8 @@
                 <a:solidFill>
                   <a:srgbClr val="1F2A24"/>
                 </a:solidFill>
-                <a:latin typeface="Tahoma"/>
-                <a:cs typeface="Tahoma"/>
+                <a:latin typeface="Vazirmatn"/>
+                <a:cs typeface="Vazirmatn"/>
               </a:rPr>
               <a:t>در باد موافق فاصله افزایش و در باد مخالف فاصله کاهش می‌یابد؛ کلاب و Trajectory را تطبیق دهید.</a:t>
             </a:r>
@@ -17534,7 +17907,7 @@
         <p:spPr>
           <a:xfrm>
             <a:off x="502920" y="6400800"/>
-            <a:ext cx="5486400" cy="320040"/>
+            <a:ext cx="6858000" cy="320040"/>
           </a:xfrm>
           <a:prstGeom prst="rect">
             <a:avLst/>
@@ -17559,14 +17932,24 @@
               </a:spcAft>
             </a:pPr>
             <a:r>
+              <a:rPr sz="1100" b="1" i="0">
+                <a:solidFill>
+                  <a:srgbClr val="EF6C00"/>
+                </a:solidFill>
+                <a:latin typeface="Vazirmatn"/>
+                <a:cs typeface="Vazirmatn"/>
+              </a:rPr>
+              <a:t>⛳ Puttclub</a:t>
+            </a:r>
+            <a:r>
               <a:rPr sz="1000" b="0" i="0">
                 <a:solidFill>
                   <a:srgbClr val="5C6B62"/>
                 </a:solidFill>
-                <a:latin typeface="Tahoma"/>
-                <a:cs typeface="Tahoma"/>
-              </a:rPr>
-              <a:t>Golf Academy  ·  Semi-Advanced · Level 3</a:t>
+                <a:latin typeface="Vazirmatn"/>
+                <a:cs typeface="Vazirmatn"/>
+              </a:rPr>
+              <a:t>   ·   Semi-Advanced · Level 3</a:t>
             </a:r>
           </a:p>
         </p:txBody>
@@ -17609,8 +17992,8 @@
                 <a:solidFill>
                   <a:srgbClr val="EF6C00"/>
                 </a:solidFill>
-                <a:latin typeface="Tahoma"/>
-                <a:cs typeface="Tahoma"/>
+                <a:latin typeface="Vazirmatn"/>
+                <a:cs typeface="Vazirmatn"/>
               </a:rPr>
               <a:t>26</a:t>
             </a:r>
@@ -17761,8 +18144,8 @@
                 <a:solidFill>
                   <a:srgbClr val="EF6C00"/>
                 </a:solidFill>
-                <a:latin typeface="Tahoma"/>
-                <a:cs typeface="Tahoma"/>
+                <a:latin typeface="Vazirmatn"/>
+                <a:cs typeface="Vazirmatn"/>
               </a:rPr>
               <a:t>فصل ۲۶</a:t>
             </a:r>
@@ -17784,8 +18167,8 @@
                 <a:solidFill>
                   <a:srgbClr val="1F2A24"/>
                 </a:solidFill>
-                <a:latin typeface="Tahoma"/>
-                <a:cs typeface="Tahoma"/>
+                <a:latin typeface="Vazirmatn"/>
+                <a:cs typeface="Vazirmatn"/>
               </a:rPr>
               <a:t>بازی روی شیب‌ها (Lieهای نامتعارف)</a:t>
             </a:r>
@@ -17964,8 +18347,8 @@
                 <a:solidFill>
                   <a:srgbClr val="EF6C00"/>
                 </a:solidFill>
-                <a:latin typeface="Tahoma"/>
-                <a:cs typeface="Tahoma"/>
+                <a:latin typeface="Vazirmatn"/>
+                <a:cs typeface="Vazirmatn"/>
               </a:rPr>
               <a:t>Uphill Lie</a:t>
             </a:r>
@@ -17987,8 +18370,8 @@
                 <a:solidFill>
                   <a:srgbClr val="5C6B62"/>
                 </a:solidFill>
-                <a:latin typeface="Tahoma"/>
-                <a:cs typeface="Tahoma"/>
+                <a:latin typeface="Vazirmatn"/>
+                <a:cs typeface="Vazirmatn"/>
               </a:rPr>
               <a:t>توپ روی شیب رو به بالا</a:t>
             </a:r>
@@ -18123,8 +18506,8 @@
                 <a:solidFill>
                   <a:srgbClr val="EF6C00"/>
                 </a:solidFill>
-                <a:latin typeface="Tahoma"/>
-                <a:cs typeface="Tahoma"/>
+                <a:latin typeface="Vazirmatn"/>
+                <a:cs typeface="Vazirmatn"/>
               </a:rPr>
               <a:t>Downhill Lie</a:t>
             </a:r>
@@ -18146,8 +18529,8 @@
                 <a:solidFill>
                   <a:srgbClr val="5C6B62"/>
                 </a:solidFill>
-                <a:latin typeface="Tahoma"/>
-                <a:cs typeface="Tahoma"/>
+                <a:latin typeface="Vazirmatn"/>
+                <a:cs typeface="Vazirmatn"/>
               </a:rPr>
               <a:t>توپ روی شیب رو به پایین</a:t>
             </a:r>
@@ -18282,8 +18665,8 @@
                 <a:solidFill>
                   <a:srgbClr val="EF6C00"/>
                 </a:solidFill>
-                <a:latin typeface="Tahoma"/>
-                <a:cs typeface="Tahoma"/>
+                <a:latin typeface="Vazirmatn"/>
+                <a:cs typeface="Vazirmatn"/>
               </a:rPr>
               <a:t>Ball Above Feet</a:t>
             </a:r>
@@ -18305,8 +18688,8 @@
                 <a:solidFill>
                   <a:srgbClr val="5C6B62"/>
                 </a:solidFill>
-                <a:latin typeface="Tahoma"/>
-                <a:cs typeface="Tahoma"/>
+                <a:latin typeface="Vazirmatn"/>
+                <a:cs typeface="Vazirmatn"/>
               </a:rPr>
               <a:t>توپ بالاتر از سطح پاها</a:t>
             </a:r>
@@ -18441,8 +18824,8 @@
                 <a:solidFill>
                   <a:srgbClr val="EF6C00"/>
                 </a:solidFill>
-                <a:latin typeface="Tahoma"/>
-                <a:cs typeface="Tahoma"/>
+                <a:latin typeface="Vazirmatn"/>
+                <a:cs typeface="Vazirmatn"/>
               </a:rPr>
               <a:t>Ball Below Feet</a:t>
             </a:r>
@@ -18464,8 +18847,8 @@
                 <a:solidFill>
                   <a:srgbClr val="5C6B62"/>
                 </a:solidFill>
-                <a:latin typeface="Tahoma"/>
-                <a:cs typeface="Tahoma"/>
+                <a:latin typeface="Vazirmatn"/>
+                <a:cs typeface="Vazirmatn"/>
               </a:rPr>
               <a:t>توپ پایین‌تر از سطح پاها</a:t>
             </a:r>
@@ -18556,8 +18939,8 @@
                 <a:solidFill>
                   <a:srgbClr val="FFFFFF"/>
                 </a:solidFill>
-                <a:latin typeface="Tahoma"/>
-                <a:cs typeface="Tahoma"/>
+                <a:latin typeface="Vazirmatn"/>
+                <a:cs typeface="Vazirmatn"/>
               </a:rPr>
               <a:t>در هر حالت Setup، تعادل، Ball Position و Club Selection ممکن است نیاز به تغییر داشته باشد.</a:t>
             </a:r>
@@ -18573,7 +18956,7 @@
         <p:spPr>
           <a:xfrm>
             <a:off x="502920" y="6400800"/>
-            <a:ext cx="5486400" cy="320040"/>
+            <a:ext cx="6858000" cy="320040"/>
           </a:xfrm>
           <a:prstGeom prst="rect">
             <a:avLst/>
@@ -18598,14 +18981,24 @@
               </a:spcAft>
             </a:pPr>
             <a:r>
+              <a:rPr sz="1100" b="1" i="0">
+                <a:solidFill>
+                  <a:srgbClr val="EF6C00"/>
+                </a:solidFill>
+                <a:latin typeface="Vazirmatn"/>
+                <a:cs typeface="Vazirmatn"/>
+              </a:rPr>
+              <a:t>⛳ Puttclub</a:t>
+            </a:r>
+            <a:r>
               <a:rPr sz="1000" b="0" i="0">
                 <a:solidFill>
                   <a:srgbClr val="5C6B62"/>
                 </a:solidFill>
-                <a:latin typeface="Tahoma"/>
-                <a:cs typeface="Tahoma"/>
-              </a:rPr>
-              <a:t>Golf Academy  ·  Semi-Advanced · Level 3</a:t>
+                <a:latin typeface="Vazirmatn"/>
+                <a:cs typeface="Vazirmatn"/>
+              </a:rPr>
+              <a:t>   ·   Semi-Advanced · Level 3</a:t>
             </a:r>
           </a:p>
         </p:txBody>
@@ -18648,8 +19041,8 @@
                 <a:solidFill>
                   <a:srgbClr val="EF6C00"/>
                 </a:solidFill>
-                <a:latin typeface="Tahoma"/>
-                <a:cs typeface="Tahoma"/>
+                <a:latin typeface="Vazirmatn"/>
+                <a:cs typeface="Vazirmatn"/>
               </a:rPr>
               <a:t>27</a:t>
             </a:r>
@@ -18800,8 +19193,8 @@
                 <a:solidFill>
                   <a:srgbClr val="EF6C00"/>
                 </a:solidFill>
-                <a:latin typeface="Tahoma"/>
-                <a:cs typeface="Tahoma"/>
+                <a:latin typeface="Vazirmatn"/>
+                <a:cs typeface="Vazirmatn"/>
               </a:rPr>
               <a:t>فصل ۲۷</a:t>
             </a:r>
@@ -18823,8 +19216,8 @@
                 <a:solidFill>
                   <a:srgbClr val="1F2A24"/>
                 </a:solidFill>
-                <a:latin typeface="Tahoma"/>
-                <a:cs typeface="Tahoma"/>
+                <a:latin typeface="Vazirmatn"/>
+                <a:cs typeface="Vazirmatn"/>
               </a:rPr>
               <a:t>Pre-Shot Routine پیشرفته‌تر</a:t>
             </a:r>
@@ -19011,8 +19404,8 @@
                 <a:solidFill>
                   <a:srgbClr val="FFFFFF"/>
                 </a:solidFill>
-                <a:latin typeface="Tahoma"/>
-                <a:cs typeface="Tahoma"/>
+                <a:latin typeface="Vazirmatn"/>
+                <a:cs typeface="Vazirmatn"/>
               </a:rPr>
               <a:t>1</a:t>
             </a:r>
@@ -19057,8 +19450,8 @@
                 <a:solidFill>
                   <a:srgbClr val="1F2A24"/>
                 </a:solidFill>
-                <a:latin typeface="Tahoma"/>
-                <a:cs typeface="Tahoma"/>
+                <a:latin typeface="Vazirmatn"/>
+                <a:cs typeface="Vazirmatn"/>
               </a:rPr>
               <a:t>پشت توپ</a:t>
             </a:r>
@@ -19080,8 +19473,8 @@
                 <a:solidFill>
                   <a:srgbClr val="5C6B62"/>
                 </a:solidFill>
-                <a:latin typeface="Tahoma"/>
-                <a:cs typeface="Tahoma"/>
+                <a:latin typeface="Vazirmatn"/>
+                <a:cs typeface="Vazirmatn"/>
               </a:rPr>
               <a:t>Target → Visualize</a:t>
             </a:r>
@@ -19224,8 +19617,8 @@
                 <a:solidFill>
                   <a:srgbClr val="FFFFFF"/>
                 </a:solidFill>
-                <a:latin typeface="Tahoma"/>
-                <a:cs typeface="Tahoma"/>
+                <a:latin typeface="Vazirmatn"/>
+                <a:cs typeface="Vazirmatn"/>
               </a:rPr>
               <a:t>2</a:t>
             </a:r>
@@ -19270,8 +19663,8 @@
                 <a:solidFill>
                   <a:srgbClr val="1F2A24"/>
                 </a:solidFill>
-                <a:latin typeface="Tahoma"/>
-                <a:cs typeface="Tahoma"/>
+                <a:latin typeface="Vazirmatn"/>
+                <a:cs typeface="Vazirmatn"/>
               </a:rPr>
               <a:t>انتخاب</a:t>
             </a:r>
@@ -19293,8 +19686,8 @@
                 <a:solidFill>
                   <a:srgbClr val="5C6B62"/>
                 </a:solidFill>
-                <a:latin typeface="Tahoma"/>
-                <a:cs typeface="Tahoma"/>
+                <a:latin typeface="Vazirmatn"/>
+                <a:cs typeface="Vazirmatn"/>
               </a:rPr>
               <a:t>Club → Practice Swing</a:t>
             </a:r>
@@ -19437,8 +19830,8 @@
                 <a:solidFill>
                   <a:srgbClr val="FFFFFF"/>
                 </a:solidFill>
-                <a:latin typeface="Tahoma"/>
-                <a:cs typeface="Tahoma"/>
+                <a:latin typeface="Vazirmatn"/>
+                <a:cs typeface="Vazirmatn"/>
               </a:rPr>
               <a:t>3</a:t>
             </a:r>
@@ -19483,8 +19876,8 @@
                 <a:solidFill>
                   <a:srgbClr val="1F2A24"/>
                 </a:solidFill>
-                <a:latin typeface="Tahoma"/>
-                <a:cs typeface="Tahoma"/>
+                <a:latin typeface="Vazirmatn"/>
+                <a:cs typeface="Vazirmatn"/>
               </a:rPr>
               <a:t>نزدیک توپ</a:t>
             </a:r>
@@ -19506,8 +19899,8 @@
                 <a:solidFill>
                   <a:srgbClr val="5C6B62"/>
                 </a:solidFill>
-                <a:latin typeface="Tahoma"/>
-                <a:cs typeface="Tahoma"/>
+                <a:latin typeface="Vazirmatn"/>
+                <a:cs typeface="Vazirmatn"/>
               </a:rPr>
               <a:t>Setup → Alignment</a:t>
             </a:r>
@@ -19650,8 +20043,8 @@
                 <a:solidFill>
                   <a:srgbClr val="FFFFFF"/>
                 </a:solidFill>
-                <a:latin typeface="Tahoma"/>
-                <a:cs typeface="Tahoma"/>
+                <a:latin typeface="Vazirmatn"/>
+                <a:cs typeface="Vazirmatn"/>
               </a:rPr>
               <a:t>4</a:t>
             </a:r>
@@ -19696,8 +20089,8 @@
                 <a:solidFill>
                   <a:srgbClr val="1F2A24"/>
                 </a:solidFill>
-                <a:latin typeface="Tahoma"/>
-                <a:cs typeface="Tahoma"/>
+                <a:latin typeface="Vazirmatn"/>
+                <a:cs typeface="Vazirmatn"/>
               </a:rPr>
               <a:t>آرامش</a:t>
             </a:r>
@@ -19719,8 +20112,8 @@
                 <a:solidFill>
                   <a:srgbClr val="5C6B62"/>
                 </a:solidFill>
-                <a:latin typeface="Tahoma"/>
-                <a:cs typeface="Tahoma"/>
+                <a:latin typeface="Vazirmatn"/>
+                <a:cs typeface="Vazirmatn"/>
               </a:rPr>
               <a:t>Breath</a:t>
             </a:r>
@@ -19863,8 +20256,8 @@
                 <a:solidFill>
                   <a:srgbClr val="FFFFFF"/>
                 </a:solidFill>
-                <a:latin typeface="Tahoma"/>
-                <a:cs typeface="Tahoma"/>
+                <a:latin typeface="Vazirmatn"/>
+                <a:cs typeface="Vazirmatn"/>
               </a:rPr>
               <a:t>5</a:t>
             </a:r>
@@ -19909,8 +20302,8 @@
                 <a:solidFill>
                   <a:srgbClr val="1F2A24"/>
                 </a:solidFill>
-                <a:latin typeface="Tahoma"/>
-                <a:cs typeface="Tahoma"/>
+                <a:latin typeface="Vazirmatn"/>
+                <a:cs typeface="Vazirmatn"/>
               </a:rPr>
               <a:t>اجرا</a:t>
             </a:r>
@@ -19932,8 +20325,8 @@
                 <a:solidFill>
                   <a:srgbClr val="5C6B62"/>
                 </a:solidFill>
-                <a:latin typeface="Tahoma"/>
-                <a:cs typeface="Tahoma"/>
+                <a:latin typeface="Vazirmatn"/>
+                <a:cs typeface="Vazirmatn"/>
               </a:rPr>
               <a:t>Swing</a:t>
             </a:r>
@@ -20068,8 +20461,8 @@
                 <a:solidFill>
                   <a:srgbClr val="1F2A24"/>
                 </a:solidFill>
-                <a:latin typeface="Tahoma"/>
-                <a:cs typeface="Tahoma"/>
+                <a:latin typeface="Vazirmatn"/>
+                <a:cs typeface="Vazirmatn"/>
               </a:rPr>
               <a:t>تصمیم‌گیری باید قبل از Setup کامل شود؛ وقتی روی توپ قرار گرفتید نباید تازه درباره هدف فکر کنید.</a:t>
             </a:r>
@@ -20085,7 +20478,7 @@
         <p:spPr>
           <a:xfrm>
             <a:off x="502920" y="6400800"/>
-            <a:ext cx="5486400" cy="320040"/>
+            <a:ext cx="6858000" cy="320040"/>
           </a:xfrm>
           <a:prstGeom prst="rect">
             <a:avLst/>
@@ -20110,14 +20503,24 @@
               </a:spcAft>
             </a:pPr>
             <a:r>
+              <a:rPr sz="1100" b="1" i="0">
+                <a:solidFill>
+                  <a:srgbClr val="EF6C00"/>
+                </a:solidFill>
+                <a:latin typeface="Vazirmatn"/>
+                <a:cs typeface="Vazirmatn"/>
+              </a:rPr>
+              <a:t>⛳ Puttclub</a:t>
+            </a:r>
+            <a:r>
               <a:rPr sz="1000" b="0" i="0">
                 <a:solidFill>
                   <a:srgbClr val="5C6B62"/>
                 </a:solidFill>
-                <a:latin typeface="Tahoma"/>
-                <a:cs typeface="Tahoma"/>
-              </a:rPr>
-              <a:t>Golf Academy  ·  Semi-Advanced · Level 3</a:t>
+                <a:latin typeface="Vazirmatn"/>
+                <a:cs typeface="Vazirmatn"/>
+              </a:rPr>
+              <a:t>   ·   Semi-Advanced · Level 3</a:t>
             </a:r>
           </a:p>
         </p:txBody>
@@ -20160,8 +20563,8 @@
                 <a:solidFill>
                   <a:srgbClr val="EF6C00"/>
                 </a:solidFill>
-                <a:latin typeface="Tahoma"/>
-                <a:cs typeface="Tahoma"/>
+                <a:latin typeface="Vazirmatn"/>
+                <a:cs typeface="Vazirmatn"/>
               </a:rPr>
               <a:t>28</a:t>
             </a:r>
@@ -20312,8 +20715,8 @@
                 <a:solidFill>
                   <a:srgbClr val="EF6C00"/>
                 </a:solidFill>
-                <a:latin typeface="Tahoma"/>
-                <a:cs typeface="Tahoma"/>
+                <a:latin typeface="Vazirmatn"/>
+                <a:cs typeface="Vazirmatn"/>
               </a:rPr>
               <a:t>فصل ۲۸</a:t>
             </a:r>
@@ -20335,8 +20738,8 @@
                 <a:solidFill>
                   <a:srgbClr val="1F2A24"/>
                 </a:solidFill>
-                <a:latin typeface="Tahoma"/>
-                <a:cs typeface="Tahoma"/>
+                <a:latin typeface="Vazirmatn"/>
+                <a:cs typeface="Vazirmatn"/>
               </a:rPr>
               <a:t>Mental Game</a:t>
             </a:r>
@@ -20425,8 +20828,8 @@
                 <a:solidFill>
                   <a:srgbClr val="EF6C00"/>
                 </a:solidFill>
-                <a:latin typeface="Tahoma"/>
-                <a:cs typeface="Tahoma"/>
+                <a:latin typeface="Vazirmatn"/>
+                <a:cs typeface="Vazirmatn"/>
               </a:rPr>
               <a:t>●  </a:t>
             </a:r>
@@ -20435,8 +20838,8 @@
                 <a:solidFill>
                   <a:srgbClr val="EF6C00"/>
                 </a:solidFill>
-                <a:latin typeface="Tahoma"/>
-                <a:cs typeface="Tahoma"/>
+                <a:latin typeface="Vazirmatn"/>
+                <a:cs typeface="Vazirmatn"/>
               </a:rPr>
               <a:t>بعد از ضربه بد</a:t>
             </a:r>
@@ -20445,8 +20848,8 @@
                 <a:solidFill>
                   <a:srgbClr val="1F2A24"/>
                 </a:solidFill>
-                <a:latin typeface="Tahoma"/>
-                <a:cs typeface="Tahoma"/>
+                <a:latin typeface="Vazirmatn"/>
+                <a:cs typeface="Vazirmatn"/>
               </a:rPr>
               <a:t>  —  پذیرش ← تحلیل کوتاه ← رها کردن</a:t>
             </a:r>
@@ -20468,8 +20871,8 @@
                 <a:solidFill>
                   <a:srgbClr val="EF6C00"/>
                 </a:solidFill>
-                <a:latin typeface="Tahoma"/>
-                <a:cs typeface="Tahoma"/>
+                <a:latin typeface="Vazirmatn"/>
+                <a:cs typeface="Vazirmatn"/>
               </a:rPr>
               <a:t>●  </a:t>
             </a:r>
@@ -20478,8 +20881,8 @@
                 <a:solidFill>
                   <a:srgbClr val="EF6C00"/>
                 </a:solidFill>
-                <a:latin typeface="Tahoma"/>
-                <a:cs typeface="Tahoma"/>
+                <a:latin typeface="Vazirmatn"/>
+                <a:cs typeface="Vazirmatn"/>
               </a:rPr>
               <a:t>بعد از ضربه عالی</a:t>
             </a:r>
@@ -20488,8 +20891,8 @@
                 <a:solidFill>
                   <a:srgbClr val="1F2A24"/>
                 </a:solidFill>
-                <a:latin typeface="Tahoma"/>
-                <a:cs typeface="Tahoma"/>
+                <a:latin typeface="Vazirmatn"/>
+                <a:cs typeface="Vazirmatn"/>
               </a:rPr>
               <a:t>  —  هیجان کنترل‌شده ← حفظ روتین</a:t>
             </a:r>
@@ -20511,8 +20914,8 @@
                 <a:solidFill>
                   <a:srgbClr val="EF6C00"/>
                 </a:solidFill>
-                <a:latin typeface="Tahoma"/>
-                <a:cs typeface="Tahoma"/>
+                <a:latin typeface="Vazirmatn"/>
+                <a:cs typeface="Vazirmatn"/>
               </a:rPr>
               <a:t>●  </a:t>
             </a:r>
@@ -20521,8 +20924,8 @@
                 <a:solidFill>
                   <a:srgbClr val="1F2A24"/>
                 </a:solidFill>
-                <a:latin typeface="Tahoma"/>
-                <a:cs typeface="Tahoma"/>
+                <a:latin typeface="Vazirmatn"/>
+                <a:cs typeface="Vazirmatn"/>
               </a:rPr>
               <a:t>یک ضربه خوب نباید باعث بی‌احتیاطی ضربه بعدی شود</a:t>
             </a:r>
@@ -20544,8 +20947,8 @@
                 <a:solidFill>
                   <a:srgbClr val="EF6C00"/>
                 </a:solidFill>
-                <a:latin typeface="Tahoma"/>
-                <a:cs typeface="Tahoma"/>
+                <a:latin typeface="Vazirmatn"/>
+                <a:cs typeface="Vazirmatn"/>
               </a:rPr>
               <a:t>●  </a:t>
             </a:r>
@@ -20554,8 +20957,8 @@
                 <a:solidFill>
                   <a:srgbClr val="1F2A24"/>
                 </a:solidFill>
-                <a:latin typeface="Tahoma"/>
-                <a:cs typeface="Tahoma"/>
+                <a:latin typeface="Vazirmatn"/>
+                <a:cs typeface="Vazirmatn"/>
               </a:rPr>
               <a:t>کنترل احساسات یعنی واکنش یکسان به ضربه خوب و بد</a:t>
             </a:r>
@@ -20577,8 +20980,8 @@
                 <a:solidFill>
                   <a:srgbClr val="EF6C00"/>
                 </a:solidFill>
-                <a:latin typeface="Tahoma"/>
-                <a:cs typeface="Tahoma"/>
+                <a:latin typeface="Vazirmatn"/>
+                <a:cs typeface="Vazirmatn"/>
               </a:rPr>
               <a:t>●  </a:t>
             </a:r>
@@ -20587,8 +20990,8 @@
                 <a:solidFill>
                   <a:srgbClr val="1F2A24"/>
                 </a:solidFill>
-                <a:latin typeface="Tahoma"/>
-                <a:cs typeface="Tahoma"/>
+                <a:latin typeface="Vazirmatn"/>
+                <a:cs typeface="Vazirmatn"/>
               </a:rPr>
               <a:t>روتین ثابت، لنگرگاه ذهنی بازیکن در فشار است</a:t>
             </a:r>
@@ -20723,8 +21126,8 @@
                 <a:solidFill>
                   <a:srgbClr val="EF6C00"/>
                 </a:solidFill>
-                <a:latin typeface="Tahoma"/>
-                <a:cs typeface="Tahoma"/>
+                <a:latin typeface="Vazirmatn"/>
+                <a:cs typeface="Vazirmatn"/>
               </a:rPr>
               <a:t>💡 </a:t>
             </a:r>
@@ -20733,8 +21136,8 @@
                 <a:solidFill>
                   <a:srgbClr val="1F2A24"/>
                 </a:solidFill>
-                <a:latin typeface="Tahoma"/>
-                <a:cs typeface="Tahoma"/>
+                <a:latin typeface="Vazirmatn"/>
+                <a:cs typeface="Vazirmatn"/>
               </a:rPr>
               <a:t>ثبات ذهنی، تفاوت بین بازیکن تمرین و بازیکن مسابقه است.</a:t>
             </a:r>
@@ -20750,7 +21153,7 @@
         <p:spPr>
           <a:xfrm>
             <a:off x="502920" y="6400800"/>
-            <a:ext cx="5486400" cy="320040"/>
+            <a:ext cx="6858000" cy="320040"/>
           </a:xfrm>
           <a:prstGeom prst="rect">
             <a:avLst/>
@@ -20775,14 +21178,24 @@
               </a:spcAft>
             </a:pPr>
             <a:r>
+              <a:rPr sz="1100" b="1" i="0">
+                <a:solidFill>
+                  <a:srgbClr val="EF6C00"/>
+                </a:solidFill>
+                <a:latin typeface="Vazirmatn"/>
+                <a:cs typeface="Vazirmatn"/>
+              </a:rPr>
+              <a:t>⛳ Puttclub</a:t>
+            </a:r>
+            <a:r>
               <a:rPr sz="1000" b="0" i="0">
                 <a:solidFill>
                   <a:srgbClr val="5C6B62"/>
                 </a:solidFill>
-                <a:latin typeface="Tahoma"/>
-                <a:cs typeface="Tahoma"/>
-              </a:rPr>
-              <a:t>Golf Academy  ·  Semi-Advanced · Level 3</a:t>
+                <a:latin typeface="Vazirmatn"/>
+                <a:cs typeface="Vazirmatn"/>
+              </a:rPr>
+              <a:t>   ·   Semi-Advanced · Level 3</a:t>
             </a:r>
           </a:p>
         </p:txBody>
@@ -20825,8 +21238,8 @@
                 <a:solidFill>
                   <a:srgbClr val="EF6C00"/>
                 </a:solidFill>
-                <a:latin typeface="Tahoma"/>
-                <a:cs typeface="Tahoma"/>
+                <a:latin typeface="Vazirmatn"/>
+                <a:cs typeface="Vazirmatn"/>
               </a:rPr>
               <a:t>29</a:t>
             </a:r>
@@ -20977,8 +21390,8 @@
                 <a:solidFill>
                   <a:srgbClr val="EF6C00"/>
                 </a:solidFill>
-                <a:latin typeface="Tahoma"/>
-                <a:cs typeface="Tahoma"/>
+                <a:latin typeface="Vazirmatn"/>
+                <a:cs typeface="Vazirmatn"/>
               </a:rPr>
               <a:t>فصل ۲</a:t>
             </a:r>
@@ -21000,8 +21413,8 @@
                 <a:solidFill>
                   <a:srgbClr val="1F2A24"/>
                 </a:solidFill>
-                <a:latin typeface="Tahoma"/>
-                <a:cs typeface="Tahoma"/>
+                <a:latin typeface="Vazirmatn"/>
+                <a:cs typeface="Vazirmatn"/>
               </a:rPr>
               <a:t>ارزیابی اولیه بازیکن</a:t>
             </a:r>
@@ -21090,8 +21503,8 @@
                 <a:solidFill>
                   <a:srgbClr val="EF6C00"/>
                 </a:solidFill>
-                <a:latin typeface="Tahoma"/>
-                <a:cs typeface="Tahoma"/>
+                <a:latin typeface="Vazirmatn"/>
+                <a:cs typeface="Vazirmatn"/>
               </a:rPr>
               <a:t>●  </a:t>
             </a:r>
@@ -21100,8 +21513,8 @@
                 <a:solidFill>
                   <a:srgbClr val="1F2A24"/>
                 </a:solidFill>
-                <a:latin typeface="Tahoma"/>
-                <a:cs typeface="Tahoma"/>
+                <a:latin typeface="Vazirmatn"/>
+                <a:cs typeface="Vazirmatn"/>
               </a:rPr>
               <a:t>قبل از شروع دوره، مربی یک ارزیابی انجام می‌دهد</a:t>
             </a:r>
@@ -21123,8 +21536,8 @@
                 <a:solidFill>
                   <a:srgbClr val="EF6C00"/>
                 </a:solidFill>
-                <a:latin typeface="Tahoma"/>
-                <a:cs typeface="Tahoma"/>
+                <a:latin typeface="Vazirmatn"/>
+                <a:cs typeface="Vazirmatn"/>
               </a:rPr>
               <a:t>●  </a:t>
             </a:r>
@@ -21133,8 +21546,8 @@
                 <a:solidFill>
                   <a:srgbClr val="EF6C00"/>
                 </a:solidFill>
-                <a:latin typeface="Tahoma"/>
-                <a:cs typeface="Tahoma"/>
+                <a:latin typeface="Vazirmatn"/>
+                <a:cs typeface="Vazirmatn"/>
               </a:rPr>
               <a:t>با کلاب‌های مختلف چند ضربه بزنید و ثبت کنید</a:t>
             </a:r>
@@ -21156,8 +21569,8 @@
                 <a:solidFill>
                   <a:srgbClr val="EF6C00"/>
                 </a:solidFill>
-                <a:latin typeface="Tahoma"/>
-                <a:cs typeface="Tahoma"/>
+                <a:latin typeface="Vazirmatn"/>
+                <a:cs typeface="Vazirmatn"/>
               </a:rPr>
               <a:t>–  </a:t>
             </a:r>
@@ -21166,8 +21579,8 @@
                 <a:solidFill>
                   <a:srgbClr val="1F2A24"/>
                 </a:solidFill>
-                <a:latin typeface="Tahoma"/>
-                <a:cs typeface="Tahoma"/>
+                <a:latin typeface="Vazirmatn"/>
+                <a:cs typeface="Vazirmatn"/>
               </a:rPr>
               <a:t>Carry، Total Distance و جهت شروع توپ</a:t>
             </a:r>
@@ -21189,8 +21602,8 @@
                 <a:solidFill>
                   <a:srgbClr val="EF6C00"/>
                 </a:solidFill>
-                <a:latin typeface="Tahoma"/>
-                <a:cs typeface="Tahoma"/>
+                <a:latin typeface="Vazirmatn"/>
+                <a:cs typeface="Vazirmatn"/>
               </a:rPr>
               <a:t>–  </a:t>
             </a:r>
@@ -21199,8 +21612,8 @@
                 <a:solidFill>
                   <a:srgbClr val="1F2A24"/>
                 </a:solidFill>
-                <a:latin typeface="Tahoma"/>
-                <a:cs typeface="Tahoma"/>
+                <a:latin typeface="Vazirmatn"/>
+                <a:cs typeface="Vazirmatn"/>
               </a:rPr>
               <a:t>مسیر پرواز، نقطه برخورد روی Face و میزان پراکندگی</a:t>
             </a:r>
@@ -21222,8 +21635,8 @@
                 <a:solidFill>
                   <a:srgbClr val="EF6C00"/>
                 </a:solidFill>
-                <a:latin typeface="Tahoma"/>
-                <a:cs typeface="Tahoma"/>
+                <a:latin typeface="Vazirmatn"/>
+                <a:cs typeface="Vazirmatn"/>
               </a:rPr>
               <a:t>–  </a:t>
             </a:r>
@@ -21232,8 +21645,8 @@
                 <a:solidFill>
                   <a:srgbClr val="1F2A24"/>
                 </a:solidFill>
-                <a:latin typeface="Tahoma"/>
-                <a:cs typeface="Tahoma"/>
+                <a:latin typeface="Vazirmatn"/>
+                <a:cs typeface="Vazirmatn"/>
               </a:rPr>
               <a:t>کیفیت Contact و خطای غالب</a:t>
             </a:r>
@@ -21255,8 +21668,8 @@
                 <a:solidFill>
                   <a:srgbClr val="EF6C00"/>
                 </a:solidFill>
-                <a:latin typeface="Tahoma"/>
-                <a:cs typeface="Tahoma"/>
+                <a:latin typeface="Vazirmatn"/>
+                <a:cs typeface="Vazirmatn"/>
               </a:rPr>
               <a:t>●  </a:t>
             </a:r>
@@ -21265,8 +21678,8 @@
                 <a:solidFill>
                   <a:srgbClr val="EF6C00"/>
                 </a:solidFill>
-                <a:latin typeface="Tahoma"/>
-                <a:cs typeface="Tahoma"/>
+                <a:latin typeface="Vazirmatn"/>
+                <a:cs typeface="Vazirmatn"/>
               </a:rPr>
               <a:t>هدف</a:t>
             </a:r>
@@ -21275,8 +21688,8 @@
                 <a:solidFill>
                   <a:srgbClr val="1F2A24"/>
                 </a:solidFill>
-                <a:latin typeface="Tahoma"/>
-                <a:cs typeface="Tahoma"/>
+                <a:latin typeface="Vazirmatn"/>
+                <a:cs typeface="Vazirmatn"/>
               </a:rPr>
               <a:t>  —  پیدا کردن الگوی واقعی بازی بازیکن</a:t>
             </a:r>
@@ -21298,8 +21711,8 @@
                 <a:solidFill>
                   <a:srgbClr val="EF6C00"/>
                 </a:solidFill>
-                <a:latin typeface="Tahoma"/>
-                <a:cs typeface="Tahoma"/>
+                <a:latin typeface="Vazirmatn"/>
+                <a:cs typeface="Vazirmatn"/>
               </a:rPr>
               <a:t>–  </a:t>
             </a:r>
@@ -21308,8 +21721,8 @@
                 <a:solidFill>
                   <a:srgbClr val="1F2A24"/>
                 </a:solidFill>
-                <a:latin typeface="Tahoma"/>
-                <a:cs typeface="Tahoma"/>
+                <a:latin typeface="Vazirmatn"/>
+                <a:cs typeface="Vazirmatn"/>
               </a:rPr>
               <a:t>مثال: «فاصله خوب است اما پراکندگی زیاد است»</a:t>
             </a:r>
@@ -21444,8 +21857,8 @@
                 <a:solidFill>
                   <a:srgbClr val="EF6C00"/>
                 </a:solidFill>
-                <a:latin typeface="Tahoma"/>
-                <a:cs typeface="Tahoma"/>
+                <a:latin typeface="Vazirmatn"/>
+                <a:cs typeface="Vazirmatn"/>
               </a:rPr>
               <a:t>💡 </a:t>
             </a:r>
@@ -21454,8 +21867,8 @@
                 <a:solidFill>
                   <a:srgbClr val="1F2A24"/>
                 </a:solidFill>
-                <a:latin typeface="Tahoma"/>
-                <a:cs typeface="Tahoma"/>
+                <a:latin typeface="Vazirmatn"/>
+                <a:cs typeface="Vazirmatn"/>
               </a:rPr>
               <a:t>ارزیابی واقع‌بینانه، پایه برنامه تمرینی شخصی و مؤثر است.</a:t>
             </a:r>
@@ -21471,7 +21884,7 @@
         <p:spPr>
           <a:xfrm>
             <a:off x="502920" y="6400800"/>
-            <a:ext cx="5486400" cy="320040"/>
+            <a:ext cx="6858000" cy="320040"/>
           </a:xfrm>
           <a:prstGeom prst="rect">
             <a:avLst/>
@@ -21496,14 +21909,24 @@
               </a:spcAft>
             </a:pPr>
             <a:r>
+              <a:rPr sz="1100" b="1" i="0">
+                <a:solidFill>
+                  <a:srgbClr val="EF6C00"/>
+                </a:solidFill>
+                <a:latin typeface="Vazirmatn"/>
+                <a:cs typeface="Vazirmatn"/>
+              </a:rPr>
+              <a:t>⛳ Puttclub</a:t>
+            </a:r>
+            <a:r>
               <a:rPr sz="1000" b="0" i="0">
                 <a:solidFill>
                   <a:srgbClr val="5C6B62"/>
                 </a:solidFill>
-                <a:latin typeface="Tahoma"/>
-                <a:cs typeface="Tahoma"/>
-              </a:rPr>
-              <a:t>Golf Academy  ·  Semi-Advanced · Level 3</a:t>
+                <a:latin typeface="Vazirmatn"/>
+                <a:cs typeface="Vazirmatn"/>
+              </a:rPr>
+              <a:t>   ·   Semi-Advanced · Level 3</a:t>
             </a:r>
           </a:p>
         </p:txBody>
@@ -21546,8 +21969,8 @@
                 <a:solidFill>
                   <a:srgbClr val="EF6C00"/>
                 </a:solidFill>
-                <a:latin typeface="Tahoma"/>
-                <a:cs typeface="Tahoma"/>
+                <a:latin typeface="Vazirmatn"/>
+                <a:cs typeface="Vazirmatn"/>
               </a:rPr>
               <a:t>3</a:t>
             </a:r>
@@ -21698,8 +22121,8 @@
                 <a:solidFill>
                   <a:srgbClr val="EF6C00"/>
                 </a:solidFill>
-                <a:latin typeface="Tahoma"/>
-                <a:cs typeface="Tahoma"/>
+                <a:latin typeface="Vazirmatn"/>
+                <a:cs typeface="Vazirmatn"/>
               </a:rPr>
               <a:t>فصل ۲۹</a:t>
             </a:r>
@@ -21721,8 +22144,8 @@
                 <a:solidFill>
                   <a:srgbClr val="1F2A24"/>
                 </a:solidFill>
-                <a:latin typeface="Tahoma"/>
-                <a:cs typeface="Tahoma"/>
+                <a:latin typeface="Vazirmatn"/>
+                <a:cs typeface="Vazirmatn"/>
               </a:rPr>
               <a:t>بازی با هدف مشخص</a:t>
             </a:r>
@@ -21901,8 +22324,8 @@
                 <a:solidFill>
                   <a:srgbClr val="EF6C00"/>
                 </a:solidFill>
-                <a:latin typeface="Tahoma"/>
-                <a:cs typeface="Tahoma"/>
+                <a:latin typeface="Vazirmatn"/>
+                <a:cs typeface="Vazirmatn"/>
               </a:rPr>
               <a:t>راند ۱</a:t>
             </a:r>
@@ -21924,8 +22347,8 @@
                 <a:solidFill>
                   <a:srgbClr val="5C6B62"/>
                 </a:solidFill>
-                <a:latin typeface="Tahoma"/>
-                <a:cs typeface="Tahoma"/>
+                <a:latin typeface="Vazirmatn"/>
+                <a:cs typeface="Vazirmatn"/>
               </a:rPr>
               <a:t>تمرکز روی Fairway</a:t>
             </a:r>
@@ -22060,8 +22483,8 @@
                 <a:solidFill>
                   <a:srgbClr val="EF6C00"/>
                 </a:solidFill>
-                <a:latin typeface="Tahoma"/>
-                <a:cs typeface="Tahoma"/>
+                <a:latin typeface="Vazirmatn"/>
+                <a:cs typeface="Vazirmatn"/>
               </a:rPr>
               <a:t>راند ۲</a:t>
             </a:r>
@@ -22083,8 +22506,8 @@
                 <a:solidFill>
                   <a:srgbClr val="5C6B62"/>
                 </a:solidFill>
-                <a:latin typeface="Tahoma"/>
-                <a:cs typeface="Tahoma"/>
+                <a:latin typeface="Vazirmatn"/>
+                <a:cs typeface="Vazirmatn"/>
               </a:rPr>
               <a:t>تمرکز روی Approach</a:t>
             </a:r>
@@ -22219,8 +22642,8 @@
                 <a:solidFill>
                   <a:srgbClr val="EF6C00"/>
                 </a:solidFill>
-                <a:latin typeface="Tahoma"/>
-                <a:cs typeface="Tahoma"/>
+                <a:latin typeface="Vazirmatn"/>
+                <a:cs typeface="Vazirmatn"/>
               </a:rPr>
               <a:t>راند ۳</a:t>
             </a:r>
@@ -22242,8 +22665,8 @@
                 <a:solidFill>
                   <a:srgbClr val="5C6B62"/>
                 </a:solidFill>
-                <a:latin typeface="Tahoma"/>
-                <a:cs typeface="Tahoma"/>
+                <a:latin typeface="Vazirmatn"/>
+                <a:cs typeface="Vazirmatn"/>
               </a:rPr>
               <a:t>تمرکز روی Short Game</a:t>
             </a:r>
@@ -22378,8 +22801,8 @@
                 <a:solidFill>
                   <a:srgbClr val="EF6C00"/>
                 </a:solidFill>
-                <a:latin typeface="Tahoma"/>
-                <a:cs typeface="Tahoma"/>
+                <a:latin typeface="Vazirmatn"/>
+                <a:cs typeface="Vazirmatn"/>
               </a:rPr>
               <a:t>راند ۴</a:t>
             </a:r>
@@ -22401,8 +22824,8 @@
                 <a:solidFill>
                   <a:srgbClr val="5C6B62"/>
                 </a:solidFill>
-                <a:latin typeface="Tahoma"/>
-                <a:cs typeface="Tahoma"/>
+                <a:latin typeface="Vazirmatn"/>
+                <a:cs typeface="Vazirmatn"/>
               </a:rPr>
               <a:t>تمرکز روی Putting</a:t>
             </a:r>
@@ -22493,8 +22916,8 @@
                 <a:solidFill>
                   <a:srgbClr val="FFFFFF"/>
                 </a:solidFill>
-                <a:latin typeface="Tahoma"/>
-                <a:cs typeface="Tahoma"/>
+                <a:latin typeface="Vazirmatn"/>
+                <a:cs typeface="Vazirmatn"/>
               </a:rPr>
               <a:t>به‌جای «امروز ۱۸ Hole بازی می‌کنم» یک هدف مشخص تعیین کنید تا هر راند تبدیل به جلسه تمرینی واقعی شود.</a:t>
             </a:r>
@@ -22510,7 +22933,7 @@
         <p:spPr>
           <a:xfrm>
             <a:off x="502920" y="6400800"/>
-            <a:ext cx="5486400" cy="320040"/>
+            <a:ext cx="6858000" cy="320040"/>
           </a:xfrm>
           <a:prstGeom prst="rect">
             <a:avLst/>
@@ -22535,14 +22958,24 @@
               </a:spcAft>
             </a:pPr>
             <a:r>
+              <a:rPr sz="1100" b="1" i="0">
+                <a:solidFill>
+                  <a:srgbClr val="EF6C00"/>
+                </a:solidFill>
+                <a:latin typeface="Vazirmatn"/>
+                <a:cs typeface="Vazirmatn"/>
+              </a:rPr>
+              <a:t>⛳ Puttclub</a:t>
+            </a:r>
+            <a:r>
               <a:rPr sz="1000" b="0" i="0">
                 <a:solidFill>
                   <a:srgbClr val="5C6B62"/>
                 </a:solidFill>
-                <a:latin typeface="Tahoma"/>
-                <a:cs typeface="Tahoma"/>
-              </a:rPr>
-              <a:t>Golf Academy  ·  Semi-Advanced · Level 3</a:t>
+                <a:latin typeface="Vazirmatn"/>
+                <a:cs typeface="Vazirmatn"/>
+              </a:rPr>
+              <a:t>   ·   Semi-Advanced · Level 3</a:t>
             </a:r>
           </a:p>
         </p:txBody>
@@ -22585,8 +23018,8 @@
                 <a:solidFill>
                   <a:srgbClr val="EF6C00"/>
                 </a:solidFill>
-                <a:latin typeface="Tahoma"/>
-                <a:cs typeface="Tahoma"/>
+                <a:latin typeface="Vazirmatn"/>
+                <a:cs typeface="Vazirmatn"/>
               </a:rPr>
               <a:t>30</a:t>
             </a:r>
@@ -22763,8 +23196,8 @@
                 <a:solidFill>
                   <a:srgbClr val="FFFFFF"/>
                 </a:solidFill>
-                <a:latin typeface="Tahoma"/>
-                <a:cs typeface="Tahoma"/>
+                <a:latin typeface="Vazirmatn"/>
+                <a:cs typeface="Vazirmatn"/>
               </a:rPr>
               <a:t>ثبت آمار، پایه تحلیل و رشد</a:t>
             </a:r>
@@ -22853,8 +23286,8 @@
                 <a:solidFill>
                   <a:srgbClr val="EF6C00"/>
                 </a:solidFill>
-                <a:latin typeface="Tahoma"/>
-                <a:cs typeface="Tahoma"/>
+                <a:latin typeface="Vazirmatn"/>
+                <a:cs typeface="Vazirmatn"/>
               </a:rPr>
               <a:t>فصل ۳۰</a:t>
             </a:r>
@@ -22876,8 +23309,8 @@
                 <a:solidFill>
                   <a:srgbClr val="1F2A24"/>
                 </a:solidFill>
-                <a:latin typeface="Tahoma"/>
-                <a:cs typeface="Tahoma"/>
+                <a:latin typeface="Vazirmatn"/>
+                <a:cs typeface="Vazirmatn"/>
               </a:rPr>
               <a:t>ثبت آمار بازی</a:t>
             </a:r>
@@ -22966,8 +23399,8 @@
                 <a:solidFill>
                   <a:srgbClr val="EF6C00"/>
                 </a:solidFill>
-                <a:latin typeface="Tahoma"/>
-                <a:cs typeface="Tahoma"/>
+                <a:latin typeface="Vazirmatn"/>
+                <a:cs typeface="Vazirmatn"/>
               </a:rPr>
               <a:t>●  </a:t>
             </a:r>
@@ -22976,8 +23409,8 @@
                 <a:solidFill>
                   <a:srgbClr val="1F2A24"/>
                 </a:solidFill>
-                <a:latin typeface="Tahoma"/>
-                <a:cs typeface="Tahoma"/>
+                <a:latin typeface="Vazirmatn"/>
+                <a:cs typeface="Vazirmatn"/>
               </a:rPr>
               <a:t>بازیکن نیمه‌پیشرفته باید شروع به ثبت آمار کند</a:t>
             </a:r>
@@ -22999,8 +23432,8 @@
                 <a:solidFill>
                   <a:srgbClr val="EF6C00"/>
                 </a:solidFill>
-                <a:latin typeface="Tahoma"/>
-                <a:cs typeface="Tahoma"/>
+                <a:latin typeface="Vazirmatn"/>
+                <a:cs typeface="Vazirmatn"/>
               </a:rPr>
               <a:t>●  </a:t>
             </a:r>
@@ -23009,8 +23442,8 @@
                 <a:solidFill>
                   <a:srgbClr val="EF6C00"/>
                 </a:solidFill>
-                <a:latin typeface="Tahoma"/>
-                <a:cs typeface="Tahoma"/>
+                <a:latin typeface="Vazirmatn"/>
+                <a:cs typeface="Vazirmatn"/>
               </a:rPr>
               <a:t>موارد پیشنهادی</a:t>
             </a:r>
@@ -23032,8 +23465,8 @@
                 <a:solidFill>
                   <a:srgbClr val="EF6C00"/>
                 </a:solidFill>
-                <a:latin typeface="Tahoma"/>
-                <a:cs typeface="Tahoma"/>
+                <a:latin typeface="Vazirmatn"/>
+                <a:cs typeface="Vazirmatn"/>
               </a:rPr>
               <a:t>–  </a:t>
             </a:r>
@@ -23042,8 +23475,8 @@
                 <a:solidFill>
                   <a:srgbClr val="1F2A24"/>
                 </a:solidFill>
-                <a:latin typeface="Tahoma"/>
-                <a:cs typeface="Tahoma"/>
+                <a:latin typeface="Vazirmatn"/>
+                <a:cs typeface="Vazirmatn"/>
               </a:rPr>
               <a:t>Score و Fairway Hit</a:t>
             </a:r>
@@ -23065,8 +23498,8 @@
                 <a:solidFill>
                   <a:srgbClr val="EF6C00"/>
                 </a:solidFill>
-                <a:latin typeface="Tahoma"/>
-                <a:cs typeface="Tahoma"/>
+                <a:latin typeface="Vazirmatn"/>
+                <a:cs typeface="Vazirmatn"/>
               </a:rPr>
               <a:t>–  </a:t>
             </a:r>
@@ -23075,8 +23508,8 @@
                 <a:solidFill>
                   <a:srgbClr val="1F2A24"/>
                 </a:solidFill>
-                <a:latin typeface="Tahoma"/>
-                <a:cs typeface="Tahoma"/>
+                <a:latin typeface="Vazirmatn"/>
+                <a:cs typeface="Vazirmatn"/>
               </a:rPr>
               <a:t>Greens in Regulation (GIR) و Putts</a:t>
             </a:r>
@@ -23098,8 +23531,8 @@
                 <a:solidFill>
                   <a:srgbClr val="EF6C00"/>
                 </a:solidFill>
-                <a:latin typeface="Tahoma"/>
-                <a:cs typeface="Tahoma"/>
+                <a:latin typeface="Vazirmatn"/>
+                <a:cs typeface="Vazirmatn"/>
               </a:rPr>
               <a:t>–  </a:t>
             </a:r>
@@ -23108,8 +23541,8 @@
                 <a:solidFill>
                   <a:srgbClr val="1F2A24"/>
                 </a:solidFill>
-                <a:latin typeface="Tahoma"/>
-                <a:cs typeface="Tahoma"/>
+                <a:latin typeface="Vazirmatn"/>
+                <a:cs typeface="Vazirmatn"/>
               </a:rPr>
               <a:t>Penalty و Sand Saves و Up &amp; Down</a:t>
             </a:r>
@@ -23131,8 +23564,8 @@
                 <a:solidFill>
                   <a:srgbClr val="EF6C00"/>
                 </a:solidFill>
-                <a:latin typeface="Tahoma"/>
-                <a:cs typeface="Tahoma"/>
+                <a:latin typeface="Vazirmatn"/>
+                <a:cs typeface="Vazirmatn"/>
               </a:rPr>
               <a:t>–  </a:t>
             </a:r>
@@ -23141,8 +23574,8 @@
                 <a:solidFill>
                   <a:srgbClr val="1F2A24"/>
                 </a:solidFill>
-                <a:latin typeface="Tahoma"/>
-                <a:cs typeface="Tahoma"/>
+                <a:latin typeface="Vazirmatn"/>
+                <a:cs typeface="Vazirmatn"/>
               </a:rPr>
               <a:t>نوع خطا در هر ضربه</a:t>
             </a:r>
@@ -23164,8 +23597,8 @@
                 <a:solidFill>
                   <a:srgbClr val="EF6C00"/>
                 </a:solidFill>
-                <a:latin typeface="Tahoma"/>
-                <a:cs typeface="Tahoma"/>
+                <a:latin typeface="Vazirmatn"/>
+                <a:cs typeface="Vazirmatn"/>
               </a:rPr>
               <a:t>●  </a:t>
             </a:r>
@@ -23174,8 +23607,8 @@
                 <a:solidFill>
                   <a:srgbClr val="1F2A24"/>
                 </a:solidFill>
-                <a:latin typeface="Tahoma"/>
-                <a:cs typeface="Tahoma"/>
+                <a:latin typeface="Vazirmatn"/>
+                <a:cs typeface="Vazirmatn"/>
               </a:rPr>
               <a:t>در این سطح لازم نیست آمار زیاد باشد؛ مهم آمار قابل استفاده است</a:t>
             </a:r>
@@ -23310,8 +23743,8 @@
                 <a:solidFill>
                   <a:srgbClr val="EF6C00"/>
                 </a:solidFill>
-                <a:latin typeface="Tahoma"/>
-                <a:cs typeface="Tahoma"/>
+                <a:latin typeface="Vazirmatn"/>
+                <a:cs typeface="Vazirmatn"/>
               </a:rPr>
               <a:t>نکته مربی:  </a:t>
             </a:r>
@@ -23320,8 +23753,8 @@
                 <a:solidFill>
                   <a:srgbClr val="1F2A24"/>
                 </a:solidFill>
-                <a:latin typeface="Tahoma"/>
-                <a:cs typeface="Tahoma"/>
+                <a:latin typeface="Vazirmatn"/>
+                <a:cs typeface="Vazirmatn"/>
               </a:rPr>
               <a:t>آمار خوب، تصمیم تمرینی را از حدس به واقعیت تبدیل می‌کند.</a:t>
             </a:r>
@@ -23337,7 +23770,7 @@
         <p:spPr>
           <a:xfrm>
             <a:off x="502920" y="6400800"/>
-            <a:ext cx="5486400" cy="320040"/>
+            <a:ext cx="6858000" cy="320040"/>
           </a:xfrm>
           <a:prstGeom prst="rect">
             <a:avLst/>
@@ -23362,14 +23795,24 @@
               </a:spcAft>
             </a:pPr>
             <a:r>
+              <a:rPr sz="1100" b="1" i="0">
+                <a:solidFill>
+                  <a:srgbClr val="EF6C00"/>
+                </a:solidFill>
+                <a:latin typeface="Vazirmatn"/>
+                <a:cs typeface="Vazirmatn"/>
+              </a:rPr>
+              <a:t>⛳ Puttclub</a:t>
+            </a:r>
+            <a:r>
               <a:rPr sz="1000" b="0" i="0">
                 <a:solidFill>
                   <a:srgbClr val="5C6B62"/>
                 </a:solidFill>
-                <a:latin typeface="Tahoma"/>
-                <a:cs typeface="Tahoma"/>
-              </a:rPr>
-              <a:t>Golf Academy  ·  Semi-Advanced · Level 3</a:t>
+                <a:latin typeface="Vazirmatn"/>
+                <a:cs typeface="Vazirmatn"/>
+              </a:rPr>
+              <a:t>   ·   Semi-Advanced · Level 3</a:t>
             </a:r>
           </a:p>
         </p:txBody>
@@ -23412,8 +23855,8 @@
                 <a:solidFill>
                   <a:srgbClr val="EF6C00"/>
                 </a:solidFill>
-                <a:latin typeface="Tahoma"/>
-                <a:cs typeface="Tahoma"/>
+                <a:latin typeface="Vazirmatn"/>
+                <a:cs typeface="Vazirmatn"/>
               </a:rPr>
               <a:t>31</a:t>
             </a:r>
@@ -23564,8 +24007,8 @@
                 <a:solidFill>
                   <a:srgbClr val="EF6C00"/>
                 </a:solidFill>
-                <a:latin typeface="Tahoma"/>
-                <a:cs typeface="Tahoma"/>
+                <a:latin typeface="Vazirmatn"/>
+                <a:cs typeface="Vazirmatn"/>
               </a:rPr>
               <a:t>فصل ۳۱</a:t>
             </a:r>
@@ -23587,8 +24030,8 @@
                 <a:solidFill>
                   <a:srgbClr val="1F2A24"/>
                 </a:solidFill>
-                <a:latin typeface="Tahoma"/>
-                <a:cs typeface="Tahoma"/>
+                <a:latin typeface="Vazirmatn"/>
+                <a:cs typeface="Vazirmatn"/>
               </a:rPr>
               <a:t>تحلیل بعد از راند</a:t>
             </a:r>
@@ -23677,8 +24120,8 @@
                 <a:solidFill>
                   <a:srgbClr val="EF6C00"/>
                 </a:solidFill>
-                <a:latin typeface="Tahoma"/>
-                <a:cs typeface="Tahoma"/>
+                <a:latin typeface="Vazirmatn"/>
+                <a:cs typeface="Vazirmatn"/>
               </a:rPr>
               <a:t>●  </a:t>
             </a:r>
@@ -23687,8 +24130,8 @@
                 <a:solidFill>
                   <a:srgbClr val="EF6C00"/>
                 </a:solidFill>
-                <a:latin typeface="Tahoma"/>
-                <a:cs typeface="Tahoma"/>
+                <a:latin typeface="Vazirmatn"/>
+                <a:cs typeface="Vazirmatn"/>
               </a:rPr>
               <a:t>بعد از بازی سه سؤال اصلی</a:t>
             </a:r>
@@ -23710,8 +24153,8 @@
                 <a:solidFill>
                   <a:srgbClr val="EF6C00"/>
                 </a:solidFill>
-                <a:latin typeface="Tahoma"/>
-                <a:cs typeface="Tahoma"/>
+                <a:latin typeface="Vazirmatn"/>
+                <a:cs typeface="Vazirmatn"/>
               </a:rPr>
               <a:t>–  </a:t>
             </a:r>
@@ -23720,8 +24163,8 @@
                 <a:solidFill>
                   <a:srgbClr val="1F2A24"/>
                 </a:solidFill>
-                <a:latin typeface="Tahoma"/>
-                <a:cs typeface="Tahoma"/>
+                <a:latin typeface="Vazirmatn"/>
+                <a:cs typeface="Vazirmatn"/>
               </a:rPr>
               <a:t>۱) چه چیزی خوب بود؟</a:t>
             </a:r>
@@ -23743,8 +24186,8 @@
                 <a:solidFill>
                   <a:srgbClr val="EF6C00"/>
                 </a:solidFill>
-                <a:latin typeface="Tahoma"/>
-                <a:cs typeface="Tahoma"/>
+                <a:latin typeface="Vazirmatn"/>
+                <a:cs typeface="Vazirmatn"/>
               </a:rPr>
               <a:t>–  </a:t>
             </a:r>
@@ -23753,8 +24196,8 @@
                 <a:solidFill>
                   <a:srgbClr val="1F2A24"/>
                 </a:solidFill>
-                <a:latin typeface="Tahoma"/>
-                <a:cs typeface="Tahoma"/>
+                <a:latin typeface="Vazirmatn"/>
+                <a:cs typeface="Vazirmatn"/>
               </a:rPr>
               <a:t>۲) بیشترین امتیاز را کجا از دست دادم؟</a:t>
             </a:r>
@@ -23776,8 +24219,8 @@
                 <a:solidFill>
                   <a:srgbClr val="EF6C00"/>
                 </a:solidFill>
-                <a:latin typeface="Tahoma"/>
-                <a:cs typeface="Tahoma"/>
+                <a:latin typeface="Vazirmatn"/>
+                <a:cs typeface="Vazirmatn"/>
               </a:rPr>
               <a:t>–  </a:t>
             </a:r>
@@ -23786,8 +24229,8 @@
                 <a:solidFill>
                   <a:srgbClr val="1F2A24"/>
                 </a:solidFill>
-                <a:latin typeface="Tahoma"/>
-                <a:cs typeface="Tahoma"/>
+                <a:latin typeface="Vazirmatn"/>
+                <a:cs typeface="Vazirmatn"/>
               </a:rPr>
               <a:t>۳) برای راند بعدی چه چیزی را تغییر می‌دهم؟</a:t>
             </a:r>
@@ -23809,8 +24252,8 @@
                 <a:solidFill>
                   <a:srgbClr val="EF6C00"/>
                 </a:solidFill>
-                <a:latin typeface="Tahoma"/>
-                <a:cs typeface="Tahoma"/>
+                <a:latin typeface="Vazirmatn"/>
+                <a:cs typeface="Vazirmatn"/>
               </a:rPr>
               <a:t>●  </a:t>
             </a:r>
@@ -23819,8 +24262,8 @@
                 <a:solidFill>
                   <a:srgbClr val="1F2A24"/>
                 </a:solidFill>
-                <a:latin typeface="Tahoma"/>
-                <a:cs typeface="Tahoma"/>
+                <a:latin typeface="Vazirmatn"/>
+                <a:cs typeface="Vazirmatn"/>
               </a:rPr>
               <a:t>فقط یک یا دو هدف مشخص برای تمرین بعدی انتخاب کنید</a:t>
             </a:r>
@@ -23842,8 +24285,8 @@
                 <a:solidFill>
                   <a:srgbClr val="EF6C00"/>
                 </a:solidFill>
-                <a:latin typeface="Tahoma"/>
-                <a:cs typeface="Tahoma"/>
+                <a:latin typeface="Vazirmatn"/>
+                <a:cs typeface="Vazirmatn"/>
               </a:rPr>
               <a:t>●  </a:t>
             </a:r>
@@ -23852,8 +24295,8 @@
                 <a:solidFill>
                   <a:srgbClr val="1F2A24"/>
                 </a:solidFill>
-                <a:latin typeface="Tahoma"/>
-                <a:cs typeface="Tahoma"/>
+                <a:latin typeface="Vazirmatn"/>
+                <a:cs typeface="Vazirmatn"/>
               </a:rPr>
               <a:t>تمرین را روی ضعف پرهزینه‌تر متمرکز کنید</a:t>
             </a:r>
@@ -23988,8 +24431,8 @@
                 <a:solidFill>
                   <a:srgbClr val="EF6C00"/>
                 </a:solidFill>
-                <a:latin typeface="Tahoma"/>
-                <a:cs typeface="Tahoma"/>
+                <a:latin typeface="Vazirmatn"/>
+                <a:cs typeface="Vazirmatn"/>
               </a:rPr>
               <a:t>💡 </a:t>
             </a:r>
@@ -23998,8 +24441,8 @@
                 <a:solidFill>
                   <a:srgbClr val="1F2A24"/>
                 </a:solidFill>
-                <a:latin typeface="Tahoma"/>
-                <a:cs typeface="Tahoma"/>
+                <a:latin typeface="Vazirmatn"/>
+                <a:cs typeface="Vazirmatn"/>
               </a:rPr>
               <a:t>تحلیل مؤثر یعنی خروجی مشخص و قابل‌اجرا، نه فهرست بلند بالای اشکالات.</a:t>
             </a:r>
@@ -24015,7 +24458,7 @@
         <p:spPr>
           <a:xfrm>
             <a:off x="502920" y="6400800"/>
-            <a:ext cx="5486400" cy="320040"/>
+            <a:ext cx="6858000" cy="320040"/>
           </a:xfrm>
           <a:prstGeom prst="rect">
             <a:avLst/>
@@ -24040,14 +24483,24 @@
               </a:spcAft>
             </a:pPr>
             <a:r>
+              <a:rPr sz="1100" b="1" i="0">
+                <a:solidFill>
+                  <a:srgbClr val="EF6C00"/>
+                </a:solidFill>
+                <a:latin typeface="Vazirmatn"/>
+                <a:cs typeface="Vazirmatn"/>
+              </a:rPr>
+              <a:t>⛳ Puttclub</a:t>
+            </a:r>
+            <a:r>
               <a:rPr sz="1000" b="0" i="0">
                 <a:solidFill>
                   <a:srgbClr val="5C6B62"/>
                 </a:solidFill>
-                <a:latin typeface="Tahoma"/>
-                <a:cs typeface="Tahoma"/>
-              </a:rPr>
-              <a:t>Golf Academy  ·  Semi-Advanced · Level 3</a:t>
+                <a:latin typeface="Vazirmatn"/>
+                <a:cs typeface="Vazirmatn"/>
+              </a:rPr>
+              <a:t>   ·   Semi-Advanced · Level 3</a:t>
             </a:r>
           </a:p>
         </p:txBody>
@@ -24090,8 +24543,8 @@
                 <a:solidFill>
                   <a:srgbClr val="EF6C00"/>
                 </a:solidFill>
-                <a:latin typeface="Tahoma"/>
-                <a:cs typeface="Tahoma"/>
+                <a:latin typeface="Vazirmatn"/>
+                <a:cs typeface="Vazirmatn"/>
               </a:rPr>
               <a:t>32</a:t>
             </a:r>
@@ -24242,8 +24695,8 @@
                 <a:solidFill>
                   <a:srgbClr val="EF6C00"/>
                 </a:solidFill>
-                <a:latin typeface="Tahoma"/>
-                <a:cs typeface="Tahoma"/>
+                <a:latin typeface="Vazirmatn"/>
+                <a:cs typeface="Vazirmatn"/>
               </a:rPr>
               <a:t>فصل ۳۲</a:t>
             </a:r>
@@ -24265,8 +24718,8 @@
                 <a:solidFill>
                   <a:srgbClr val="1F2A24"/>
                 </a:solidFill>
-                <a:latin typeface="Tahoma"/>
-                <a:cs typeface="Tahoma"/>
+                <a:latin typeface="Vazirmatn"/>
+                <a:cs typeface="Vazirmatn"/>
               </a:rPr>
               <a:t>تمرین عملی — ایستگاه‌ها</a:t>
             </a:r>
@@ -24352,8 +24805,8 @@
                           <a:solidFill>
                             <a:srgbClr val="FFFFFF"/>
                           </a:solidFill>
-                          <a:latin typeface="Tahoma"/>
-                          <a:cs typeface="Tahoma"/>
+                          <a:latin typeface="Vazirmatn"/>
+                          <a:cs typeface="Vazirmatn"/>
                         </a:rPr>
                         <a:t>ایستگاه</a:t>
                       </a:r>
@@ -24376,8 +24829,8 @@
                           <a:solidFill>
                             <a:srgbClr val="FFFFFF"/>
                           </a:solidFill>
-                          <a:latin typeface="Tahoma"/>
-                          <a:cs typeface="Tahoma"/>
+                          <a:latin typeface="Vazirmatn"/>
+                          <a:cs typeface="Vazirmatn"/>
                         </a:rPr>
                         <a:t>تمرین</a:t>
                       </a:r>
@@ -24400,8 +24853,8 @@
                           <a:solidFill>
                             <a:srgbClr val="FFFFFF"/>
                           </a:solidFill>
-                          <a:latin typeface="Tahoma"/>
-                          <a:cs typeface="Tahoma"/>
+                          <a:latin typeface="Vazirmatn"/>
+                          <a:cs typeface="Vazirmatn"/>
                         </a:rPr>
                         <a:t>هدف</a:t>
                       </a:r>
@@ -24426,8 +24879,8 @@
                           <a:solidFill>
                             <a:srgbClr val="EF6C00"/>
                           </a:solidFill>
-                          <a:latin typeface="Tahoma"/>
-                          <a:cs typeface="Tahoma"/>
+                          <a:latin typeface="Vazirmatn"/>
+                          <a:cs typeface="Vazirmatn"/>
                         </a:rPr>
                         <a:t>۱ — Iron</a:t>
                       </a:r>
@@ -24450,8 +24903,8 @@
                           <a:solidFill>
                             <a:srgbClr val="1F2A24"/>
                           </a:solidFill>
-                          <a:latin typeface="Tahoma"/>
-                          <a:cs typeface="Tahoma"/>
+                          <a:latin typeface="Vazirmatn"/>
+                          <a:cs typeface="Vazirmatn"/>
                         </a:rPr>
                         <a:t>۱۰ توپ</a:t>
                       </a:r>
@@ -24474,8 +24927,8 @@
                           <a:solidFill>
                             <a:srgbClr val="1F2A24"/>
                           </a:solidFill>
-                          <a:latin typeface="Tahoma"/>
-                          <a:cs typeface="Tahoma"/>
+                          <a:latin typeface="Vazirmatn"/>
+                          <a:cs typeface="Vazirmatn"/>
                         </a:rPr>
                         <a:t>Contact + Direction</a:t>
                       </a:r>
@@ -24500,8 +24953,8 @@
                           <a:solidFill>
                             <a:srgbClr val="EF6C00"/>
                           </a:solidFill>
-                          <a:latin typeface="Tahoma"/>
-                          <a:cs typeface="Tahoma"/>
+                          <a:latin typeface="Vazirmatn"/>
+                          <a:cs typeface="Vazirmatn"/>
                         </a:rPr>
                         <a:t>۲ — Driver</a:t>
                       </a:r>
@@ -24524,8 +24977,8 @@
                           <a:solidFill>
                             <a:srgbClr val="1F2A24"/>
                           </a:solidFill>
-                          <a:latin typeface="Tahoma"/>
-                          <a:cs typeface="Tahoma"/>
+                          <a:latin typeface="Vazirmatn"/>
+                          <a:cs typeface="Vazirmatn"/>
                         </a:rPr>
                         <a:t>۱۰ توپ</a:t>
                       </a:r>
@@ -24548,8 +25001,8 @@
                           <a:solidFill>
                             <a:srgbClr val="1F2A24"/>
                           </a:solidFill>
-                          <a:latin typeface="Tahoma"/>
-                          <a:cs typeface="Tahoma"/>
+                          <a:latin typeface="Vazirmatn"/>
+                          <a:cs typeface="Vazirmatn"/>
                         </a:rPr>
                         <a:t>Fairway + Dispersion</a:t>
                       </a:r>
@@ -24574,8 +25027,8 @@
                           <a:solidFill>
                             <a:srgbClr val="EF6C00"/>
                           </a:solidFill>
-                          <a:latin typeface="Tahoma"/>
-                          <a:cs typeface="Tahoma"/>
+                          <a:latin typeface="Vazirmatn"/>
+                          <a:cs typeface="Vazirmatn"/>
                         </a:rPr>
                         <a:t>۳ — Pitch</a:t>
                       </a:r>
@@ -24598,8 +25051,8 @@
                           <a:solidFill>
                             <a:srgbClr val="1F2A24"/>
                           </a:solidFill>
-                          <a:latin typeface="Tahoma"/>
-                          <a:cs typeface="Tahoma"/>
+                          <a:latin typeface="Vazirmatn"/>
+                          <a:cs typeface="Vazirmatn"/>
                         </a:rPr>
                         <a:t>۱۰ توپ از فاصله‌های مختلف</a:t>
                       </a:r>
@@ -24622,8 +25075,8 @@
                           <a:solidFill>
                             <a:srgbClr val="1F2A24"/>
                           </a:solidFill>
-                          <a:latin typeface="Tahoma"/>
-                          <a:cs typeface="Tahoma"/>
+                          <a:latin typeface="Vazirmatn"/>
+                          <a:cs typeface="Vazirmatn"/>
                         </a:rPr>
                         <a:t>Carry + Roll</a:t>
                       </a:r>
@@ -24648,8 +25101,8 @@
                           <a:solidFill>
                             <a:srgbClr val="EF6C00"/>
                           </a:solidFill>
-                          <a:latin typeface="Tahoma"/>
-                          <a:cs typeface="Tahoma"/>
+                          <a:latin typeface="Vazirmatn"/>
+                          <a:cs typeface="Vazirmatn"/>
                         </a:rPr>
                         <a:t>۴ — Chip</a:t>
                       </a:r>
@@ -24672,8 +25125,8 @@
                           <a:solidFill>
                             <a:srgbClr val="1F2A24"/>
                           </a:solidFill>
-                          <a:latin typeface="Tahoma"/>
-                          <a:cs typeface="Tahoma"/>
+                          <a:latin typeface="Vazirmatn"/>
+                          <a:cs typeface="Vazirmatn"/>
                         </a:rPr>
                         <a:t>۱۰ توپ</a:t>
                       </a:r>
@@ -24696,8 +25149,8 @@
                           <a:solidFill>
                             <a:srgbClr val="1F2A24"/>
                           </a:solidFill>
-                          <a:latin typeface="Tahoma"/>
-                          <a:cs typeface="Tahoma"/>
+                          <a:latin typeface="Vazirmatn"/>
+                          <a:cs typeface="Vazirmatn"/>
                         </a:rPr>
                         <a:t>Landing Zone</a:t>
                       </a:r>
@@ -24722,8 +25175,8 @@
                           <a:solidFill>
                             <a:srgbClr val="EF6C00"/>
                           </a:solidFill>
-                          <a:latin typeface="Tahoma"/>
-                          <a:cs typeface="Tahoma"/>
+                          <a:latin typeface="Vazirmatn"/>
+                          <a:cs typeface="Vazirmatn"/>
                         </a:rPr>
                         <a:t>۵ — Putting</a:t>
                       </a:r>
@@ -24746,8 +25199,8 @@
                           <a:solidFill>
                             <a:srgbClr val="1F2A24"/>
                           </a:solidFill>
-                          <a:latin typeface="Tahoma"/>
-                          <a:cs typeface="Tahoma"/>
+                          <a:latin typeface="Vazirmatn"/>
+                          <a:cs typeface="Vazirmatn"/>
                         </a:rPr>
                         <a:t>۱۰ کوتاه + ۱۰ بلند</a:t>
                       </a:r>
@@ -24770,8 +25223,8 @@
                           <a:solidFill>
                             <a:srgbClr val="1F2A24"/>
                           </a:solidFill>
-                          <a:latin typeface="Tahoma"/>
-                          <a:cs typeface="Tahoma"/>
+                          <a:latin typeface="Vazirmatn"/>
+                          <a:cs typeface="Vazirmatn"/>
                         </a:rPr>
                         <a:t>Start Line + Speed</a:t>
                       </a:r>
@@ -24796,8 +25249,8 @@
                           <a:solidFill>
                             <a:srgbClr val="EF6C00"/>
                           </a:solidFill>
-                          <a:latin typeface="Tahoma"/>
-                          <a:cs typeface="Tahoma"/>
+                          <a:latin typeface="Vazirmatn"/>
+                          <a:cs typeface="Vazirmatn"/>
                         </a:rPr>
                         <a:t>۶ — Course Mgmt</a:t>
                       </a:r>
@@ -24820,8 +25273,8 @@
                           <a:solidFill>
                             <a:srgbClr val="1F2A24"/>
                           </a:solidFill>
-                          <a:latin typeface="Tahoma"/>
-                          <a:cs typeface="Tahoma"/>
+                          <a:latin typeface="Vazirmatn"/>
+                          <a:cs typeface="Vazirmatn"/>
                         </a:rPr>
                         <a:t>سناریوهای واقعی روی زمین</a:t>
                       </a:r>
@@ -24844,8 +25297,8 @@
                           <a:solidFill>
                             <a:srgbClr val="1F2A24"/>
                           </a:solidFill>
-                          <a:latin typeface="Tahoma"/>
-                          <a:cs typeface="Tahoma"/>
+                          <a:latin typeface="Vazirmatn"/>
+                          <a:cs typeface="Vazirmatn"/>
                         </a:rPr>
                         <a:t>Club؟ Target؟ Risk؟</a:t>
                       </a:r>
@@ -24900,8 +25353,8 @@
                 <a:solidFill>
                   <a:srgbClr val="EF6C00"/>
                 </a:solidFill>
-                <a:latin typeface="Tahoma"/>
-                <a:cs typeface="Tahoma"/>
+                <a:latin typeface="Vazirmatn"/>
+                <a:cs typeface="Vazirmatn"/>
               </a:rPr>
               <a:t>●  </a:t>
             </a:r>
@@ -24910,8 +25363,8 @@
                 <a:solidFill>
                   <a:srgbClr val="5C6B62"/>
                 </a:solidFill>
-                <a:latin typeface="Tahoma"/>
-                <a:cs typeface="Tahoma"/>
+                <a:latin typeface="Vazirmatn"/>
+                <a:cs typeface="Vazirmatn"/>
               </a:rPr>
               <a:t>در ایستگاه ۶ بازیکن باید قبل از ضربه توضیح دهد: کلاب؟ هدف؟ ریسک؟ دلیل انتخاب؟</a:t>
             </a:r>
@@ -24927,7 +25380,7 @@
         <p:spPr>
           <a:xfrm>
             <a:off x="502920" y="6400800"/>
-            <a:ext cx="5486400" cy="320040"/>
+            <a:ext cx="6858000" cy="320040"/>
           </a:xfrm>
           <a:prstGeom prst="rect">
             <a:avLst/>
@@ -24952,14 +25405,24 @@
               </a:spcAft>
             </a:pPr>
             <a:r>
+              <a:rPr sz="1100" b="1" i="0">
+                <a:solidFill>
+                  <a:srgbClr val="EF6C00"/>
+                </a:solidFill>
+                <a:latin typeface="Vazirmatn"/>
+                <a:cs typeface="Vazirmatn"/>
+              </a:rPr>
+              <a:t>⛳ Puttclub</a:t>
+            </a:r>
+            <a:r>
               <a:rPr sz="1000" b="0" i="0">
                 <a:solidFill>
                   <a:srgbClr val="5C6B62"/>
                 </a:solidFill>
-                <a:latin typeface="Tahoma"/>
-                <a:cs typeface="Tahoma"/>
-              </a:rPr>
-              <a:t>Golf Academy  ·  Semi-Advanced · Level 3</a:t>
+                <a:latin typeface="Vazirmatn"/>
+                <a:cs typeface="Vazirmatn"/>
+              </a:rPr>
+              <a:t>   ·   Semi-Advanced · Level 3</a:t>
             </a:r>
           </a:p>
         </p:txBody>
@@ -25002,8 +25465,8 @@
                 <a:solidFill>
                   <a:srgbClr val="EF6C00"/>
                 </a:solidFill>
-                <a:latin typeface="Tahoma"/>
-                <a:cs typeface="Tahoma"/>
+                <a:latin typeface="Vazirmatn"/>
+                <a:cs typeface="Vazirmatn"/>
               </a:rPr>
               <a:t>33</a:t>
             </a:r>
@@ -25154,8 +25617,8 @@
                 <a:solidFill>
                   <a:srgbClr val="EF6C00"/>
                 </a:solidFill>
-                <a:latin typeface="Tahoma"/>
-                <a:cs typeface="Tahoma"/>
+                <a:latin typeface="Vazirmatn"/>
+                <a:cs typeface="Vazirmatn"/>
               </a:rPr>
               <a:t>فصل ۳۳</a:t>
             </a:r>
@@ -25177,8 +25640,8 @@
                 <a:solidFill>
                   <a:srgbClr val="1F2A24"/>
                 </a:solidFill>
-                <a:latin typeface="Tahoma"/>
-                <a:cs typeface="Tahoma"/>
+                <a:latin typeface="Vazirmatn"/>
+                <a:cs typeface="Vazirmatn"/>
               </a:rPr>
               <a:t>برنامه ۱۲ جلسه‌ای نیمه‌پیشرفته</a:t>
             </a:r>
@@ -25265,8 +25728,8 @@
                           <a:solidFill>
                             <a:srgbClr val="FFFFFF"/>
                           </a:solidFill>
-                          <a:latin typeface="Tahoma"/>
-                          <a:cs typeface="Tahoma"/>
+                          <a:latin typeface="Vazirmatn"/>
+                          <a:cs typeface="Vazirmatn"/>
                         </a:rPr>
                         <a:t>جلسه</a:t>
                       </a:r>
@@ -25289,8 +25752,8 @@
                           <a:solidFill>
                             <a:srgbClr val="FFFFFF"/>
                           </a:solidFill>
-                          <a:latin typeface="Tahoma"/>
-                          <a:cs typeface="Tahoma"/>
+                          <a:latin typeface="Vazirmatn"/>
+                          <a:cs typeface="Vazirmatn"/>
                         </a:rPr>
                         <a:t>موضوع</a:t>
                       </a:r>
@@ -25313,8 +25776,8 @@
                           <a:solidFill>
                             <a:srgbClr val="FFFFFF"/>
                           </a:solidFill>
-                          <a:latin typeface="Tahoma"/>
-                          <a:cs typeface="Tahoma"/>
+                          <a:latin typeface="Vazirmatn"/>
+                          <a:cs typeface="Vazirmatn"/>
                         </a:rPr>
                         <a:t>جلسه</a:t>
                       </a:r>
@@ -25337,8 +25800,8 @@
                           <a:solidFill>
                             <a:srgbClr val="FFFFFF"/>
                           </a:solidFill>
-                          <a:latin typeface="Tahoma"/>
-                          <a:cs typeface="Tahoma"/>
+                          <a:latin typeface="Vazirmatn"/>
+                          <a:cs typeface="Vazirmatn"/>
                         </a:rPr>
                         <a:t>موضوع</a:t>
                       </a:r>
@@ -25363,8 +25826,8 @@
                           <a:solidFill>
                             <a:srgbClr val="EF6C00"/>
                           </a:solidFill>
-                          <a:latin typeface="Tahoma"/>
-                          <a:cs typeface="Tahoma"/>
+                          <a:latin typeface="Vazirmatn"/>
+                          <a:cs typeface="Vazirmatn"/>
                         </a:rPr>
                         <a:t>۱</a:t>
                       </a:r>
@@ -25387,8 +25850,8 @@
                           <a:solidFill>
                             <a:srgbClr val="1F2A24"/>
                           </a:solidFill>
-                          <a:latin typeface="Tahoma"/>
-                          <a:cs typeface="Tahoma"/>
+                          <a:latin typeface="Vazirmatn"/>
+                          <a:cs typeface="Vazirmatn"/>
                         </a:rPr>
                         <a:t>ارزیابی فنی و آماری</a:t>
                       </a:r>
@@ -25411,8 +25874,8 @@
                           <a:solidFill>
                             <a:srgbClr val="1F2A24"/>
                           </a:solidFill>
-                          <a:latin typeface="Tahoma"/>
-                          <a:cs typeface="Tahoma"/>
+                          <a:latin typeface="Vazirmatn"/>
+                          <a:cs typeface="Vazirmatn"/>
                         </a:rPr>
                         <a:t>۷</a:t>
                       </a:r>
@@ -25435,8 +25898,8 @@
                           <a:solidFill>
                             <a:srgbClr val="1F2A24"/>
                           </a:solidFill>
-                          <a:latin typeface="Tahoma"/>
-                          <a:cs typeface="Tahoma"/>
+                          <a:latin typeface="Vazirmatn"/>
+                          <a:cs typeface="Vazirmatn"/>
                         </a:rPr>
                         <a:t>Pitching</a:t>
                       </a:r>
@@ -25461,8 +25924,8 @@
                           <a:solidFill>
                             <a:srgbClr val="EF6C00"/>
                           </a:solidFill>
-                          <a:latin typeface="Tahoma"/>
-                          <a:cs typeface="Tahoma"/>
+                          <a:latin typeface="Vazirmatn"/>
+                          <a:cs typeface="Vazirmatn"/>
                         </a:rPr>
                         <a:t>۲</a:t>
                       </a:r>
@@ -25485,8 +25948,8 @@
                           <a:solidFill>
                             <a:srgbClr val="1F2A24"/>
                           </a:solidFill>
-                          <a:latin typeface="Tahoma"/>
-                          <a:cs typeface="Tahoma"/>
+                          <a:latin typeface="Vazirmatn"/>
+                          <a:cs typeface="Vazirmatn"/>
                         </a:rPr>
                         <a:t>Club Face + Club Path</a:t>
                       </a:r>
@@ -25509,8 +25972,8 @@
                           <a:solidFill>
                             <a:srgbClr val="1F2A24"/>
                           </a:solidFill>
-                          <a:latin typeface="Tahoma"/>
-                          <a:cs typeface="Tahoma"/>
+                          <a:latin typeface="Vazirmatn"/>
+                          <a:cs typeface="Vazirmatn"/>
                         </a:rPr>
                         <a:t>۸</a:t>
                       </a:r>
@@ -25533,8 +25996,8 @@
                           <a:solidFill>
                             <a:srgbClr val="1F2A24"/>
                           </a:solidFill>
-                          <a:latin typeface="Tahoma"/>
-                          <a:cs typeface="Tahoma"/>
+                          <a:latin typeface="Vazirmatn"/>
+                          <a:cs typeface="Vazirmatn"/>
                         </a:rPr>
                         <a:t>Chipping + Landing Zone</a:t>
                       </a:r>
@@ -25559,8 +26022,8 @@
                           <a:solidFill>
                             <a:srgbClr val="EF6C00"/>
                           </a:solidFill>
-                          <a:latin typeface="Tahoma"/>
-                          <a:cs typeface="Tahoma"/>
+                          <a:latin typeface="Vazirmatn"/>
+                          <a:cs typeface="Vazirmatn"/>
                         </a:rPr>
                         <a:t>۳</a:t>
                       </a:r>
@@ -25583,8 +26046,8 @@
                           <a:solidFill>
                             <a:srgbClr val="1F2A24"/>
                           </a:solidFill>
-                          <a:latin typeface="Tahoma"/>
-                          <a:cs typeface="Tahoma"/>
+                          <a:latin typeface="Vazirmatn"/>
+                          <a:cs typeface="Vazirmatn"/>
                         </a:rPr>
                         <a:t>Iron Distance Control</a:t>
                       </a:r>
@@ -25607,8 +26070,8 @@
                           <a:solidFill>
                             <a:srgbClr val="1F2A24"/>
                           </a:solidFill>
-                          <a:latin typeface="Tahoma"/>
-                          <a:cs typeface="Tahoma"/>
+                          <a:latin typeface="Vazirmatn"/>
+                          <a:cs typeface="Vazirmatn"/>
                         </a:rPr>
                         <a:t>۹</a:t>
                       </a:r>
@@ -25631,8 +26094,8 @@
                           <a:solidFill>
                             <a:srgbClr val="1F2A24"/>
                           </a:solidFill>
-                          <a:latin typeface="Tahoma"/>
-                          <a:cs typeface="Tahoma"/>
+                          <a:latin typeface="Vazirmatn"/>
+                          <a:cs typeface="Vazirmatn"/>
                         </a:rPr>
                         <a:t>Bunker + Short Game</a:t>
                       </a:r>
@@ -25657,8 +26120,8 @@
                           <a:solidFill>
                             <a:srgbClr val="EF6C00"/>
                           </a:solidFill>
-                          <a:latin typeface="Tahoma"/>
-                          <a:cs typeface="Tahoma"/>
+                          <a:latin typeface="Vazirmatn"/>
+                          <a:cs typeface="Vazirmatn"/>
                         </a:rPr>
                         <a:t>۴</a:t>
                       </a:r>
@@ -25681,8 +26144,8 @@
                           <a:solidFill>
                             <a:srgbClr val="1F2A24"/>
                           </a:solidFill>
-                          <a:latin typeface="Tahoma"/>
-                          <a:cs typeface="Tahoma"/>
+                          <a:latin typeface="Vazirmatn"/>
+                          <a:cs typeface="Vazirmatn"/>
                         </a:rPr>
                         <a:t>Trajectory + Shot Shaping</a:t>
                       </a:r>
@@ -25705,8 +26168,8 @@
                           <a:solidFill>
                             <a:srgbClr val="1F2A24"/>
                           </a:solidFill>
-                          <a:latin typeface="Tahoma"/>
-                          <a:cs typeface="Tahoma"/>
+                          <a:latin typeface="Vazirmatn"/>
+                          <a:cs typeface="Vazirmatn"/>
                         </a:rPr>
                         <a:t>۱۰</a:t>
                       </a:r>
@@ -25729,8 +26192,8 @@
                           <a:solidFill>
                             <a:srgbClr val="1F2A24"/>
                           </a:solidFill>
-                          <a:latin typeface="Tahoma"/>
-                          <a:cs typeface="Tahoma"/>
+                          <a:latin typeface="Vazirmatn"/>
+                          <a:cs typeface="Vazirmatn"/>
                         </a:rPr>
                         <a:t>Putting + Green Reading</a:t>
                       </a:r>
@@ -25755,8 +26218,8 @@
                           <a:solidFill>
                             <a:srgbClr val="EF6C00"/>
                           </a:solidFill>
-                          <a:latin typeface="Tahoma"/>
-                          <a:cs typeface="Tahoma"/>
+                          <a:latin typeface="Vazirmatn"/>
+                          <a:cs typeface="Vazirmatn"/>
                         </a:rPr>
                         <a:t>۵</a:t>
                       </a:r>
@@ -25779,8 +26242,8 @@
                           <a:solidFill>
                             <a:srgbClr val="1F2A24"/>
                           </a:solidFill>
-                          <a:latin typeface="Tahoma"/>
-                          <a:cs typeface="Tahoma"/>
+                          <a:latin typeface="Vazirmatn"/>
+                          <a:cs typeface="Vazirmatn"/>
                         </a:rPr>
                         <a:t>Driver + Dispersion</a:t>
                       </a:r>
@@ -25803,8 +26266,8 @@
                           <a:solidFill>
                             <a:srgbClr val="1F2A24"/>
                           </a:solidFill>
-                          <a:latin typeface="Tahoma"/>
-                          <a:cs typeface="Tahoma"/>
+                          <a:latin typeface="Vazirmatn"/>
+                          <a:cs typeface="Vazirmatn"/>
                         </a:rPr>
                         <a:t>۱۱</a:t>
                       </a:r>
@@ -25827,8 +26290,8 @@
                           <a:solidFill>
                             <a:srgbClr val="1F2A24"/>
                           </a:solidFill>
-                          <a:latin typeface="Tahoma"/>
-                          <a:cs typeface="Tahoma"/>
+                          <a:latin typeface="Vazirmatn"/>
+                          <a:cs typeface="Vazirmatn"/>
                         </a:rPr>
                         <a:t>Course Management + Risk/Reward</a:t>
                       </a:r>
@@ -25853,8 +26316,8 @@
                           <a:solidFill>
                             <a:srgbClr val="EF6C00"/>
                           </a:solidFill>
-                          <a:latin typeface="Tahoma"/>
-                          <a:cs typeface="Tahoma"/>
+                          <a:latin typeface="Vazirmatn"/>
+                          <a:cs typeface="Vazirmatn"/>
                         </a:rPr>
                         <a:t>۶</a:t>
                       </a:r>
@@ -25877,8 +26340,8 @@
                           <a:solidFill>
                             <a:srgbClr val="1F2A24"/>
                           </a:solidFill>
-                          <a:latin typeface="Tahoma"/>
-                          <a:cs typeface="Tahoma"/>
+                          <a:latin typeface="Vazirmatn"/>
+                          <a:cs typeface="Vazirmatn"/>
                         </a:rPr>
                         <a:t>Approach + Target Selection</a:t>
                       </a:r>
@@ -25901,8 +26364,8 @@
                           <a:solidFill>
                             <a:srgbClr val="1F2A24"/>
                           </a:solidFill>
-                          <a:latin typeface="Tahoma"/>
-                          <a:cs typeface="Tahoma"/>
+                          <a:latin typeface="Vazirmatn"/>
+                          <a:cs typeface="Vazirmatn"/>
                         </a:rPr>
                         <a:t>۱۲</a:t>
                       </a:r>
@@ -25925,8 +26388,8 @@
                           <a:solidFill>
                             <a:srgbClr val="1F2A24"/>
                           </a:solidFill>
-                          <a:latin typeface="Tahoma"/>
-                          <a:cs typeface="Tahoma"/>
+                          <a:latin typeface="Vazirmatn"/>
+                          <a:cs typeface="Vazirmatn"/>
                         </a:rPr>
                         <a:t>راند ارزیابی + تحلیل</a:t>
                       </a:r>
@@ -25981,8 +26444,8 @@
                 <a:solidFill>
                   <a:srgbClr val="EF6C00"/>
                 </a:solidFill>
-                <a:latin typeface="Tahoma"/>
-                <a:cs typeface="Tahoma"/>
+                <a:latin typeface="Vazirmatn"/>
+                <a:cs typeface="Vazirmatn"/>
               </a:rPr>
               <a:t>●  </a:t>
             </a:r>
@@ -25991,8 +26454,8 @@
                 <a:solidFill>
                   <a:srgbClr val="5C6B62"/>
                 </a:solidFill>
-                <a:latin typeface="Tahoma"/>
-                <a:cs typeface="Tahoma"/>
+                <a:latin typeface="Vazirmatn"/>
+                <a:cs typeface="Vazirmatn"/>
               </a:rPr>
               <a:t>هر جلسه با ارزیابی قبل و بعد همراه است تا پیشرفت قابل اندازه‌گیری باشد.</a:t>
             </a:r>
@@ -26008,7 +26471,7 @@
         <p:spPr>
           <a:xfrm>
             <a:off x="502920" y="6400800"/>
-            <a:ext cx="5486400" cy="320040"/>
+            <a:ext cx="6858000" cy="320040"/>
           </a:xfrm>
           <a:prstGeom prst="rect">
             <a:avLst/>
@@ -26033,14 +26496,24 @@
               </a:spcAft>
             </a:pPr>
             <a:r>
+              <a:rPr sz="1100" b="1" i="0">
+                <a:solidFill>
+                  <a:srgbClr val="EF6C00"/>
+                </a:solidFill>
+                <a:latin typeface="Vazirmatn"/>
+                <a:cs typeface="Vazirmatn"/>
+              </a:rPr>
+              <a:t>⛳ Puttclub</a:t>
+            </a:r>
+            <a:r>
               <a:rPr sz="1000" b="0" i="0">
                 <a:solidFill>
                   <a:srgbClr val="5C6B62"/>
                 </a:solidFill>
-                <a:latin typeface="Tahoma"/>
-                <a:cs typeface="Tahoma"/>
-              </a:rPr>
-              <a:t>Golf Academy  ·  Semi-Advanced · Level 3</a:t>
+                <a:latin typeface="Vazirmatn"/>
+                <a:cs typeface="Vazirmatn"/>
+              </a:rPr>
+              <a:t>   ·   Semi-Advanced · Level 3</a:t>
             </a:r>
           </a:p>
         </p:txBody>
@@ -26083,8 +26556,8 @@
                 <a:solidFill>
                   <a:srgbClr val="EF6C00"/>
                 </a:solidFill>
-                <a:latin typeface="Tahoma"/>
-                <a:cs typeface="Tahoma"/>
+                <a:latin typeface="Vazirmatn"/>
+                <a:cs typeface="Vazirmatn"/>
               </a:rPr>
               <a:t>34</a:t>
             </a:r>
@@ -26235,8 +26708,8 @@
                 <a:solidFill>
                   <a:srgbClr val="EF6C00"/>
                 </a:solidFill>
-                <a:latin typeface="Tahoma"/>
-                <a:cs typeface="Tahoma"/>
+                <a:latin typeface="Vazirmatn"/>
+                <a:cs typeface="Vazirmatn"/>
               </a:rPr>
               <a:t>آزمون پایان دوره</a:t>
             </a:r>
@@ -26258,8 +26731,8 @@
                 <a:solidFill>
                   <a:srgbClr val="1F2A24"/>
                 </a:solidFill>
-                <a:latin typeface="Tahoma"/>
-                <a:cs typeface="Tahoma"/>
+                <a:latin typeface="Vazirmatn"/>
+                <a:cs typeface="Vazirmatn"/>
               </a:rPr>
               <a:t>آزمون پایان دوره نیمه‌پیشرفته</a:t>
             </a:r>
@@ -26482,8 +26955,8 @@
                 <a:solidFill>
                   <a:srgbClr val="FFFFFF"/>
                 </a:solidFill>
-                <a:latin typeface="Tahoma"/>
-                <a:cs typeface="Tahoma"/>
+                <a:latin typeface="Vazirmatn"/>
+                <a:cs typeface="Vazirmatn"/>
               </a:rPr>
               <a:t>تئوری</a:t>
             </a:r>
@@ -26528,8 +27001,8 @@
                 <a:solidFill>
                   <a:srgbClr val="EF6C00"/>
                 </a:solidFill>
-                <a:latin typeface="Tahoma"/>
-                <a:cs typeface="Tahoma"/>
+                <a:latin typeface="Vazirmatn"/>
+                <a:cs typeface="Vazirmatn"/>
               </a:rPr>
               <a:t>☐  </a:t>
             </a:r>
@@ -26538,8 +27011,8 @@
                 <a:solidFill>
                   <a:srgbClr val="1F2A24"/>
                 </a:solidFill>
-                <a:latin typeface="Tahoma"/>
-                <a:cs typeface="Tahoma"/>
+                <a:latin typeface="Vazirmatn"/>
+                <a:cs typeface="Vazirmatn"/>
               </a:rPr>
               <a:t>چرا کلاب خاصی را انتخاب کرده؟</a:t>
             </a:r>
@@ -26561,8 +27034,8 @@
                 <a:solidFill>
                   <a:srgbClr val="EF6C00"/>
                 </a:solidFill>
-                <a:latin typeface="Tahoma"/>
-                <a:cs typeface="Tahoma"/>
+                <a:latin typeface="Vazirmatn"/>
+                <a:cs typeface="Vazirmatn"/>
               </a:rPr>
               <a:t>☐  </a:t>
             </a:r>
@@ -26571,8 +27044,8 @@
                 <a:solidFill>
                   <a:srgbClr val="1F2A24"/>
                 </a:solidFill>
-                <a:latin typeface="Tahoma"/>
-                <a:cs typeface="Tahoma"/>
+                <a:latin typeface="Vazirmatn"/>
+                <a:cs typeface="Vazirmatn"/>
               </a:rPr>
               <a:t>تفاوت Carry و Total</a:t>
             </a:r>
@@ -26594,8 +27067,8 @@
                 <a:solidFill>
                   <a:srgbClr val="EF6C00"/>
                 </a:solidFill>
-                <a:latin typeface="Tahoma"/>
-                <a:cs typeface="Tahoma"/>
+                <a:latin typeface="Vazirmatn"/>
+                <a:cs typeface="Vazirmatn"/>
               </a:rPr>
               <a:t>☐  </a:t>
             </a:r>
@@ -26604,8 +27077,8 @@
                 <a:solidFill>
                   <a:srgbClr val="1F2A24"/>
                 </a:solidFill>
-                <a:latin typeface="Tahoma"/>
-                <a:cs typeface="Tahoma"/>
+                <a:latin typeface="Vazirmatn"/>
+                <a:cs typeface="Vazirmatn"/>
               </a:rPr>
               <a:t>Risk و Reward چیست؟</a:t>
             </a:r>
@@ -26627,8 +27100,8 @@
                 <a:solidFill>
                   <a:srgbClr val="EF6C00"/>
                 </a:solidFill>
-                <a:latin typeface="Tahoma"/>
-                <a:cs typeface="Tahoma"/>
+                <a:latin typeface="Vazirmatn"/>
+                <a:cs typeface="Vazirmatn"/>
               </a:rPr>
               <a:t>☐  </a:t>
             </a:r>
@@ -26637,8 +27110,8 @@
                 <a:solidFill>
                   <a:srgbClr val="1F2A24"/>
                 </a:solidFill>
-                <a:latin typeface="Tahoma"/>
-                <a:cs typeface="Tahoma"/>
+                <a:latin typeface="Vazirmatn"/>
+                <a:cs typeface="Vazirmatn"/>
               </a:rPr>
               <a:t>باد را چگونه وارد تصمیم می‌کند؟</a:t>
             </a:r>
@@ -26660,8 +27133,8 @@
                 <a:solidFill>
                   <a:srgbClr val="EF6C00"/>
                 </a:solidFill>
-                <a:latin typeface="Tahoma"/>
-                <a:cs typeface="Tahoma"/>
+                <a:latin typeface="Vazirmatn"/>
+                <a:cs typeface="Vazirmatn"/>
               </a:rPr>
               <a:t>☐  </a:t>
             </a:r>
@@ -26670,8 +27143,8 @@
                 <a:solidFill>
                   <a:srgbClr val="1F2A24"/>
                 </a:solidFill>
-                <a:latin typeface="Tahoma"/>
-                <a:cs typeface="Tahoma"/>
+                <a:latin typeface="Vazirmatn"/>
+                <a:cs typeface="Vazirmatn"/>
               </a:rPr>
               <a:t>هدف‌گیری Green و خواندن Putt</a:t>
             </a:r>
@@ -26693,8 +27166,8 @@
                 <a:solidFill>
                   <a:srgbClr val="EF6C00"/>
                 </a:solidFill>
-                <a:latin typeface="Tahoma"/>
-                <a:cs typeface="Tahoma"/>
+                <a:latin typeface="Vazirmatn"/>
+                <a:cs typeface="Vazirmatn"/>
               </a:rPr>
               <a:t>☐  </a:t>
             </a:r>
@@ -26703,8 +27176,8 @@
                 <a:solidFill>
                   <a:srgbClr val="1F2A24"/>
                 </a:solidFill>
-                <a:latin typeface="Tahoma"/>
-                <a:cs typeface="Tahoma"/>
+                <a:latin typeface="Vazirmatn"/>
+                <a:cs typeface="Vazirmatn"/>
               </a:rPr>
               <a:t>تحلیل عملکرد خود</a:t>
             </a:r>
@@ -26883,8 +27356,8 @@
                 <a:solidFill>
                   <a:srgbClr val="FFFFFF"/>
                 </a:solidFill>
-                <a:latin typeface="Tahoma"/>
-                <a:cs typeface="Tahoma"/>
+                <a:latin typeface="Vazirmatn"/>
+                <a:cs typeface="Vazirmatn"/>
               </a:rPr>
               <a:t>عملی</a:t>
             </a:r>
@@ -26929,8 +27402,8 @@
                 <a:solidFill>
                   <a:srgbClr val="EF6C00"/>
                 </a:solidFill>
-                <a:latin typeface="Tahoma"/>
-                <a:cs typeface="Tahoma"/>
+                <a:latin typeface="Vazirmatn"/>
+                <a:cs typeface="Vazirmatn"/>
               </a:rPr>
               <a:t>☐  </a:t>
             </a:r>
@@ -26939,8 +27412,8 @@
                 <a:solidFill>
                   <a:srgbClr val="1F2A24"/>
                 </a:solidFill>
-                <a:latin typeface="Tahoma"/>
-                <a:cs typeface="Tahoma"/>
+                <a:latin typeface="Vazirmatn"/>
+                <a:cs typeface="Vazirmatn"/>
               </a:rPr>
               <a:t>Iron با Contact و فاصله کنترل‌شده</a:t>
             </a:r>
@@ -26962,8 +27435,8 @@
                 <a:solidFill>
                   <a:srgbClr val="EF6C00"/>
                 </a:solidFill>
-                <a:latin typeface="Tahoma"/>
-                <a:cs typeface="Tahoma"/>
+                <a:latin typeface="Vazirmatn"/>
+                <a:cs typeface="Vazirmatn"/>
               </a:rPr>
               <a:t>☐  </a:t>
             </a:r>
@@ -26972,8 +27445,8 @@
                 <a:solidFill>
                   <a:srgbClr val="1F2A24"/>
                 </a:solidFill>
-                <a:latin typeface="Tahoma"/>
-                <a:cs typeface="Tahoma"/>
+                <a:latin typeface="Vazirmatn"/>
+                <a:cs typeface="Vazirmatn"/>
               </a:rPr>
               <a:t>Driver با پراکندگی قابل قبول</a:t>
             </a:r>
@@ -26995,8 +27468,8 @@
                 <a:solidFill>
                   <a:srgbClr val="EF6C00"/>
                 </a:solidFill>
-                <a:latin typeface="Tahoma"/>
-                <a:cs typeface="Tahoma"/>
+                <a:latin typeface="Vazirmatn"/>
+                <a:cs typeface="Vazirmatn"/>
               </a:rPr>
               <a:t>☐  </a:t>
             </a:r>
@@ -27005,8 +27478,8 @@
                 <a:solidFill>
                   <a:srgbClr val="1F2A24"/>
                 </a:solidFill>
-                <a:latin typeface="Tahoma"/>
-                <a:cs typeface="Tahoma"/>
+                <a:latin typeface="Vazirmatn"/>
+                <a:cs typeface="Vazirmatn"/>
               </a:rPr>
               <a:t>Pitch در چند فاصله</a:t>
             </a:r>
@@ -27028,8 +27501,8 @@
                 <a:solidFill>
                   <a:srgbClr val="EF6C00"/>
                 </a:solidFill>
-                <a:latin typeface="Tahoma"/>
-                <a:cs typeface="Tahoma"/>
+                <a:latin typeface="Vazirmatn"/>
+                <a:cs typeface="Vazirmatn"/>
               </a:rPr>
               <a:t>☐  </a:t>
             </a:r>
@@ -27038,8 +27511,8 @@
                 <a:solidFill>
                   <a:srgbClr val="1F2A24"/>
                 </a:solidFill>
-                <a:latin typeface="Tahoma"/>
-                <a:cs typeface="Tahoma"/>
+                <a:latin typeface="Vazirmatn"/>
+                <a:cs typeface="Vazirmatn"/>
               </a:rPr>
               <a:t>Chip با کلاب‌های مختلف</a:t>
             </a:r>
@@ -27061,8 +27534,8 @@
                 <a:solidFill>
                   <a:srgbClr val="EF6C00"/>
                 </a:solidFill>
-                <a:latin typeface="Tahoma"/>
-                <a:cs typeface="Tahoma"/>
+                <a:latin typeface="Vazirmatn"/>
+                <a:cs typeface="Vazirmatn"/>
               </a:rPr>
               <a:t>☐  </a:t>
             </a:r>
@@ -27071,8 +27544,8 @@
                 <a:solidFill>
                   <a:srgbClr val="1F2A24"/>
                 </a:solidFill>
-                <a:latin typeface="Tahoma"/>
-                <a:cs typeface="Tahoma"/>
+                <a:latin typeface="Vazirmatn"/>
+                <a:cs typeface="Vazirmatn"/>
               </a:rPr>
               <a:t>Bunker Shot پایه</a:t>
             </a:r>
@@ -27094,8 +27567,8 @@
                 <a:solidFill>
                   <a:srgbClr val="EF6C00"/>
                 </a:solidFill>
-                <a:latin typeface="Tahoma"/>
-                <a:cs typeface="Tahoma"/>
+                <a:latin typeface="Vazirmatn"/>
+                <a:cs typeface="Vazirmatn"/>
               </a:rPr>
               <a:t>☐  </a:t>
             </a:r>
@@ -27104,8 +27577,8 @@
                 <a:solidFill>
                   <a:srgbClr val="1F2A24"/>
                 </a:solidFill>
-                <a:latin typeface="Tahoma"/>
-                <a:cs typeface="Tahoma"/>
+                <a:latin typeface="Vazirmatn"/>
+                <a:cs typeface="Vazirmatn"/>
               </a:rPr>
               <a:t>Lag Putting و خواندن Green</a:t>
             </a:r>
@@ -27284,8 +27757,8 @@
                 <a:solidFill>
                   <a:srgbClr val="FFFFFF"/>
                 </a:solidFill>
-                <a:latin typeface="Tahoma"/>
-                <a:cs typeface="Tahoma"/>
+                <a:latin typeface="Vazirmatn"/>
+                <a:cs typeface="Vazirmatn"/>
               </a:rPr>
               <a:t>بازی</a:t>
             </a:r>
@@ -27330,8 +27803,8 @@
                 <a:solidFill>
                   <a:srgbClr val="EF6C00"/>
                 </a:solidFill>
-                <a:latin typeface="Tahoma"/>
-                <a:cs typeface="Tahoma"/>
+                <a:latin typeface="Vazirmatn"/>
+                <a:cs typeface="Vazirmatn"/>
               </a:rPr>
               <a:t>☐  </a:t>
             </a:r>
@@ -27340,8 +27813,8 @@
                 <a:solidFill>
                   <a:srgbClr val="1F2A24"/>
                 </a:solidFill>
-                <a:latin typeface="Tahoma"/>
-                <a:cs typeface="Tahoma"/>
+                <a:latin typeface="Vazirmatn"/>
+                <a:cs typeface="Vazirmatn"/>
               </a:rPr>
               <a:t>قبل از ضربه Target تعیین کند</a:t>
             </a:r>
@@ -27363,8 +27836,8 @@
                 <a:solidFill>
                   <a:srgbClr val="EF6C00"/>
                 </a:solidFill>
-                <a:latin typeface="Tahoma"/>
-                <a:cs typeface="Tahoma"/>
+                <a:latin typeface="Vazirmatn"/>
+                <a:cs typeface="Vazirmatn"/>
               </a:rPr>
               <a:t>☐  </a:t>
             </a:r>
@@ -27373,8 +27846,8 @@
                 <a:solidFill>
                   <a:srgbClr val="1F2A24"/>
                 </a:solidFill>
-                <a:latin typeface="Tahoma"/>
-                <a:cs typeface="Tahoma"/>
+                <a:latin typeface="Vazirmatn"/>
+                <a:cs typeface="Vazirmatn"/>
               </a:rPr>
               <a:t>خطرات را شناسایی کند</a:t>
             </a:r>
@@ -27396,8 +27869,8 @@
                 <a:solidFill>
                   <a:srgbClr val="EF6C00"/>
                 </a:solidFill>
-                <a:latin typeface="Tahoma"/>
-                <a:cs typeface="Tahoma"/>
+                <a:latin typeface="Vazirmatn"/>
+                <a:cs typeface="Vazirmatn"/>
               </a:rPr>
               <a:t>☐  </a:t>
             </a:r>
@@ -27406,8 +27879,8 @@
                 <a:solidFill>
                   <a:srgbClr val="1F2A24"/>
                 </a:solidFill>
-                <a:latin typeface="Tahoma"/>
-                <a:cs typeface="Tahoma"/>
+                <a:latin typeface="Vazirmatn"/>
+                <a:cs typeface="Vazirmatn"/>
               </a:rPr>
               <a:t>ریسک را ارزیابی کند</a:t>
             </a:r>
@@ -27429,8 +27902,8 @@
                 <a:solidFill>
                   <a:srgbClr val="EF6C00"/>
                 </a:solidFill>
-                <a:latin typeface="Tahoma"/>
-                <a:cs typeface="Tahoma"/>
+                <a:latin typeface="Vazirmatn"/>
+                <a:cs typeface="Vazirmatn"/>
               </a:rPr>
               <a:t>☐  </a:t>
             </a:r>
@@ -27439,8 +27912,8 @@
                 <a:solidFill>
                   <a:srgbClr val="1F2A24"/>
                 </a:solidFill>
-                <a:latin typeface="Tahoma"/>
-                <a:cs typeface="Tahoma"/>
+                <a:latin typeface="Vazirmatn"/>
+                <a:cs typeface="Vazirmatn"/>
               </a:rPr>
               <a:t>Pre-Shot Routine داشته باشد</a:t>
             </a:r>
@@ -27462,8 +27935,8 @@
                 <a:solidFill>
                   <a:srgbClr val="EF6C00"/>
                 </a:solidFill>
-                <a:latin typeface="Tahoma"/>
-                <a:cs typeface="Tahoma"/>
+                <a:latin typeface="Vazirmatn"/>
+                <a:cs typeface="Vazirmatn"/>
               </a:rPr>
               <a:t>☐  </a:t>
             </a:r>
@@ -27472,8 +27945,8 @@
                 <a:solidFill>
                   <a:srgbClr val="1F2A24"/>
                 </a:solidFill>
-                <a:latin typeface="Tahoma"/>
-                <a:cs typeface="Tahoma"/>
+                <a:latin typeface="Vazirmatn"/>
+                <a:cs typeface="Vazirmatn"/>
               </a:rPr>
               <a:t>Scorecard کامل و تحلیل بعد از راند</a:t>
             </a:r>
@@ -27518,8 +27991,8 @@
                 <a:solidFill>
                   <a:srgbClr val="EF6C00"/>
                 </a:solidFill>
-                <a:latin typeface="Tahoma"/>
-                <a:cs typeface="Tahoma"/>
+                <a:latin typeface="Vazirmatn"/>
+                <a:cs typeface="Vazirmatn"/>
               </a:rPr>
               <a:t>تسلط بر این موارد یعنی گذار از اجرای تکنیک به بازی کردن واقعی گلف.</a:t>
             </a:r>
@@ -27535,7 +28008,7 @@
         <p:spPr>
           <a:xfrm>
             <a:off x="502920" y="6400800"/>
-            <a:ext cx="5486400" cy="320040"/>
+            <a:ext cx="6858000" cy="320040"/>
           </a:xfrm>
           <a:prstGeom prst="rect">
             <a:avLst/>
@@ -27560,14 +28033,24 @@
               </a:spcAft>
             </a:pPr>
             <a:r>
+              <a:rPr sz="1100" b="1" i="0">
+                <a:solidFill>
+                  <a:srgbClr val="EF6C00"/>
+                </a:solidFill>
+                <a:latin typeface="Vazirmatn"/>
+                <a:cs typeface="Vazirmatn"/>
+              </a:rPr>
+              <a:t>⛳ Puttclub</a:t>
+            </a:r>
+            <a:r>
               <a:rPr sz="1000" b="0" i="0">
                 <a:solidFill>
                   <a:srgbClr val="5C6B62"/>
                 </a:solidFill>
-                <a:latin typeface="Tahoma"/>
-                <a:cs typeface="Tahoma"/>
-              </a:rPr>
-              <a:t>Golf Academy  ·  Semi-Advanced · Level 3</a:t>
+                <a:latin typeface="Vazirmatn"/>
+                <a:cs typeface="Vazirmatn"/>
+              </a:rPr>
+              <a:t>   ·   Semi-Advanced · Level 3</a:t>
             </a:r>
           </a:p>
         </p:txBody>
@@ -27610,8 +28093,8 @@
                 <a:solidFill>
                   <a:srgbClr val="EF6C00"/>
                 </a:solidFill>
-                <a:latin typeface="Tahoma"/>
-                <a:cs typeface="Tahoma"/>
+                <a:latin typeface="Vazirmatn"/>
+                <a:cs typeface="Vazirmatn"/>
               </a:rPr>
               <a:t>35</a:t>
             </a:r>
@@ -27806,8 +28289,8 @@
                 <a:solidFill>
                   <a:srgbClr val="FFB74D"/>
                 </a:solidFill>
-                <a:latin typeface="Tahoma"/>
-                <a:cs typeface="Tahoma"/>
+                <a:latin typeface="Vazirmatn"/>
+                <a:cs typeface="Vazirmatn"/>
               </a:rPr>
               <a:t>معیار ورود به دوره پیشرفته  |  استقلال کامل در تصمیم‌گیری</a:t>
             </a:r>
@@ -27852,8 +28335,8 @@
                 <a:solidFill>
                   <a:srgbClr val="FFFFFF"/>
                 </a:solidFill>
-                <a:latin typeface="Tahoma"/>
-                <a:cs typeface="Tahoma"/>
+                <a:latin typeface="Vazirmatn"/>
+                <a:cs typeface="Vazirmatn"/>
               </a:rPr>
               <a:t>« کنار توپ بایستم و خودم بگویم: توپ اینجاست، فاصله این است، باد این جهت است، خطر آن سمت است، این کلاب مناسب‌تر است و اگر خطا کردم ترجیح می‌دهم توپ اینجا باشد. »</a:t>
             </a:r>
@@ -27875,8 +28358,8 @@
                 <a:solidFill>
                   <a:srgbClr val="C9D6C8"/>
                 </a:solidFill>
-                <a:latin typeface="Tahoma"/>
-                <a:cs typeface="Tahoma"/>
+                <a:latin typeface="Vazirmatn"/>
+                <a:cs typeface="Vazirmatn"/>
               </a:rPr>
               <a:t>این نقطه، آغاز ورود بازیکن از اجرای تکنیک به مرحله بازی کردن واقعی گلف است.</a:t>
             </a:r>
@@ -27892,7 +28375,7 @@
         <p:spPr>
           <a:xfrm>
             <a:off x="502920" y="6400800"/>
-            <a:ext cx="5486400" cy="320040"/>
+            <a:ext cx="6858000" cy="320040"/>
           </a:xfrm>
           <a:prstGeom prst="rect">
             <a:avLst/>
@@ -27917,14 +28400,24 @@
               </a:spcAft>
             </a:pPr>
             <a:r>
+              <a:rPr sz="1100" b="1" i="0">
+                <a:solidFill>
+                  <a:srgbClr val="FFB74D"/>
+                </a:solidFill>
+                <a:latin typeface="Vazirmatn"/>
+                <a:cs typeface="Vazirmatn"/>
+              </a:rPr>
+              <a:t>⛳ Puttclub</a:t>
+            </a:r>
+            <a:r>
               <a:rPr sz="1000" b="0" i="0">
                 <a:solidFill>
                   <a:srgbClr val="FFFFFF"/>
                 </a:solidFill>
-                <a:latin typeface="Tahoma"/>
-                <a:cs typeface="Tahoma"/>
-              </a:rPr>
-              <a:t>Golf Academy  ·  Semi-Advanced · Level 3</a:t>
+                <a:latin typeface="Vazirmatn"/>
+                <a:cs typeface="Vazirmatn"/>
+              </a:rPr>
+              <a:t>   ·   Semi-Advanced · Level 3</a:t>
             </a:r>
           </a:p>
         </p:txBody>
@@ -27967,8 +28460,8 @@
                 <a:solidFill>
                   <a:srgbClr val="FFB74D"/>
                 </a:solidFill>
-                <a:latin typeface="Tahoma"/>
-                <a:cs typeface="Tahoma"/>
+                <a:latin typeface="Vazirmatn"/>
+                <a:cs typeface="Vazirmatn"/>
               </a:rPr>
               <a:t>36</a:t>
             </a:r>
@@ -28145,8 +28638,8 @@
                 <a:solidFill>
                   <a:srgbClr val="FFFFFF"/>
                 </a:solidFill>
-                <a:latin typeface="Tahoma"/>
-                <a:cs typeface="Tahoma"/>
+                <a:latin typeface="Vazirmatn"/>
+                <a:cs typeface="Vazirmatn"/>
               </a:rPr>
               <a:t>مسیر چهار سطح آموزشی</a:t>
             </a:r>
@@ -28281,8 +28774,8 @@
                 <a:solidFill>
                   <a:srgbClr val="FFFFFF"/>
                 </a:solidFill>
-                <a:latin typeface="Tahoma"/>
-                <a:cs typeface="Tahoma"/>
+                <a:latin typeface="Vazirmatn"/>
+                <a:cs typeface="Vazirmatn"/>
               </a:rPr>
               <a:t>مقدماتی</a:t>
             </a:r>
@@ -28327,8 +28820,8 @@
                 <a:solidFill>
                   <a:srgbClr val="1F2A24"/>
                 </a:solidFill>
-                <a:latin typeface="Tahoma"/>
-                <a:cs typeface="Tahoma"/>
+                <a:latin typeface="Vazirmatn"/>
+                <a:cs typeface="Vazirmatn"/>
               </a:rPr>
               <a:t>شناخت و تکنیک پایه</a:t>
             </a:r>
@@ -28507,8 +29000,8 @@
                 <a:solidFill>
                   <a:srgbClr val="FFFFFF"/>
                 </a:solidFill>
-                <a:latin typeface="Tahoma"/>
-                <a:cs typeface="Tahoma"/>
+                <a:latin typeface="Vazirmatn"/>
+                <a:cs typeface="Vazirmatn"/>
               </a:rPr>
               <a:t>تکمیلی</a:t>
             </a:r>
@@ -28553,8 +29046,8 @@
                 <a:solidFill>
                   <a:srgbClr val="1F2A24"/>
                 </a:solidFill>
-                <a:latin typeface="Tahoma"/>
-                <a:cs typeface="Tahoma"/>
+                <a:latin typeface="Vazirmatn"/>
+                <a:cs typeface="Vazirmatn"/>
               </a:rPr>
               <a:t>تثبیت و کنترل</a:t>
             </a:r>
@@ -28733,8 +29226,8 @@
                 <a:solidFill>
                   <a:srgbClr val="FFFFFF"/>
                 </a:solidFill>
-                <a:latin typeface="Tahoma"/>
-                <a:cs typeface="Tahoma"/>
+                <a:latin typeface="Vazirmatn"/>
+                <a:cs typeface="Vazirmatn"/>
               </a:rPr>
               <a:t>نیمه‌پیشرفته</a:t>
             </a:r>
@@ -28779,8 +29272,8 @@
                 <a:solidFill>
                   <a:srgbClr val="1F2A24"/>
                 </a:solidFill>
-                <a:latin typeface="Tahoma"/>
-                <a:cs typeface="Tahoma"/>
+                <a:latin typeface="Vazirmatn"/>
+                <a:cs typeface="Vazirmatn"/>
               </a:rPr>
               <a:t>استراتژی و مدیریت زمین</a:t>
             </a:r>
@@ -28959,8 +29452,8 @@
                 <a:solidFill>
                   <a:srgbClr val="FFFFFF"/>
                 </a:solidFill>
-                <a:latin typeface="Tahoma"/>
-                <a:cs typeface="Tahoma"/>
+                <a:latin typeface="Vazirmatn"/>
+                <a:cs typeface="Vazirmatn"/>
               </a:rPr>
               <a:t>پیشرفته</a:t>
             </a:r>
@@ -29005,8 +29498,8 @@
                 <a:solidFill>
                   <a:srgbClr val="1F2A24"/>
                 </a:solidFill>
-                <a:latin typeface="Tahoma"/>
-                <a:cs typeface="Tahoma"/>
+                <a:latin typeface="Vazirmatn"/>
+                <a:cs typeface="Vazirmatn"/>
               </a:rPr>
               <a:t>عملکرد رقابتی و تخصص</a:t>
             </a:r>
@@ -29021,8 +29514,8 @@
         </p:nvSpPr>
         <p:spPr>
           <a:xfrm>
-            <a:off x="1097280" y="4617720"/>
-            <a:ext cx="9997135" cy="1554480"/>
+            <a:off x="1097280" y="4434840"/>
+            <a:ext cx="9997135" cy="1234440"/>
           </a:xfrm>
           <a:prstGeom prst="rect">
             <a:avLst/>
@@ -29043,7 +29536,7 @@
                 <a:spcPts val="0"/>
               </a:spcBef>
               <a:spcAft>
-                <a:spcPts val="800"/>
+                <a:spcPts val="1000"/>
               </a:spcAft>
             </a:pPr>
             <a:r>
@@ -29051,10 +29544,33 @@
                 <a:solidFill>
                   <a:srgbClr val="EAF3E8"/>
                 </a:solidFill>
-                <a:latin typeface="Tahoma"/>
-                <a:cs typeface="Tahoma"/>
+                <a:latin typeface="Vazirmatn"/>
+                <a:cs typeface="Vazirmatn"/>
               </a:rPr>
               <a:t>گام نهایی: عملکرد رقابتی، مدیریت حرفه‌ای بازی و بازی در شرایط فشار.</a:t>
+            </a:r>
+          </a:p>
+          <a:p>
+            <a:pPr algn="ctr" rtl="1">
+              <a:lnSpc>
+                <a:spcPct val="108000"/>
+              </a:lnSpc>
+              <a:spcBef>
+                <a:spcPts val="0"/>
+              </a:spcBef>
+              <a:spcAft>
+                <a:spcPts val="0"/>
+              </a:spcAft>
+            </a:pPr>
+            <a:r>
+              <a:rPr sz="1400" b="1" i="0">
+                <a:solidFill>
+                  <a:srgbClr val="FFB74D"/>
+                </a:solidFill>
+                <a:latin typeface="Vazirmatn"/>
+                <a:cs typeface="Vazirmatn"/>
+              </a:rPr>
+              <a:t>⛳ Puttclub  —  آکادمی گلف پات‌کلاب   |   مدرس: الهام طالبی (مدرس درجه یک گلف ایران)</a:t>
             </a:r>
           </a:p>
         </p:txBody>
@@ -29068,7 +29584,7 @@
         <p:spPr>
           <a:xfrm>
             <a:off x="502920" y="6400800"/>
-            <a:ext cx="5486400" cy="320040"/>
+            <a:ext cx="6858000" cy="320040"/>
           </a:xfrm>
           <a:prstGeom prst="rect">
             <a:avLst/>
@@ -29093,14 +29609,24 @@
               </a:spcAft>
             </a:pPr>
             <a:r>
+              <a:rPr sz="1100" b="1" i="0">
+                <a:solidFill>
+                  <a:srgbClr val="FFB74D"/>
+                </a:solidFill>
+                <a:latin typeface="Vazirmatn"/>
+                <a:cs typeface="Vazirmatn"/>
+              </a:rPr>
+              <a:t>⛳ Puttclub</a:t>
+            </a:r>
+            <a:r>
               <a:rPr sz="1000" b="0" i="0">
                 <a:solidFill>
                   <a:srgbClr val="FFFFFF"/>
                 </a:solidFill>
-                <a:latin typeface="Tahoma"/>
-                <a:cs typeface="Tahoma"/>
-              </a:rPr>
-              <a:t>Golf Academy  ·  Semi-Advanced · Level 3</a:t>
+                <a:latin typeface="Vazirmatn"/>
+                <a:cs typeface="Vazirmatn"/>
+              </a:rPr>
+              <a:t>   ·   Semi-Advanced · Level 3</a:t>
             </a:r>
           </a:p>
         </p:txBody>
@@ -29143,8 +29669,8 @@
                 <a:solidFill>
                   <a:srgbClr val="FFB74D"/>
                 </a:solidFill>
-                <a:latin typeface="Tahoma"/>
-                <a:cs typeface="Tahoma"/>
+                <a:latin typeface="Vazirmatn"/>
+                <a:cs typeface="Vazirmatn"/>
               </a:rPr>
               <a:t>37</a:t>
             </a:r>
@@ -29295,8 +29821,8 @@
                 <a:solidFill>
                   <a:srgbClr val="EF6C00"/>
                 </a:solidFill>
-                <a:latin typeface="Tahoma"/>
-                <a:cs typeface="Tahoma"/>
+                <a:latin typeface="Vazirmatn"/>
+                <a:cs typeface="Vazirmatn"/>
               </a:rPr>
               <a:t>فصل ۳</a:t>
             </a:r>
@@ -29318,8 +29844,8 @@
                 <a:solidFill>
                   <a:srgbClr val="1F2A24"/>
                 </a:solidFill>
-                <a:latin typeface="Tahoma"/>
-                <a:cs typeface="Tahoma"/>
+                <a:latin typeface="Vazirmatn"/>
+                <a:cs typeface="Vazirmatn"/>
               </a:rPr>
               <a:t>شناخت الگوی توپ (Ball Flight)</a:t>
             </a:r>
@@ -29498,8 +30024,8 @@
                 <a:solidFill>
                   <a:srgbClr val="EF6C00"/>
                 </a:solidFill>
-                <a:latin typeface="Tahoma"/>
-                <a:cs typeface="Tahoma"/>
+                <a:latin typeface="Vazirmatn"/>
+                <a:cs typeface="Vazirmatn"/>
               </a:rPr>
               <a:t>Pull / Hook</a:t>
             </a:r>
@@ -29521,8 +30047,8 @@
                 <a:solidFill>
                   <a:srgbClr val="5C6B62"/>
                 </a:solidFill>
-                <a:latin typeface="Tahoma"/>
-                <a:cs typeface="Tahoma"/>
+                <a:latin typeface="Vazirmatn"/>
+                <a:cs typeface="Vazirmatn"/>
               </a:rPr>
               <a:t>شروع چپ + حرکت چپ (بسته به شدت و Spin)</a:t>
             </a:r>
@@ -29657,8 +30183,8 @@
                 <a:solidFill>
                   <a:srgbClr val="EF6C00"/>
                 </a:solidFill>
-                <a:latin typeface="Tahoma"/>
-                <a:cs typeface="Tahoma"/>
+                <a:latin typeface="Vazirmatn"/>
+                <a:cs typeface="Vazirmatn"/>
               </a:rPr>
               <a:t>Push / Slice</a:t>
             </a:r>
@@ -29680,8 +30206,8 @@
                 <a:solidFill>
                   <a:srgbClr val="5C6B62"/>
                 </a:solidFill>
-                <a:latin typeface="Tahoma"/>
-                <a:cs typeface="Tahoma"/>
+                <a:latin typeface="Vazirmatn"/>
+                <a:cs typeface="Vazirmatn"/>
               </a:rPr>
               <a:t>شروع راست + حرکت راست (بسته به شدت و Spin)</a:t>
             </a:r>
@@ -29816,8 +30342,8 @@
                 <a:solidFill>
                   <a:srgbClr val="EF6C00"/>
                 </a:solidFill>
-                <a:latin typeface="Tahoma"/>
-                <a:cs typeface="Tahoma"/>
+                <a:latin typeface="Vazirmatn"/>
+                <a:cs typeface="Vazirmatn"/>
               </a:rPr>
               <a:t>Straight</a:t>
             </a:r>
@@ -29839,8 +30365,8 @@
                 <a:solidFill>
                   <a:srgbClr val="5C6B62"/>
                 </a:solidFill>
-                <a:latin typeface="Tahoma"/>
-                <a:cs typeface="Tahoma"/>
+                <a:latin typeface="Vazirmatn"/>
+                <a:cs typeface="Vazirmatn"/>
               </a:rPr>
               <a:t>شروع مستقیم + حرکت کم</a:t>
             </a:r>
@@ -29931,8 +30457,8 @@
                 <a:solidFill>
                   <a:srgbClr val="FFFFFF"/>
                 </a:solidFill>
-                <a:latin typeface="Tahoma"/>
-                <a:cs typeface="Tahoma"/>
+                <a:latin typeface="Vazirmatn"/>
+                <a:cs typeface="Vazirmatn"/>
               </a:rPr>
               <a:t>هدف این نیست که همیشه توپ صاف باشد؛ هدف این است که بدانید توپ چرا آن‌طور حرکت کرده است.</a:t>
             </a:r>
@@ -29948,7 +30474,7 @@
         <p:spPr>
           <a:xfrm>
             <a:off x="502920" y="6400800"/>
-            <a:ext cx="5486400" cy="320040"/>
+            <a:ext cx="6858000" cy="320040"/>
           </a:xfrm>
           <a:prstGeom prst="rect">
             <a:avLst/>
@@ -29973,14 +30499,24 @@
               </a:spcAft>
             </a:pPr>
             <a:r>
+              <a:rPr sz="1100" b="1" i="0">
+                <a:solidFill>
+                  <a:srgbClr val="EF6C00"/>
+                </a:solidFill>
+                <a:latin typeface="Vazirmatn"/>
+                <a:cs typeface="Vazirmatn"/>
+              </a:rPr>
+              <a:t>⛳ Puttclub</a:t>
+            </a:r>
+            <a:r>
               <a:rPr sz="1000" b="0" i="0">
                 <a:solidFill>
                   <a:srgbClr val="5C6B62"/>
                 </a:solidFill>
-                <a:latin typeface="Tahoma"/>
-                <a:cs typeface="Tahoma"/>
-              </a:rPr>
-              <a:t>Golf Academy  ·  Semi-Advanced · Level 3</a:t>
+                <a:latin typeface="Vazirmatn"/>
+                <a:cs typeface="Vazirmatn"/>
+              </a:rPr>
+              <a:t>   ·   Semi-Advanced · Level 3</a:t>
             </a:r>
           </a:p>
         </p:txBody>
@@ -30023,8 +30559,8 @@
                 <a:solidFill>
                   <a:srgbClr val="EF6C00"/>
                 </a:solidFill>
-                <a:latin typeface="Tahoma"/>
-                <a:cs typeface="Tahoma"/>
+                <a:latin typeface="Vazirmatn"/>
+                <a:cs typeface="Vazirmatn"/>
               </a:rPr>
               <a:t>4</a:t>
             </a:r>
@@ -30175,8 +30711,8 @@
                 <a:solidFill>
                   <a:srgbClr val="EF6C00"/>
                 </a:solidFill>
-                <a:latin typeface="Tahoma"/>
-                <a:cs typeface="Tahoma"/>
+                <a:latin typeface="Vazirmatn"/>
+                <a:cs typeface="Vazirmatn"/>
               </a:rPr>
               <a:t>فصل ۴</a:t>
             </a:r>
@@ -30198,8 +30734,8 @@
                 <a:solidFill>
                   <a:srgbClr val="1F2A24"/>
                 </a:solidFill>
-                <a:latin typeface="Tahoma"/>
-                <a:cs typeface="Tahoma"/>
+                <a:latin typeface="Vazirmatn"/>
+                <a:cs typeface="Vazirmatn"/>
               </a:rPr>
               <a:t>کنترل Club Face</a:t>
             </a:r>
@@ -30288,8 +30824,8 @@
                 <a:solidFill>
                   <a:srgbClr val="EF6C00"/>
                 </a:solidFill>
-                <a:latin typeface="Tahoma"/>
-                <a:cs typeface="Tahoma"/>
+                <a:latin typeface="Vazirmatn"/>
+                <a:cs typeface="Vazirmatn"/>
               </a:rPr>
               <a:t>●  </a:t>
             </a:r>
@@ -30298,8 +30834,8 @@
                 <a:solidFill>
                   <a:srgbClr val="1F2A24"/>
                 </a:solidFill>
-                <a:latin typeface="Tahoma"/>
-                <a:cs typeface="Tahoma"/>
+                <a:latin typeface="Vazirmatn"/>
+                <a:cs typeface="Vazirmatn"/>
               </a:rPr>
               <a:t>یکی از عوامل اصلی جهت اولیه توپ، Club Face است</a:t>
             </a:r>
@@ -30321,8 +30857,8 @@
                 <a:solidFill>
                   <a:srgbClr val="EF6C00"/>
                 </a:solidFill>
-                <a:latin typeface="Tahoma"/>
-                <a:cs typeface="Tahoma"/>
+                <a:latin typeface="Vazirmatn"/>
+                <a:cs typeface="Vazirmatn"/>
               </a:rPr>
               <a:t>●  </a:t>
             </a:r>
@@ -30331,8 +30867,8 @@
                 <a:solidFill>
                   <a:srgbClr val="EF6C00"/>
                 </a:solidFill>
-                <a:latin typeface="Tahoma"/>
-                <a:cs typeface="Tahoma"/>
+                <a:latin typeface="Vazirmatn"/>
+                <a:cs typeface="Vazirmatn"/>
               </a:rPr>
               <a:t>تمرین</a:t>
             </a:r>
@@ -30341,8 +30877,8 @@
                 <a:solidFill>
                   <a:srgbClr val="1F2A24"/>
                 </a:solidFill>
-                <a:latin typeface="Tahoma"/>
-                <a:cs typeface="Tahoma"/>
+                <a:latin typeface="Vazirmatn"/>
+                <a:cs typeface="Vazirmatn"/>
               </a:rPr>
               <a:t>  —  ابتدا بدون Swing کامل، ضربات کوتاه و کوچک بزنید</a:t>
             </a:r>
@@ -30364,8 +30900,8 @@
                 <a:solidFill>
                   <a:srgbClr val="EF6C00"/>
                 </a:solidFill>
-                <a:latin typeface="Tahoma"/>
-                <a:cs typeface="Tahoma"/>
+                <a:latin typeface="Vazirmatn"/>
+                <a:cs typeface="Vazirmatn"/>
               </a:rPr>
               <a:t>●  </a:t>
             </a:r>
@@ -30374,8 +30910,8 @@
                 <a:solidFill>
                   <a:srgbClr val="1F2A24"/>
                 </a:solidFill>
-                <a:latin typeface="Tahoma"/>
-                <a:cs typeface="Tahoma"/>
+                <a:latin typeface="Vazirmatn"/>
+                <a:cs typeface="Vazirmatn"/>
               </a:rPr>
               <a:t>فقط روی تماس و جهت Face تمرکز کنید</a:t>
             </a:r>
@@ -30397,8 +30933,8 @@
                 <a:solidFill>
                   <a:srgbClr val="EF6C00"/>
                 </a:solidFill>
-                <a:latin typeface="Tahoma"/>
-                <a:cs typeface="Tahoma"/>
+                <a:latin typeface="Vazirmatn"/>
+                <a:cs typeface="Vazirmatn"/>
               </a:rPr>
               <a:t>●  </a:t>
             </a:r>
@@ -30407,8 +30943,8 @@
                 <a:solidFill>
                   <a:srgbClr val="EF6C00"/>
                 </a:solidFill>
-                <a:latin typeface="Tahoma"/>
-                <a:cs typeface="Tahoma"/>
+                <a:latin typeface="Vazirmatn"/>
+                <a:cs typeface="Vazirmatn"/>
               </a:rPr>
               <a:t>سپس پیش بروید</a:t>
             </a:r>
@@ -30417,8 +30953,8 @@
                 <a:solidFill>
                   <a:srgbClr val="1F2A24"/>
                 </a:solidFill>
-                <a:latin typeface="Tahoma"/>
-                <a:cs typeface="Tahoma"/>
+                <a:latin typeface="Vazirmatn"/>
+                <a:cs typeface="Vazirmatn"/>
               </a:rPr>
               <a:t>  —  Half Swing ← Three-Quarter ← Full Swing</a:t>
             </a:r>
@@ -30440,8 +30976,8 @@
                 <a:solidFill>
                   <a:srgbClr val="EF6C00"/>
                 </a:solidFill>
-                <a:latin typeface="Tahoma"/>
-                <a:cs typeface="Tahoma"/>
+                <a:latin typeface="Vazirmatn"/>
+                <a:cs typeface="Vazirmatn"/>
               </a:rPr>
               <a:t>●  </a:t>
             </a:r>
@@ -30450,8 +30986,8 @@
                 <a:solidFill>
                   <a:srgbClr val="EF6C00"/>
                 </a:solidFill>
-                <a:latin typeface="Tahoma"/>
-                <a:cs typeface="Tahoma"/>
+                <a:latin typeface="Vazirmatn"/>
+                <a:cs typeface="Vazirmatn"/>
               </a:rPr>
               <a:t>قانون</a:t>
             </a:r>
@@ -30460,8 +30996,8 @@
                 <a:solidFill>
                   <a:srgbClr val="1F2A24"/>
                 </a:solidFill>
-                <a:latin typeface="Tahoma"/>
-                <a:cs typeface="Tahoma"/>
+                <a:latin typeface="Vazirmatn"/>
+                <a:cs typeface="Vazirmatn"/>
               </a:rPr>
               <a:t>  —  اول Contact و Face Control، سپس Speed</a:t>
             </a:r>
@@ -30596,8 +31132,8 @@
                 <a:solidFill>
                   <a:srgbClr val="EF6C00"/>
                 </a:solidFill>
-                <a:latin typeface="Tahoma"/>
-                <a:cs typeface="Tahoma"/>
+                <a:latin typeface="Vazirmatn"/>
+                <a:cs typeface="Vazirmatn"/>
               </a:rPr>
               <a:t>💡 </a:t>
             </a:r>
@@ -30606,8 +31142,8 @@
                 <a:solidFill>
                   <a:srgbClr val="1F2A24"/>
                 </a:solidFill>
-                <a:latin typeface="Tahoma"/>
-                <a:cs typeface="Tahoma"/>
+                <a:latin typeface="Vazirmatn"/>
+                <a:cs typeface="Vazirmatn"/>
               </a:rPr>
               <a:t>جهت شروع توپ بیش از هر چیز به جهت Face در لحظه Impact بستگی دارد.</a:t>
             </a:r>
@@ -30623,7 +31159,7 @@
         <p:spPr>
           <a:xfrm>
             <a:off x="502920" y="6400800"/>
-            <a:ext cx="5486400" cy="320040"/>
+            <a:ext cx="6858000" cy="320040"/>
           </a:xfrm>
           <a:prstGeom prst="rect">
             <a:avLst/>
@@ -30648,14 +31184,24 @@
               </a:spcAft>
             </a:pPr>
             <a:r>
+              <a:rPr sz="1100" b="1" i="0">
+                <a:solidFill>
+                  <a:srgbClr val="EF6C00"/>
+                </a:solidFill>
+                <a:latin typeface="Vazirmatn"/>
+                <a:cs typeface="Vazirmatn"/>
+              </a:rPr>
+              <a:t>⛳ Puttclub</a:t>
+            </a:r>
+            <a:r>
               <a:rPr sz="1000" b="0" i="0">
                 <a:solidFill>
                   <a:srgbClr val="5C6B62"/>
                 </a:solidFill>
-                <a:latin typeface="Tahoma"/>
-                <a:cs typeface="Tahoma"/>
-              </a:rPr>
-              <a:t>Golf Academy  ·  Semi-Advanced · Level 3</a:t>
+                <a:latin typeface="Vazirmatn"/>
+                <a:cs typeface="Vazirmatn"/>
+              </a:rPr>
+              <a:t>   ·   Semi-Advanced · Level 3</a:t>
             </a:r>
           </a:p>
         </p:txBody>
@@ -30698,8 +31244,8 @@
                 <a:solidFill>
                   <a:srgbClr val="EF6C00"/>
                 </a:solidFill>
-                <a:latin typeface="Tahoma"/>
-                <a:cs typeface="Tahoma"/>
+                <a:latin typeface="Vazirmatn"/>
+                <a:cs typeface="Vazirmatn"/>
               </a:rPr>
               <a:t>5</a:t>
             </a:r>
@@ -30850,8 +31396,8 @@
                 <a:solidFill>
                   <a:srgbClr val="EF6C00"/>
                 </a:solidFill>
-                <a:latin typeface="Tahoma"/>
-                <a:cs typeface="Tahoma"/>
+                <a:latin typeface="Vazirmatn"/>
+                <a:cs typeface="Vazirmatn"/>
               </a:rPr>
               <a:t>فصل ۵</a:t>
             </a:r>
@@ -30873,8 +31419,8 @@
                 <a:solidFill>
                   <a:srgbClr val="1F2A24"/>
                 </a:solidFill>
-                <a:latin typeface="Tahoma"/>
-                <a:cs typeface="Tahoma"/>
+                <a:latin typeface="Vazirmatn"/>
+                <a:cs typeface="Vazirmatn"/>
               </a:rPr>
               <a:t>کنترل Path</a:t>
             </a:r>
@@ -30963,8 +31509,8 @@
                 <a:solidFill>
                   <a:srgbClr val="EF6C00"/>
                 </a:solidFill>
-                <a:latin typeface="Tahoma"/>
-                <a:cs typeface="Tahoma"/>
+                <a:latin typeface="Vazirmatn"/>
+                <a:cs typeface="Vazirmatn"/>
               </a:rPr>
               <a:t>●  </a:t>
             </a:r>
@@ -30973,8 +31519,8 @@
                 <a:solidFill>
                   <a:srgbClr val="1F2A24"/>
                 </a:solidFill>
-                <a:latin typeface="Tahoma"/>
-                <a:cs typeface="Tahoma"/>
+                <a:latin typeface="Vazirmatn"/>
+                <a:cs typeface="Vazirmatn"/>
               </a:rPr>
               <a:t>پس از کنترل Face، مفهوم مسیر حرکت کلاب را درک کنید</a:t>
             </a:r>
@@ -30996,8 +31542,8 @@
                 <a:solidFill>
                   <a:srgbClr val="EF6C00"/>
                 </a:solidFill>
-                <a:latin typeface="Tahoma"/>
-                <a:cs typeface="Tahoma"/>
+                <a:latin typeface="Vazirmatn"/>
+                <a:cs typeface="Vazirmatn"/>
               </a:rPr>
               <a:t>●  </a:t>
             </a:r>
@@ -31006,8 +31552,8 @@
                 <a:solidFill>
                   <a:srgbClr val="EF6C00"/>
                 </a:solidFill>
-                <a:latin typeface="Tahoma"/>
-                <a:cs typeface="Tahoma"/>
+                <a:latin typeface="Vazirmatn"/>
+                <a:cs typeface="Vazirmatn"/>
               </a:rPr>
               <a:t>دو عامل کلیدی شکل حرکت توپ</a:t>
             </a:r>
@@ -31016,8 +31562,8 @@
                 <a:solidFill>
                   <a:srgbClr val="1F2A24"/>
                 </a:solidFill>
-                <a:latin typeface="Tahoma"/>
-                <a:cs typeface="Tahoma"/>
+                <a:latin typeface="Vazirmatn"/>
+                <a:cs typeface="Vazirmatn"/>
               </a:rPr>
               <a:t>  —  Club Path + Club Face</a:t>
             </a:r>
@@ -31039,8 +31585,8 @@
                 <a:solidFill>
                   <a:srgbClr val="EF6C00"/>
                 </a:solidFill>
-                <a:latin typeface="Tahoma"/>
-                <a:cs typeface="Tahoma"/>
+                <a:latin typeface="Vazirmatn"/>
+                <a:cs typeface="Vazirmatn"/>
               </a:rPr>
               <a:t>●  </a:t>
             </a:r>
@@ -31049,8 +31595,8 @@
                 <a:solidFill>
                   <a:srgbClr val="EF6C00"/>
                 </a:solidFill>
-                <a:latin typeface="Tahoma"/>
-                <a:cs typeface="Tahoma"/>
+                <a:latin typeface="Vazirmatn"/>
+                <a:cs typeface="Vazirmatn"/>
               </a:rPr>
               <a:t>در تمرین تفاوت این سه را مشاهده و ثبت کنید</a:t>
             </a:r>
@@ -31072,8 +31618,8 @@
                 <a:solidFill>
                   <a:srgbClr val="EF6C00"/>
                 </a:solidFill>
-                <a:latin typeface="Tahoma"/>
-                <a:cs typeface="Tahoma"/>
+                <a:latin typeface="Vazirmatn"/>
+                <a:cs typeface="Vazirmatn"/>
               </a:rPr>
               <a:t>–  </a:t>
             </a:r>
@@ -31082,8 +31628,8 @@
                 <a:solidFill>
                   <a:srgbClr val="1F2A24"/>
                 </a:solidFill>
-                <a:latin typeface="Tahoma"/>
-                <a:cs typeface="Tahoma"/>
+                <a:latin typeface="Vazirmatn"/>
+                <a:cs typeface="Vazirmatn"/>
               </a:rPr>
               <a:t>شروع توپ (Start Direction)</a:t>
             </a:r>
@@ -31105,8 +31651,8 @@
                 <a:solidFill>
                   <a:srgbClr val="EF6C00"/>
                 </a:solidFill>
-                <a:latin typeface="Tahoma"/>
-                <a:cs typeface="Tahoma"/>
+                <a:latin typeface="Vazirmatn"/>
+                <a:cs typeface="Vazirmatn"/>
               </a:rPr>
               <a:t>–  </a:t>
             </a:r>
@@ -31115,8 +31661,8 @@
                 <a:solidFill>
                   <a:srgbClr val="1F2A24"/>
                 </a:solidFill>
-                <a:latin typeface="Tahoma"/>
-                <a:cs typeface="Tahoma"/>
+                <a:latin typeface="Vazirmatn"/>
+                <a:cs typeface="Vazirmatn"/>
               </a:rPr>
               <a:t>انحراف توپ (Curve)</a:t>
             </a:r>
@@ -31138,8 +31684,8 @@
                 <a:solidFill>
                   <a:srgbClr val="EF6C00"/>
                 </a:solidFill>
-                <a:latin typeface="Tahoma"/>
-                <a:cs typeface="Tahoma"/>
+                <a:latin typeface="Vazirmatn"/>
+                <a:cs typeface="Vazirmatn"/>
               </a:rPr>
               <a:t>–  </a:t>
             </a:r>
@@ -31148,8 +31694,8 @@
                 <a:solidFill>
                   <a:srgbClr val="1F2A24"/>
                 </a:solidFill>
-                <a:latin typeface="Tahoma"/>
-                <a:cs typeface="Tahoma"/>
+                <a:latin typeface="Vazirmatn"/>
+                <a:cs typeface="Vazirmatn"/>
               </a:rPr>
               <a:t>شدت انحراف</a:t>
             </a:r>
@@ -31171,8 +31717,8 @@
                 <a:solidFill>
                   <a:srgbClr val="EF6C00"/>
                 </a:solidFill>
-                <a:latin typeface="Tahoma"/>
-                <a:cs typeface="Tahoma"/>
+                <a:latin typeface="Vazirmatn"/>
+                <a:cs typeface="Vazirmatn"/>
               </a:rPr>
               <a:t>●  </a:t>
             </a:r>
@@ -31181,8 +31727,8 @@
                 <a:solidFill>
                   <a:srgbClr val="1F2A24"/>
                 </a:solidFill>
-                <a:latin typeface="Tahoma"/>
-                <a:cs typeface="Tahoma"/>
+                <a:latin typeface="Vazirmatn"/>
+                <a:cs typeface="Vazirmatn"/>
               </a:rPr>
               <a:t>با ثبت الگو، علت خطا قابل تشخیص می‌شود</a:t>
             </a:r>
@@ -31317,8 +31863,8 @@
                 <a:solidFill>
                   <a:srgbClr val="EF6C00"/>
                 </a:solidFill>
-                <a:latin typeface="Tahoma"/>
-                <a:cs typeface="Tahoma"/>
+                <a:latin typeface="Vazirmatn"/>
+                <a:cs typeface="Vazirmatn"/>
               </a:rPr>
               <a:t>💡 </a:t>
             </a:r>
@@ -31327,8 +31873,8 @@
                 <a:solidFill>
                   <a:srgbClr val="1F2A24"/>
                 </a:solidFill>
-                <a:latin typeface="Tahoma"/>
-                <a:cs typeface="Tahoma"/>
+                <a:latin typeface="Vazirmatn"/>
+                <a:cs typeface="Vazirmatn"/>
               </a:rPr>
               <a:t>رابطه Face و Path تعیین می‌کند توپ مستقیم، Fade، Draw، Slice یا Hook برود.</a:t>
             </a:r>
@@ -31344,7 +31890,7 @@
         <p:spPr>
           <a:xfrm>
             <a:off x="502920" y="6400800"/>
-            <a:ext cx="5486400" cy="320040"/>
+            <a:ext cx="6858000" cy="320040"/>
           </a:xfrm>
           <a:prstGeom prst="rect">
             <a:avLst/>
@@ -31369,14 +31915,24 @@
               </a:spcAft>
             </a:pPr>
             <a:r>
+              <a:rPr sz="1100" b="1" i="0">
+                <a:solidFill>
+                  <a:srgbClr val="EF6C00"/>
+                </a:solidFill>
+                <a:latin typeface="Vazirmatn"/>
+                <a:cs typeface="Vazirmatn"/>
+              </a:rPr>
+              <a:t>⛳ Puttclub</a:t>
+            </a:r>
+            <a:r>
               <a:rPr sz="1000" b="0" i="0">
                 <a:solidFill>
                   <a:srgbClr val="5C6B62"/>
                 </a:solidFill>
-                <a:latin typeface="Tahoma"/>
-                <a:cs typeface="Tahoma"/>
-              </a:rPr>
-              <a:t>Golf Academy  ·  Semi-Advanced · Level 3</a:t>
+                <a:latin typeface="Vazirmatn"/>
+                <a:cs typeface="Vazirmatn"/>
+              </a:rPr>
+              <a:t>   ·   Semi-Advanced · Level 3</a:t>
             </a:r>
           </a:p>
         </p:txBody>
@@ -31419,8 +31975,8 @@
                 <a:solidFill>
                   <a:srgbClr val="EF6C00"/>
                 </a:solidFill>
-                <a:latin typeface="Tahoma"/>
-                <a:cs typeface="Tahoma"/>
+                <a:latin typeface="Vazirmatn"/>
+                <a:cs typeface="Vazirmatn"/>
               </a:rPr>
               <a:t>6</a:t>
             </a:r>
@@ -31597,8 +32153,8 @@
                 <a:solidFill>
                   <a:srgbClr val="FFFFFF"/>
                 </a:solidFill>
-                <a:latin typeface="Tahoma"/>
-                <a:cs typeface="Tahoma"/>
+                <a:latin typeface="Vazirmatn"/>
+                <a:cs typeface="Vazirmatn"/>
               </a:rPr>
               <a:t>ثبات و تکرارپذیری در Iron</a:t>
             </a:r>
@@ -31687,8 +32243,8 @@
                 <a:solidFill>
                   <a:srgbClr val="EF6C00"/>
                 </a:solidFill>
-                <a:latin typeface="Tahoma"/>
-                <a:cs typeface="Tahoma"/>
+                <a:latin typeface="Vazirmatn"/>
+                <a:cs typeface="Vazirmatn"/>
               </a:rPr>
               <a:t>فصل ۶</a:t>
             </a:r>
@@ -31710,8 +32266,8 @@
                 <a:solidFill>
                   <a:srgbClr val="1F2A24"/>
                 </a:solidFill>
-                <a:latin typeface="Tahoma"/>
-                <a:cs typeface="Tahoma"/>
+                <a:latin typeface="Vazirmatn"/>
+                <a:cs typeface="Vazirmatn"/>
               </a:rPr>
               <a:t>Iron پیشرفته‌تر</a:t>
             </a:r>
@@ -31800,8 +32356,8 @@
                 <a:solidFill>
                   <a:srgbClr val="EF6C00"/>
                 </a:solidFill>
-                <a:latin typeface="Tahoma"/>
-                <a:cs typeface="Tahoma"/>
+                <a:latin typeface="Vazirmatn"/>
+                <a:cs typeface="Vazirmatn"/>
               </a:rPr>
               <a:t>●  </a:t>
             </a:r>
@@ -31810,8 +32366,8 @@
                 <a:solidFill>
                   <a:srgbClr val="1F2A24"/>
                 </a:solidFill>
-                <a:latin typeface="Tahoma"/>
-                <a:cs typeface="Tahoma"/>
+                <a:latin typeface="Vazirmatn"/>
+                <a:cs typeface="Vazirmatn"/>
               </a:rPr>
               <a:t>در این سطح Iron فقط برای «زدن توپ» نیست</a:t>
             </a:r>
@@ -31833,8 +32389,8 @@
                 <a:solidFill>
                   <a:srgbClr val="EF6C00"/>
                 </a:solidFill>
-                <a:latin typeface="Tahoma"/>
-                <a:cs typeface="Tahoma"/>
+                <a:latin typeface="Vazirmatn"/>
+                <a:cs typeface="Vazirmatn"/>
               </a:rPr>
               <a:t>●  </a:t>
             </a:r>
@@ -31843,8 +32399,8 @@
                 <a:solidFill>
                   <a:srgbClr val="EF6C00"/>
                 </a:solidFill>
-                <a:latin typeface="Tahoma"/>
-                <a:cs typeface="Tahoma"/>
+                <a:latin typeface="Vazirmatn"/>
+                <a:cs typeface="Vazirmatn"/>
               </a:rPr>
               <a:t>چهار هدف</a:t>
             </a:r>
@@ -31853,8 +32409,8 @@
                 <a:solidFill>
                   <a:srgbClr val="1F2A24"/>
                 </a:solidFill>
-                <a:latin typeface="Tahoma"/>
-                <a:cs typeface="Tahoma"/>
+                <a:latin typeface="Vazirmatn"/>
+                <a:cs typeface="Vazirmatn"/>
               </a:rPr>
               <a:t>  —  Distance + Direction + Trajectory + Consistency</a:t>
             </a:r>
@@ -31876,8 +32432,8 @@
                 <a:solidFill>
                   <a:srgbClr val="EF6C00"/>
                 </a:solidFill>
-                <a:latin typeface="Tahoma"/>
-                <a:cs typeface="Tahoma"/>
+                <a:latin typeface="Vazirmatn"/>
+                <a:cs typeface="Vazirmatn"/>
               </a:rPr>
               <a:t>●  </a:t>
             </a:r>
@@ -31886,8 +32442,8 @@
                 <a:solidFill>
                   <a:srgbClr val="EF6C00"/>
                 </a:solidFill>
-                <a:latin typeface="Tahoma"/>
-                <a:cs typeface="Tahoma"/>
+                <a:latin typeface="Vazirmatn"/>
+                <a:cs typeface="Vazirmatn"/>
               </a:rPr>
               <a:t>تمرین Distance Control</a:t>
             </a:r>
@@ -31896,8 +32452,8 @@
                 <a:solidFill>
                   <a:srgbClr val="1F2A24"/>
                 </a:solidFill>
-                <a:latin typeface="Tahoma"/>
-                <a:cs typeface="Tahoma"/>
+                <a:latin typeface="Vazirmatn"/>
+                <a:cs typeface="Vazirmatn"/>
               </a:rPr>
               <a:t>  —  با یک کلاب (مثلاً 7 Iron) ۱۰ ضربه</a:t>
             </a:r>
@@ -31919,8 +32475,8 @@
                 <a:solidFill>
                   <a:srgbClr val="EF6C00"/>
                 </a:solidFill>
-                <a:latin typeface="Tahoma"/>
-                <a:cs typeface="Tahoma"/>
+                <a:latin typeface="Vazirmatn"/>
+                <a:cs typeface="Vazirmatn"/>
               </a:rPr>
               <a:t>●  </a:t>
             </a:r>
@@ -31929,8 +32485,8 @@
                 <a:solidFill>
                   <a:srgbClr val="1F2A24"/>
                 </a:solidFill>
-                <a:latin typeface="Tahoma"/>
-                <a:cs typeface="Tahoma"/>
+                <a:latin typeface="Vazirmatn"/>
+                <a:cs typeface="Vazirmatn"/>
               </a:rPr>
               <a:t>به‌جای دورترین توپ، میانگین و پراکندگی را بررسی کنید</a:t>
             </a:r>
@@ -31952,8 +32508,8 @@
                 <a:solidFill>
                   <a:srgbClr val="EF6C00"/>
                 </a:solidFill>
-                <a:latin typeface="Tahoma"/>
-                <a:cs typeface="Tahoma"/>
+                <a:latin typeface="Vazirmatn"/>
+                <a:cs typeface="Vazirmatn"/>
               </a:rPr>
               <a:t>●  </a:t>
             </a:r>
@@ -31962,8 +32518,8 @@
                 <a:solidFill>
                   <a:srgbClr val="EF6C00"/>
                 </a:solidFill>
-                <a:latin typeface="Tahoma"/>
-                <a:cs typeface="Tahoma"/>
+                <a:latin typeface="Vazirmatn"/>
+                <a:cs typeface="Vazirmatn"/>
               </a:rPr>
               <a:t>مثال</a:t>
             </a:r>
@@ -31972,8 +32528,8 @@
                 <a:solidFill>
                   <a:srgbClr val="1F2A24"/>
                 </a:solidFill>
-                <a:latin typeface="Tahoma"/>
-                <a:cs typeface="Tahoma"/>
+                <a:latin typeface="Vazirmatn"/>
+                <a:cs typeface="Vazirmatn"/>
               </a:rPr>
               <a:t>  —  میانگین Carry ۱۳۵ متر اما پراکندگی ۱۱۵ تا ۱۵۰</a:t>
             </a:r>
@@ -31995,8 +32551,8 @@
                 <a:solidFill>
                   <a:srgbClr val="EF6C00"/>
                 </a:solidFill>
-                <a:latin typeface="Tahoma"/>
-                <a:cs typeface="Tahoma"/>
+                <a:latin typeface="Vazirmatn"/>
+                <a:cs typeface="Vazirmatn"/>
               </a:rPr>
               <a:t>●  </a:t>
             </a:r>
@@ -32005,8 +32561,8 @@
                 <a:solidFill>
                   <a:srgbClr val="1F2A24"/>
                 </a:solidFill>
-                <a:latin typeface="Tahoma"/>
-                <a:cs typeface="Tahoma"/>
+                <a:latin typeface="Vazirmatn"/>
+                <a:cs typeface="Vazirmatn"/>
               </a:rPr>
               <a:t>پراکندگی زیاد یعنی کنترل فاصله هنوز مناسب نیست</a:t>
             </a:r>
@@ -32141,8 +32697,8 @@
                 <a:solidFill>
                   <a:srgbClr val="EF6C00"/>
                 </a:solidFill>
-                <a:latin typeface="Tahoma"/>
-                <a:cs typeface="Tahoma"/>
+                <a:latin typeface="Vazirmatn"/>
+                <a:cs typeface="Vazirmatn"/>
               </a:rPr>
               <a:t>نکته مربی:  </a:t>
             </a:r>
@@ -32151,8 +32707,8 @@
                 <a:solidFill>
                   <a:srgbClr val="1F2A24"/>
                 </a:solidFill>
-                <a:latin typeface="Tahoma"/>
-                <a:cs typeface="Tahoma"/>
+                <a:latin typeface="Vazirmatn"/>
+                <a:cs typeface="Vazirmatn"/>
               </a:rPr>
               <a:t>بازیکن قابل‌اعتماد کسی است که پراکندگی کم دارد، نه کسی که یک ضربه خیلی دور می‌زند.</a:t>
             </a:r>
@@ -32168,7 +32724,7 @@
         <p:spPr>
           <a:xfrm>
             <a:off x="502920" y="6400800"/>
-            <a:ext cx="5486400" cy="320040"/>
+            <a:ext cx="6858000" cy="320040"/>
           </a:xfrm>
           <a:prstGeom prst="rect">
             <a:avLst/>
@@ -32193,14 +32749,24 @@
               </a:spcAft>
             </a:pPr>
             <a:r>
+              <a:rPr sz="1100" b="1" i="0">
+                <a:solidFill>
+                  <a:srgbClr val="EF6C00"/>
+                </a:solidFill>
+                <a:latin typeface="Vazirmatn"/>
+                <a:cs typeface="Vazirmatn"/>
+              </a:rPr>
+              <a:t>⛳ Puttclub</a:t>
+            </a:r>
+            <a:r>
               <a:rPr sz="1000" b="0" i="0">
                 <a:solidFill>
                   <a:srgbClr val="5C6B62"/>
                 </a:solidFill>
-                <a:latin typeface="Tahoma"/>
-                <a:cs typeface="Tahoma"/>
-              </a:rPr>
-              <a:t>Golf Academy  ·  Semi-Advanced · Level 3</a:t>
+                <a:latin typeface="Vazirmatn"/>
+                <a:cs typeface="Vazirmatn"/>
+              </a:rPr>
+              <a:t>   ·   Semi-Advanced · Level 3</a:t>
             </a:r>
           </a:p>
         </p:txBody>
@@ -32243,8 +32809,8 @@
                 <a:solidFill>
                   <a:srgbClr val="EF6C00"/>
                 </a:solidFill>
-                <a:latin typeface="Tahoma"/>
-                <a:cs typeface="Tahoma"/>
+                <a:latin typeface="Vazirmatn"/>
+                <a:cs typeface="Vazirmatn"/>
               </a:rPr>
               <a:t>7</a:t>
             </a:r>
@@ -32395,8 +32961,8 @@
                 <a:solidFill>
                   <a:srgbClr val="EF6C00"/>
                 </a:solidFill>
-                <a:latin typeface="Tahoma"/>
-                <a:cs typeface="Tahoma"/>
+                <a:latin typeface="Vazirmatn"/>
+                <a:cs typeface="Vazirmatn"/>
               </a:rPr>
               <a:t>فصل ۷</a:t>
             </a:r>
@@ -32418,8 +32984,8 @@
                 <a:solidFill>
                   <a:srgbClr val="1F2A24"/>
                 </a:solidFill>
-                <a:latin typeface="Tahoma"/>
-                <a:cs typeface="Tahoma"/>
+                <a:latin typeface="Vazirmatn"/>
+                <a:cs typeface="Vazirmatn"/>
               </a:rPr>
               <a:t>سه اندازه Swing</a:t>
             </a:r>
@@ -32598,8 +33164,8 @@
                 <a:solidFill>
                   <a:srgbClr val="EF6C00"/>
                 </a:solidFill>
-                <a:latin typeface="Tahoma"/>
-                <a:cs typeface="Tahoma"/>
+                <a:latin typeface="Vazirmatn"/>
+                <a:cs typeface="Vazirmatn"/>
               </a:rPr>
               <a:t>Half Swing</a:t>
             </a:r>
@@ -32621,8 +33187,8 @@
                 <a:solidFill>
                   <a:srgbClr val="5C6B62"/>
                 </a:solidFill>
-                <a:latin typeface="Tahoma"/>
-                <a:cs typeface="Tahoma"/>
+                <a:latin typeface="Vazirmatn"/>
+                <a:cs typeface="Vazirmatn"/>
               </a:rPr>
               <a:t>حرکت کوتاه و کنترل‌شده برای فاصله کمتر</a:t>
             </a:r>
@@ -32757,8 +33323,8 @@
                 <a:solidFill>
                   <a:srgbClr val="EF6C00"/>
                 </a:solidFill>
-                <a:latin typeface="Tahoma"/>
-                <a:cs typeface="Tahoma"/>
+                <a:latin typeface="Vazirmatn"/>
+                <a:cs typeface="Vazirmatn"/>
               </a:rPr>
               <a:t>Three-Quarter</a:t>
             </a:r>
@@ -32780,8 +33346,8 @@
                 <a:solidFill>
                   <a:srgbClr val="5C6B62"/>
                 </a:solidFill>
-                <a:latin typeface="Tahoma"/>
-                <a:cs typeface="Tahoma"/>
+                <a:latin typeface="Vazirmatn"/>
+                <a:cs typeface="Vazirmatn"/>
               </a:rPr>
               <a:t>حرکت متوسط برای فاصله میانی</a:t>
             </a:r>
@@ -32916,8 +33482,8 @@
                 <a:solidFill>
                   <a:srgbClr val="EF6C00"/>
                 </a:solidFill>
-                <a:latin typeface="Tahoma"/>
-                <a:cs typeface="Tahoma"/>
+                <a:latin typeface="Vazirmatn"/>
+                <a:cs typeface="Vazirmatn"/>
               </a:rPr>
               <a:t>Full Swing</a:t>
             </a:r>
@@ -32939,8 +33505,8 @@
                 <a:solidFill>
                   <a:srgbClr val="5C6B62"/>
                 </a:solidFill>
-                <a:latin typeface="Tahoma"/>
-                <a:cs typeface="Tahoma"/>
+                <a:latin typeface="Vazirmatn"/>
+                <a:cs typeface="Vazirmatn"/>
               </a:rPr>
               <a:t>Swing کامل برای فاصله بیشتر</a:t>
             </a:r>
@@ -33031,8 +33597,8 @@
                 <a:solidFill>
                   <a:srgbClr val="FFFFFF"/>
                 </a:solidFill>
-                <a:latin typeface="Tahoma"/>
-                <a:cs typeface="Tahoma"/>
+                <a:latin typeface="Vazirmatn"/>
+                <a:cs typeface="Vazirmatn"/>
               </a:rPr>
               <a:t>تغییر طول Swing یکی از اصلی‌ترین ابزارهای کنترل فاصله در Short و Mid Game است.</a:t>
             </a:r>
@@ -33048,7 +33614,7 @@
         <p:spPr>
           <a:xfrm>
             <a:off x="502920" y="6400800"/>
-            <a:ext cx="5486400" cy="320040"/>
+            <a:ext cx="6858000" cy="320040"/>
           </a:xfrm>
           <a:prstGeom prst="rect">
             <a:avLst/>
@@ -33073,14 +33639,24 @@
               </a:spcAft>
             </a:pPr>
             <a:r>
+              <a:rPr sz="1100" b="1" i="0">
+                <a:solidFill>
+                  <a:srgbClr val="EF6C00"/>
+                </a:solidFill>
+                <a:latin typeface="Vazirmatn"/>
+                <a:cs typeface="Vazirmatn"/>
+              </a:rPr>
+              <a:t>⛳ Puttclub</a:t>
+            </a:r>
+            <a:r>
               <a:rPr sz="1000" b="0" i="0">
                 <a:solidFill>
                   <a:srgbClr val="5C6B62"/>
                 </a:solidFill>
-                <a:latin typeface="Tahoma"/>
-                <a:cs typeface="Tahoma"/>
-              </a:rPr>
-              <a:t>Golf Academy  ·  Semi-Advanced · Level 3</a:t>
+                <a:latin typeface="Vazirmatn"/>
+                <a:cs typeface="Vazirmatn"/>
+              </a:rPr>
+              <a:t>   ·   Semi-Advanced · Level 3</a:t>
             </a:r>
           </a:p>
         </p:txBody>
@@ -33123,8 +33699,8 @@
                 <a:solidFill>
                   <a:srgbClr val="EF6C00"/>
                 </a:solidFill>
-                <a:latin typeface="Tahoma"/>
-                <a:cs typeface="Tahoma"/>
+                <a:latin typeface="Vazirmatn"/>
+                <a:cs typeface="Vazirmatn"/>
               </a:rPr>
               <a:t>8</a:t>
             </a:r>
@@ -33275,8 +33851,8 @@
                 <a:solidFill>
                   <a:srgbClr val="EF6C00"/>
                 </a:solidFill>
-                <a:latin typeface="Tahoma"/>
-                <a:cs typeface="Tahoma"/>
+                <a:latin typeface="Vazirmatn"/>
+                <a:cs typeface="Vazirmatn"/>
               </a:rPr>
               <a:t>فصل ۸</a:t>
             </a:r>
@@ -33298,8 +33874,8 @@
                 <a:solidFill>
                   <a:srgbClr val="1F2A24"/>
                 </a:solidFill>
-                <a:latin typeface="Tahoma"/>
-                <a:cs typeface="Tahoma"/>
+                <a:latin typeface="Vazirmatn"/>
+                <a:cs typeface="Vazirmatn"/>
               </a:rPr>
               <a:t>کنترل ارتفاع توپ (Trajectory)</a:t>
             </a:r>
@@ -33478,8 +34054,8 @@
                 <a:solidFill>
                   <a:srgbClr val="EF6C00"/>
                 </a:solidFill>
-                <a:latin typeface="Tahoma"/>
-                <a:cs typeface="Tahoma"/>
+                <a:latin typeface="Vazirmatn"/>
+                <a:cs typeface="Vazirmatn"/>
               </a:rPr>
               <a:t>High Shot</a:t>
             </a:r>
@@ -33501,8 +34077,8 @@
                 <a:solidFill>
                   <a:srgbClr val="5C6B62"/>
                 </a:solidFill>
-                <a:latin typeface="Tahoma"/>
-                <a:cs typeface="Tahoma"/>
+                <a:latin typeface="Vazirmatn"/>
+                <a:cs typeface="Vazirmatn"/>
               </a:rPr>
               <a:t>برای پرواز بلندتر، توقف سریع یا عبور از مانع</a:t>
             </a:r>
@@ -33637,8 +34213,8 @@
                 <a:solidFill>
                   <a:srgbClr val="EF6C00"/>
                 </a:solidFill>
-                <a:latin typeface="Tahoma"/>
-                <a:cs typeface="Tahoma"/>
+                <a:latin typeface="Vazirmatn"/>
+                <a:cs typeface="Vazirmatn"/>
               </a:rPr>
               <a:t>Low Shot</a:t>
             </a:r>
@@ -33660,8 +34236,8 @@
                 <a:solidFill>
                   <a:srgbClr val="5C6B62"/>
                 </a:solidFill>
-                <a:latin typeface="Tahoma"/>
-                <a:cs typeface="Tahoma"/>
+                <a:latin typeface="Vazirmatn"/>
+                <a:cs typeface="Vazirmatn"/>
               </a:rPr>
               <a:t>برای باد شدید، موانع خاص و کنترل مسیر</a:t>
             </a:r>
@@ -33796,8 +34372,8 @@
                 <a:solidFill>
                   <a:srgbClr val="EF6C00"/>
                 </a:solidFill>
-                <a:latin typeface="Tahoma"/>
-                <a:cs typeface="Tahoma"/>
+                <a:latin typeface="Vazirmatn"/>
+                <a:cs typeface="Vazirmatn"/>
               </a:rPr>
               <a:t>Medium</a:t>
             </a:r>
@@ -33819,8 +34395,8 @@
                 <a:solidFill>
                   <a:srgbClr val="5C6B62"/>
                 </a:solidFill>
-                <a:latin typeface="Tahoma"/>
-                <a:cs typeface="Tahoma"/>
+                <a:latin typeface="Vazirmatn"/>
+                <a:cs typeface="Vazirmatn"/>
               </a:rPr>
               <a:t>مسیر استاندارد بازی</a:t>
             </a:r>
@@ -33911,8 +34487,8 @@
                 <a:solidFill>
                   <a:srgbClr val="FFFFFF"/>
                 </a:solidFill>
-                <a:latin typeface="Tahoma"/>
-                <a:cs typeface="Tahoma"/>
+                <a:latin typeface="Vazirmatn"/>
+                <a:cs typeface="Vazirmatn"/>
               </a:rPr>
               <a:t>در این مرحله هدف درک رابطه Loft، Setup، Swing و Trajectory است، نه تسلط کامل بر Shotهای تخصصی.</a:t>
             </a:r>
@@ -33928,7 +34504,7 @@
         <p:spPr>
           <a:xfrm>
             <a:off x="502920" y="6400800"/>
-            <a:ext cx="5486400" cy="320040"/>
+            <a:ext cx="6858000" cy="320040"/>
           </a:xfrm>
           <a:prstGeom prst="rect">
             <a:avLst/>
@@ -33953,14 +34529,24 @@
               </a:spcAft>
             </a:pPr>
             <a:r>
+              <a:rPr sz="1100" b="1" i="0">
+                <a:solidFill>
+                  <a:srgbClr val="EF6C00"/>
+                </a:solidFill>
+                <a:latin typeface="Vazirmatn"/>
+                <a:cs typeface="Vazirmatn"/>
+              </a:rPr>
+              <a:t>⛳ Puttclub</a:t>
+            </a:r>
+            <a:r>
               <a:rPr sz="1000" b="0" i="0">
                 <a:solidFill>
                   <a:srgbClr val="5C6B62"/>
                 </a:solidFill>
-                <a:latin typeface="Tahoma"/>
-                <a:cs typeface="Tahoma"/>
-              </a:rPr>
-              <a:t>Golf Academy  ·  Semi-Advanced · Level 3</a:t>
+                <a:latin typeface="Vazirmatn"/>
+                <a:cs typeface="Vazirmatn"/>
+              </a:rPr>
+              <a:t>   ·   Semi-Advanced · Level 3</a:t>
             </a:r>
           </a:p>
         </p:txBody>
@@ -34003,8 +34589,8 @@
                 <a:solidFill>
                   <a:srgbClr val="EF6C00"/>
                 </a:solidFill>
-                <a:latin typeface="Tahoma"/>
-                <a:cs typeface="Tahoma"/>
+                <a:latin typeface="Vazirmatn"/>
+                <a:cs typeface="Vazirmatn"/>
               </a:rPr>
               <a:t>9</a:t>
             </a:r>
